--- a/deck/PRD_Genie_Capstone_Deck.pptx
+++ b/deck/PRD_Genie_Capstone_Deck.pptx
@@ -4,6 +4,9 @@
   <p:sldMasterIdLst>
     <p:sldMasterId id="2147483648" r:id="rId1"/>
   </p:sldMasterIdLst>
+  <p:notesMasterIdLst>
+    <p:notesMasterId r:id="rId12"/>
+  </p:notesMasterIdLst>
   <p:sldIdLst>
     <p:sldId id="256" r:id="rId2"/>
     <p:sldId id="257" r:id="rId3"/>
@@ -16,9 +19,6 @@
     <p:sldId id="264" r:id="rId10"/>
     <p:sldId id="265" r:id="rId11"/>
   </p:sldIdLst>
-  <p:notesMasterIdLst>
-    <p:notesMasterId r:id="rId12"/>
-  </p:notesMasterIdLst>
   <p:sldSz cx="12192000" cy="6858000"/>
   <p:notesSz cx="6858000" cy="12192000"/>
   <p:defaultTextStyle>
@@ -116,28 +116,28 @@
   <p:extLst>
     <p:ext uri="{521415D9-36F7-43E2-AB2F-B90AF26B5E84}">
       <p14:sectionLst xmlns:p14="http://schemas.microsoft.com/office/powerpoint/2010/main">
-        <p14:section name="Intro" id="{4a0fdbc2-1085-cf9f-1f99-c4bbe2778157}">
+        <p14:section name="Intro" id="{4A0FDBC2-1085-CF9F-1F99-C4BBE2778157}">
           <p14:sldIdLst>
             <p14:sldId id="256"/>
             <p14:sldId id="257"/>
             <p14:sldId id="258"/>
           </p14:sldIdLst>
         </p14:section>
-        <p14:section name="Build" id="{30b943a6-e8b5-54cb-6b18-7b74da6d3a09}">
+        <p14:section name="Build" id="{30B943A6-E8B5-54CB-6B18-7B74DA6D3A09}">
           <p14:sldIdLst>
             <p14:sldId id="259"/>
             <p14:sldId id="260"/>
             <p14:sldId id="261"/>
           </p14:sldIdLst>
         </p14:section>
-        <p14:section name="Proof" id="{34c90005-179e-c825-0261-4216feb0c443}">
+        <p14:section name="Proof" id="{34C90005-179E-C825-0261-4216FEB0C443}">
           <p14:sldIdLst>
             <p14:sldId id="262"/>
             <p14:sldId id="263"/>
             <p14:sldId id="264"/>
           </p14:sldIdLst>
         </p14:section>
-        <p14:section name="Close" id="{5a8077af-b1ff-ee28-c306-d505d2894c82}">
+        <p14:section name="Close" id="{5A8077AF-B1FF-EE28-C306-D505D2894C82}">
           <p14:sldIdLst>
             <p14:sldId id="265"/>
           </p14:sldIdLst>
@@ -173,234 +173,10 @@
           <a:chExt cx="0" cy="0"/>
         </a:xfrm>
       </p:grpSpPr>
-      <p:sp>
-        <p:nvSpPr>
-          <p:cNvPr id="2" name="Header Placeholder 1"/>
-          <p:cNvSpPr>
-            <a:spLocks noGrp="1"/>
-          </p:cNvSpPr>
-          <p:nvPr>
-            <p:ph type="hdr" sz="quarter"/>
-          </p:nvPr>
-        </p:nvSpPr>
-        <p:spPr>
-          <a:xfrm>
-            <a:off x="0" y="0"/>
-            <a:ext cx="2971800" cy="458788"/>
-          </a:xfrm>
-          <a:prstGeom prst="rect">
-            <a:avLst/>
-          </a:prstGeom>
-        </p:spPr>
-        <p:txBody>
-          <a:bodyPr vert="horz" lIns="91440" tIns="45720" rIns="91440" bIns="45720" rtlCol="0"/>
-          <a:lstStyle>
-            <a:lvl1pPr algn="l">
-              <a:defRPr sz="1200"/>
-            </a:lvl1pPr>
-          </a:lstStyle>
-          <a:p>
-            <a:endParaRPr lang="en-US"/>
-          </a:p>
-        </p:txBody>
-      </p:sp>
-      <p:sp>
-        <p:nvSpPr>
-          <p:cNvPr id="3" name="Date Placeholder 2"/>
-          <p:cNvSpPr>
-            <a:spLocks noGrp="1"/>
-          </p:cNvSpPr>
-          <p:nvPr>
-            <p:ph type="dt" idx="1"/>
-          </p:nvPr>
-        </p:nvSpPr>
-        <p:spPr>
-          <a:xfrm>
-            <a:off x="3884613" y="0"/>
-            <a:ext cx="2971800" cy="458788"/>
-          </a:xfrm>
-          <a:prstGeom prst="rect">
-            <a:avLst/>
-          </a:prstGeom>
-        </p:spPr>
-        <p:txBody>
-          <a:bodyPr vert="horz" lIns="91440" tIns="45720" rIns="91440" bIns="45720" rtlCol="0"/>
-          <a:lstStyle>
-            <a:lvl1pPr algn="r">
-              <a:defRPr sz="1200"/>
-            </a:lvl1pPr>
-          </a:lstStyle>
-          <a:p>
-            <a:fld id="{5282F153-3F37-0F45-9E97-73ACFA13230C}" type="datetimeFigureOut">
-              <a:rPr lang="en-US"/>
-              <a:t>7/23/19</a:t>
-            </a:fld>
-            <a:endParaRPr lang="en-US"/>
-          </a:p>
-        </p:txBody>
-      </p:sp>
-      <p:sp>
-        <p:nvSpPr>
-          <p:cNvPr id="4" name="Slide Image Placeholder 3"/>
-          <p:cNvSpPr>
-            <a:spLocks noGrp="1" noRot="1" noChangeAspect="1"/>
-          </p:cNvSpPr>
-          <p:nvPr>
-            <p:ph type="sldImg" idx="2"/>
-          </p:nvPr>
-        </p:nvSpPr>
-        <p:spPr>
-          <a:xfrm>
-            <a:off x="685800" y="1143000"/>
-            <a:ext cx="5486400" cy="3086100"/>
-          </a:xfrm>
-          <a:prstGeom prst="rect">
-            <a:avLst/>
-          </a:prstGeom>
-          <a:noFill/>
-          <a:ln w="12700">
-            <a:solidFill>
-              <a:prstClr val="black"/>
-            </a:solidFill>
-          </a:ln>
-        </p:spPr>
-        <p:txBody>
-          <a:bodyPr vert="horz" lIns="91440" tIns="45720" rIns="91440" bIns="45720" rtlCol="0" anchor="ctr"/>
-          <a:lstStyle/>
-          <a:p>
-            <a:endParaRPr lang="en-US"/>
-          </a:p>
-        </p:txBody>
-      </p:sp>
-      <p:sp>
-        <p:nvSpPr>
-          <p:cNvPr id="5" name="Notes Placeholder 4"/>
-          <p:cNvSpPr>
-            <a:spLocks noGrp="1"/>
-          </p:cNvSpPr>
-          <p:nvPr>
-            <p:ph type="body" sz="quarter" idx="3"/>
-          </p:nvPr>
-        </p:nvSpPr>
-        <p:spPr>
-          <a:xfrm>
-            <a:off x="685800" y="4400550"/>
-            <a:ext cx="5486400" cy="3600450"/>
-          </a:xfrm>
-          <a:prstGeom prst="rect">
-            <a:avLst/>
-          </a:prstGeom>
-        </p:spPr>
-        <p:txBody>
-          <a:bodyPr vert="horz" lIns="91440" tIns="45720" rIns="91440" bIns="45720" rtlCol="0"/>
-          <a:lstStyle/>
-          <a:p>
-            <a:pPr lvl="0"/>
-            <a:r>
-              <a:rPr lang="en-US"/>
-              <a:t>Click to edit Master text styles</a:t>
-            </a:r>
-          </a:p>
-          <a:p>
-            <a:pPr lvl="1"/>
-            <a:r>
-              <a:rPr lang="en-US"/>
-              <a:t>Second level</a:t>
-            </a:r>
-          </a:p>
-          <a:p>
-            <a:pPr lvl="2"/>
-            <a:r>
-              <a:rPr lang="en-US"/>
-              <a:t>Third level</a:t>
-            </a:r>
-          </a:p>
-          <a:p>
-            <a:pPr lvl="3"/>
-            <a:r>
-              <a:rPr lang="en-US"/>
-              <a:t>Fourth level</a:t>
-            </a:r>
-          </a:p>
-          <a:p>
-            <a:pPr lvl="4"/>
-            <a:r>
-              <a:rPr lang="en-US"/>
-              <a:t>Fifth level</a:t>
-            </a:r>
-          </a:p>
-        </p:txBody>
-      </p:sp>
-      <p:sp>
-        <p:nvSpPr>
-          <p:cNvPr id="6" name="Footer Placeholder 5"/>
-          <p:cNvSpPr>
-            <a:spLocks noGrp="1"/>
-          </p:cNvSpPr>
-          <p:nvPr>
-            <p:ph type="ftr" sz="quarter" idx="4"/>
-          </p:nvPr>
-        </p:nvSpPr>
-        <p:spPr>
-          <a:xfrm>
-            <a:off x="0" y="8685213"/>
-            <a:ext cx="2971800" cy="458787"/>
-          </a:xfrm>
-          <a:prstGeom prst="rect">
-            <a:avLst/>
-          </a:prstGeom>
-        </p:spPr>
-        <p:txBody>
-          <a:bodyPr vert="horz" lIns="91440" tIns="45720" rIns="91440" bIns="45720" rtlCol="0" anchor="b"/>
-          <a:lstStyle>
-            <a:lvl1pPr algn="l">
-              <a:defRPr sz="1200"/>
-            </a:lvl1pPr>
-          </a:lstStyle>
-          <a:p>
-            <a:endParaRPr lang="en-US"/>
-          </a:p>
-        </p:txBody>
-      </p:sp>
-      <p:sp>
-        <p:nvSpPr>
-          <p:cNvPr id="7" name="Slide Number Placeholder 6"/>
-          <p:cNvSpPr>
-            <a:spLocks noGrp="1"/>
-          </p:cNvSpPr>
-          <p:nvPr>
-            <p:ph type="sldNum" sz="quarter" idx="5"/>
-          </p:nvPr>
-        </p:nvSpPr>
-        <p:spPr>
-          <a:xfrm>
-            <a:off x="3884613" y="8685213"/>
-            <a:ext cx="2971800" cy="458787"/>
-          </a:xfrm>
-          <a:prstGeom prst="rect">
-            <a:avLst/>
-          </a:prstGeom>
-        </p:spPr>
-        <p:txBody>
-          <a:bodyPr vert="horz" lIns="91440" tIns="45720" rIns="91440" bIns="45720" rtlCol="0" anchor="b"/>
-          <a:lstStyle>
-            <a:lvl1pPr algn="r">
-              <a:defRPr sz="1200"/>
-            </a:lvl1pPr>
-          </a:lstStyle>
-          <a:p>
-            <a:fld id="{CE5E9CC1-C706-0F49-92D6-E571CC5EEA8F}" type="slidenum">
-              <a:rPr lang="en-US"/>
-              <a:t>‹#›</a:t>
-            </a:fld>
-            <a:endParaRPr lang="en-US"/>
-          </a:p>
-        </p:txBody>
-      </p:sp>
     </p:spTree>
     <p:extLst>
       <p:ext uri="{BB962C8B-B14F-4D97-AF65-F5344CB8AC3E}">
-        <p14:creationId xmlns:p14="http://schemas.microsoft.com/office/powerpoint/2010/main" val="1024086991"/>
+        <p14:creationId xmlns:p14="http://schemas.microsoft.com/office/powerpoint/2010/main" val="978842937"/>
       </p:ext>
     </p:extLst>
   </p:cSld>
@@ -548,7 +324,6 @@
               <a:rPr lang="en-US" dirty="0"/>
               <a:t>About 10 seconds. Introduce yourself and the one-line pitch: PRD Genie reads meeting notes and produces PRDs, epics and stories, and refuses to invent what the notes do not say.</a:t>
             </a:r>
-            <a:endParaRPr lang="en-US" dirty="0"/>
           </a:p>
         </p:txBody>
       </p:sp>
@@ -636,7 +411,6 @@
               <a:rPr lang="en-US" dirty="0"/>
               <a:t>About 25 seconds. Close with the honest limits, then the next steps. Langfuse's old ingestion endpoint stops accepting traces on 16 November 2026, so the tracing migration is the dated item. End on the repo link.</a:t>
             </a:r>
-            <a:endParaRPr lang="en-US" dirty="0"/>
           </a:p>
         </p:txBody>
       </p:sp>
@@ -724,7 +498,6 @@
               <a:rPr lang="en-US" dirty="0"/>
               <a:t>About 25 seconds. These four pain points come straight from the project brief: manual scope gathering, manual PRDs, inconsistent formats, and notes nobody revisits.</a:t>
             </a:r>
-            <a:endParaRPr lang="en-US" dirty="0"/>
           </a:p>
         </p:txBody>
       </p:sp>
@@ -812,7 +585,6 @@
               <a:rPr lang="en-US" dirty="0"/>
               <a:t>About 25 seconds. Input on the left, outputs on the right. The key promise: when the notes are thin, PRD Genie asks questions instead of filling in blanks.</a:t>
             </a:r>
-            <a:endParaRPr lang="en-US" dirty="0"/>
           </a:p>
         </p:txBody>
       </p:sp>
@@ -900,7 +672,6 @@
               <a:rPr lang="en-US" dirty="0"/>
               <a:t>About 45 seconds. Walk left to right. Sequential pattern because every input needs the same stages in the same order. Gap analysis and sizing depend only on the stories, so they run in parallel. Mention the three side systems: the branch for thin input, Pinecone for format, Langfuse for tracing. The full diagram is in the repo.</a:t>
             </a:r>
-            <a:endParaRPr lang="en-US" dirty="0"/>
           </a:p>
         </p:txBody>
       </p:sp>
@@ -988,7 +759,6 @@
               <a:rPr lang="en-US" dirty="0"/>
               <a:t>About 35 seconds. These four controls are why the output can be trusted. Quote requirement plus grounding score is the main anti-hallucination device. Then show the empty-section behaviour, the unresolved conflicts, and the template that only controls format.</a:t>
             </a:r>
-            <a:endParaRPr lang="en-US" dirty="0"/>
           </a:p>
         </p:txBody>
       </p:sp>
@@ -1076,7 +846,6 @@
               <a:rPr lang="en-US" dirty="0"/>
               <a:t>About 60 seconds, and this is the live demo moment. Show the Inbox folder, run the Drive Intake workflow, then open one generated PRD from the Outputs folder and scroll through the PRD, the epics and stories, and the gap analysis.</a:t>
             </a:r>
-            <a:endParaRPr lang="en-US" dirty="0"/>
           </a:p>
         </p:txBody>
       </p:sp>
@@ -1164,7 +933,6 @@
               <a:rPr lang="en-US" dirty="0"/>
               <a:t>About 25 seconds. 12 of 12 on the project brief's baseline set. Be honest that prompts were tuned on these same tests. Point out the history: 9 of 12 on the first run, with failures on T2, T4 and T6, each fixed with a single prompt rule.</a:t>
             </a:r>
-            <a:endParaRPr lang="en-US" dirty="0"/>
           </a:p>
         </p:txBody>
       </p:sp>
@@ -1252,7 +1020,6 @@
               <a:rPr lang="en-US" dirty="0"/>
               <a:t>About 35 seconds. Three real findings from Langfuse. The first two show that traces and scores can look healthy while the output is wrong. The third shows why the regression suite runs on every prompt or model change.</a:t>
             </a:r>
-            <a:endParaRPr lang="en-US" dirty="0"/>
           </a:p>
         </p:txBody>
       </p:sp>
@@ -1340,7 +1107,6 @@
               <a:rPr lang="en-US" dirty="0"/>
               <a:t>About 15 seconds. Roughly half a cent per PRD, from the Langfuse trace. Say that the at-scale figure is an estimate from the per-run number.</a:t>
             </a:r>
-            <a:endParaRPr lang="en-US" dirty="0"/>
           </a:p>
         </p:txBody>
       </p:sp>
@@ -1418,6 +1184,7 @@
         <a:solidFill>
           <a:schemeClr val="bg2"/>
         </a:solidFill>
+        <a:effectLst/>
       </p:bgPr>
     </p:bg>
     <p:spTree>
@@ -1455,7 +1222,7 @@
           <a:bodyPr wrap="square" lIns="0" tIns="0" rIns="0" bIns="0" rtlCol="0" anchor="ctr"/>
           <a:lstStyle/>
           <a:p>
-            <a:pPr indent="0" marL="0">
+            <a:pPr marL="0" indent="0">
               <a:buNone/>
             </a:pPr>
             <a:r>
@@ -1473,9 +1240,11 @@
       <p:sp>
         <p:nvSpPr>
           <p:cNvPr id="3" name="Text 1"/>
-          <p:cNvSpPr/>
+          <p:cNvSpPr>
+            <a:spLocks noGrp="1"/>
+          </p:cNvSpPr>
           <p:nvPr>
-            <p:ph idx="101" type="body" hasCustomPrompt="1"/>
+            <p:ph type="body" idx="101" hasCustomPrompt="1"/>
           </p:nvPr>
         </p:nvSpPr>
         <p:spPr>
@@ -1492,9 +1261,9 @@
         <p:txBody>
           <a:bodyPr wrap="square" rtlCol="0"/>
           <a:lstStyle>
-            <a:lvl1pPr indent="0" marL="0">
-              <a:buNone/>
-              <a:defRPr lang="en-US" sz="1300" b="1" spc="300" kern="0" dirty="0">
+            <a:lvl1pPr marL="0" indent="0">
+              <a:buNone/>
+              <a:defRPr lang="en-US" sz="1300" b="1" kern="0" spc="300" dirty="0">
                 <a:solidFill>
                   <a:schemeClr val="accent1"/>
                 </a:solidFill>
@@ -1502,7 +1271,7 @@
             </a:lvl1pPr>
           </a:lstStyle>
           <a:p>
-            <a:pPr indent="0" marL="0">
+            <a:pPr marL="0" indent="0">
               <a:buNone/>
             </a:pPr>
             <a:endParaRPr lang="en-US" sz="1300" dirty="0"/>
@@ -1512,9 +1281,11 @@
       <p:sp>
         <p:nvSpPr>
           <p:cNvPr id="4" name="Text 1"/>
-          <p:cNvSpPr/>
+          <p:cNvSpPr>
+            <a:spLocks noGrp="1"/>
+          </p:cNvSpPr>
           <p:nvPr>
-            <p:ph idx="102" type="title" hasCustomPrompt="1"/>
+            <p:ph type="title" idx="102" hasCustomPrompt="1"/>
           </p:nvPr>
         </p:nvSpPr>
         <p:spPr>
@@ -1531,7 +1302,7 @@
         <p:txBody>
           <a:bodyPr wrap="square" rtlCol="0"/>
           <a:lstStyle>
-            <a:lvl1pPr algn="l" indent="0" marL="0">
+            <a:lvl1pPr marL="0" indent="0" algn="l">
               <a:buNone/>
               <a:defRPr lang="en-US" sz="3400" b="1" dirty="0">
                 <a:solidFill>
@@ -1541,7 +1312,7 @@
             </a:lvl1pPr>
           </a:lstStyle>
           <a:p>
-            <a:pPr algn="l" indent="0" marL="0">
+            <a:pPr marL="0" indent="0" algn="l">
               <a:buNone/>
             </a:pPr>
             <a:endParaRPr lang="en-US" sz="3400" dirty="0"/>
@@ -1568,7 +1339,7 @@
           </a:prstGeom>
           <a:extLst>
             <a:ext uri="{C572A759-6A51-4108-AA02-DFA0A04FC94B}">
-              <ma14:wrappingTextBoxFlag xmlns:ma14="http://schemas.microsoft.com/office/mac/drawingml/2011/main" val="0"/>
+              <ma14:wrappingTextBoxFlag xmlns:ma14="http://schemas.microsoft.com/office/mac/drawingml/2011/main" xmlns="" val="0"/>
             </a:ext>
           </a:extLst>
         </p:spPr>
@@ -1586,8 +1357,8 @@
           <a:p>
             <a:pPr algn="r"/>
             <a:fld id="{F7021451-1387-4CA6-816F-3879F97B5CBC}" type="slidenum">
-              <a:rPr b="0" lang="en-US"/>
-              <a:t>1002</a:t>
+              <a:rPr lang="en-US" b="0"/>
+              <a:t>‹#›</a:t>
             </a:fld>
             <a:endParaRPr lang="en-US"/>
           </a:p>
@@ -1609,6 +1380,7 @@
         <a:solidFill>
           <a:schemeClr val="tx1"/>
         </a:solidFill>
+        <a:effectLst/>
       </p:bgPr>
     </p:bg>
     <p:spTree>
@@ -1646,7 +1418,7 @@
           <a:bodyPr wrap="square" lIns="0" tIns="0" rIns="0" bIns="0" rtlCol="0" anchor="ctr"/>
           <a:lstStyle/>
           <a:p>
-            <a:pPr indent="0" marL="0">
+            <a:pPr marL="0" indent="0">
               <a:buNone/>
             </a:pPr>
             <a:r>
@@ -1664,9 +1436,11 @@
       <p:sp>
         <p:nvSpPr>
           <p:cNvPr id="3" name="Text 1"/>
-          <p:cNvSpPr/>
+          <p:cNvSpPr>
+            <a:spLocks noGrp="1"/>
+          </p:cNvSpPr>
           <p:nvPr>
-            <p:ph idx="101" type="body" hasCustomPrompt="1"/>
+            <p:ph type="body" idx="101" hasCustomPrompt="1"/>
           </p:nvPr>
         </p:nvSpPr>
         <p:spPr>
@@ -1683,9 +1457,9 @@
         <p:txBody>
           <a:bodyPr wrap="square" rtlCol="0"/>
           <a:lstStyle>
-            <a:lvl1pPr indent="0" marL="0">
-              <a:buNone/>
-              <a:defRPr lang="en-US" sz="1300" b="1" spc="300" kern="0" dirty="0">
+            <a:lvl1pPr marL="0" indent="0">
+              <a:buNone/>
+              <a:defRPr lang="en-US" sz="1300" b="1" kern="0" spc="300" dirty="0">
                 <a:solidFill>
                   <a:schemeClr val="accent2"/>
                 </a:solidFill>
@@ -1693,7 +1467,7 @@
             </a:lvl1pPr>
           </a:lstStyle>
           <a:p>
-            <a:pPr indent="0" marL="0">
+            <a:pPr marL="0" indent="0">
               <a:buNone/>
             </a:pPr>
             <a:endParaRPr lang="en-US" sz="1300" dirty="0"/>
@@ -1703,9 +1477,11 @@
       <p:sp>
         <p:nvSpPr>
           <p:cNvPr id="4" name="Text 1"/>
-          <p:cNvSpPr/>
+          <p:cNvSpPr>
+            <a:spLocks noGrp="1"/>
+          </p:cNvSpPr>
           <p:nvPr>
-            <p:ph idx="102" type="title" hasCustomPrompt="1"/>
+            <p:ph type="title" idx="102" hasCustomPrompt="1"/>
           </p:nvPr>
         </p:nvSpPr>
         <p:spPr>
@@ -1722,7 +1498,7 @@
         <p:txBody>
           <a:bodyPr wrap="square" rtlCol="0"/>
           <a:lstStyle>
-            <a:lvl1pPr algn="l" indent="0" marL="0">
+            <a:lvl1pPr marL="0" indent="0" algn="l">
               <a:buNone/>
               <a:defRPr lang="en-US" sz="3400" b="1" dirty="0">
                 <a:solidFill>
@@ -1732,7 +1508,7 @@
             </a:lvl1pPr>
           </a:lstStyle>
           <a:p>
-            <a:pPr algn="l" indent="0" marL="0">
+            <a:pPr marL="0" indent="0" algn="l">
               <a:buNone/>
             </a:pPr>
             <a:endParaRPr lang="en-US" sz="3400" dirty="0"/>
@@ -1759,7 +1535,7 @@
           </a:prstGeom>
           <a:extLst>
             <a:ext uri="{C572A759-6A51-4108-AA02-DFA0A04FC94B}">
-              <ma14:wrappingTextBoxFlag xmlns:ma14="http://schemas.microsoft.com/office/mac/drawingml/2011/main" val="0"/>
+              <ma14:wrappingTextBoxFlag xmlns:ma14="http://schemas.microsoft.com/office/mac/drawingml/2011/main" xmlns="" val="0"/>
             </a:ext>
           </a:extLst>
         </p:spPr>
@@ -1777,8 +1553,8 @@
           <a:p>
             <a:pPr algn="r"/>
             <a:fld id="{F7021451-1387-4CA6-816F-3879F97B5CBC}" type="slidenum">
-              <a:rPr b="0" lang="en-US"/>
-              <a:t>1003</a:t>
+              <a:rPr lang="en-US" b="0"/>
+              <a:t>‹#›</a:t>
             </a:fld>
             <a:endParaRPr lang="en-US"/>
           </a:p>
@@ -1800,6 +1576,7 @@
         <a:solidFill>
           <a:schemeClr val="tx1"/>
         </a:solidFill>
+        <a:effectLst/>
       </p:bgPr>
     </p:bg>
     <p:spTree>
@@ -1819,9 +1596,11 @@
       <p:sp>
         <p:nvSpPr>
           <p:cNvPr id="2" name="Text 0"/>
-          <p:cNvSpPr/>
+          <p:cNvSpPr>
+            <a:spLocks noGrp="1"/>
+          </p:cNvSpPr>
           <p:nvPr>
-            <p:ph idx="100" type="body" hasCustomPrompt="1"/>
+            <p:ph type="body" idx="100" hasCustomPrompt="1"/>
           </p:nvPr>
         </p:nvSpPr>
         <p:spPr>
@@ -1838,9 +1617,9 @@
         <p:txBody>
           <a:bodyPr wrap="square" rtlCol="0"/>
           <a:lstStyle>
-            <a:lvl1pPr indent="0" marL="0">
-              <a:buNone/>
-              <a:defRPr lang="en-US" sz="1400" b="1" spc="300" kern="0" dirty="0">
+            <a:lvl1pPr marL="0" indent="0">
+              <a:buNone/>
+              <a:defRPr lang="en-US" sz="1400" b="1" kern="0" spc="300" dirty="0">
                 <a:solidFill>
                   <a:schemeClr val="accent2"/>
                 </a:solidFill>
@@ -1848,7 +1627,7 @@
             </a:lvl1pPr>
           </a:lstStyle>
           <a:p>
-            <a:pPr indent="0" marL="0">
+            <a:pPr marL="0" indent="0">
               <a:buNone/>
             </a:pPr>
             <a:endParaRPr lang="en-US" sz="1400" dirty="0"/>
@@ -1858,9 +1637,11 @@
       <p:sp>
         <p:nvSpPr>
           <p:cNvPr id="3" name="Text 0"/>
-          <p:cNvSpPr/>
+          <p:cNvSpPr>
+            <a:spLocks noGrp="1"/>
+          </p:cNvSpPr>
           <p:nvPr>
-            <p:ph idx="101" type="title" hasCustomPrompt="1"/>
+            <p:ph type="title" idx="101" hasCustomPrompt="1"/>
           </p:nvPr>
         </p:nvSpPr>
         <p:spPr>
@@ -1877,7 +1658,7 @@
         <p:txBody>
           <a:bodyPr wrap="square" rtlCol="0"/>
           <a:lstStyle>
-            <a:lvl1pPr algn="l" indent="0" marL="0">
+            <a:lvl1pPr marL="0" indent="0" algn="l">
               <a:buNone/>
               <a:defRPr lang="en-US" sz="7200" b="1" dirty="0">
                 <a:solidFill>
@@ -1887,7 +1668,7 @@
             </a:lvl1pPr>
           </a:lstStyle>
           <a:p>
-            <a:pPr algn="l" indent="0" marL="0">
+            <a:pPr marL="0" indent="0" algn="l">
               <a:buNone/>
             </a:pPr>
             <a:endParaRPr lang="en-US" sz="7200" dirty="0"/>
@@ -1897,9 +1678,11 @@
       <p:sp>
         <p:nvSpPr>
           <p:cNvPr id="4" name="Text 0"/>
-          <p:cNvSpPr/>
+          <p:cNvSpPr>
+            <a:spLocks noGrp="1"/>
+          </p:cNvSpPr>
           <p:nvPr>
-            <p:ph idx="102" type="body" hasCustomPrompt="1"/>
+            <p:ph type="body" idx="102" hasCustomPrompt="1"/>
           </p:nvPr>
         </p:nvSpPr>
         <p:spPr>
@@ -1916,7 +1699,7 @@
         <p:txBody>
           <a:bodyPr wrap="square" rtlCol="0"/>
           <a:lstStyle>
-            <a:lvl1pPr algn="l" indent="0" marL="0">
+            <a:lvl1pPr marL="0" indent="0" algn="l">
               <a:buNone/>
               <a:defRPr lang="en-US" sz="2400" dirty="0">
                 <a:solidFill>
@@ -1926,7 +1709,7 @@
             </a:lvl1pPr>
           </a:lstStyle>
           <a:p>
-            <a:pPr algn="l" indent="0" marL="0">
+            <a:pPr marL="0" indent="0" algn="l">
               <a:buNone/>
             </a:pPr>
             <a:endParaRPr lang="en-US" sz="2400" dirty="0"/>
@@ -1949,6 +1732,7 @@
         <a:solidFill>
           <a:schemeClr val="accent1"/>
         </a:solidFill>
+        <a:effectLst/>
       </p:bgPr>
     </p:bg>
     <p:spTree>
@@ -1986,7 +1770,7 @@
           <a:bodyPr wrap="square" lIns="0" tIns="0" rIns="0" bIns="0" rtlCol="0" anchor="ctr"/>
           <a:lstStyle/>
           <a:p>
-            <a:pPr indent="0" marL="0">
+            <a:pPr marL="0" indent="0">
               <a:buNone/>
             </a:pPr>
             <a:r>
@@ -2004,9 +1788,11 @@
       <p:sp>
         <p:nvSpPr>
           <p:cNvPr id="3" name="Text 1"/>
-          <p:cNvSpPr/>
+          <p:cNvSpPr>
+            <a:spLocks noGrp="1"/>
+          </p:cNvSpPr>
           <p:nvPr>
-            <p:ph idx="101" type="body" hasCustomPrompt="1"/>
+            <p:ph type="body" idx="101" hasCustomPrompt="1"/>
           </p:nvPr>
         </p:nvSpPr>
         <p:spPr>
@@ -2023,9 +1809,9 @@
         <p:txBody>
           <a:bodyPr wrap="square" rtlCol="0"/>
           <a:lstStyle>
-            <a:lvl1pPr indent="0" marL="0">
-              <a:buNone/>
-              <a:defRPr lang="en-US" sz="1300" b="1" spc="300" kern="0" dirty="0">
+            <a:lvl1pPr marL="0" indent="0">
+              <a:buNone/>
+              <a:defRPr lang="en-US" sz="1300" b="1" kern="0" spc="300" dirty="0">
                 <a:solidFill>
                   <a:schemeClr val="bg2"/>
                 </a:solidFill>
@@ -2033,7 +1819,7 @@
             </a:lvl1pPr>
           </a:lstStyle>
           <a:p>
-            <a:pPr indent="0" marL="0">
+            <a:pPr marL="0" indent="0">
               <a:buNone/>
             </a:pPr>
             <a:endParaRPr lang="en-US" sz="1300" dirty="0"/>
@@ -2060,7 +1846,7 @@
           </a:prstGeom>
           <a:extLst>
             <a:ext uri="{C572A759-6A51-4108-AA02-DFA0A04FC94B}">
-              <ma14:wrappingTextBoxFlag xmlns:ma14="http://schemas.microsoft.com/office/mac/drawingml/2011/main" val="0"/>
+              <ma14:wrappingTextBoxFlag xmlns:ma14="http://schemas.microsoft.com/office/mac/drawingml/2011/main" xmlns="" val="0"/>
             </a:ext>
           </a:extLst>
         </p:spPr>
@@ -2078,8 +1864,8 @@
           <a:p>
             <a:pPr algn="r"/>
             <a:fld id="{F7021451-1387-4CA6-816F-3879F97B5CBC}" type="slidenum">
-              <a:rPr b="0" lang="en-US"/>
-              <a:t>1005</a:t>
+              <a:rPr lang="en-US" b="0"/>
+              <a:t>‹#›</a:t>
             </a:fld>
             <a:endParaRPr lang="en-US"/>
           </a:p>
@@ -2096,6 +1882,11 @@
 <file path=ppt/slideMasters/slideMaster1.xml><?xml version="1.0" encoding="utf-8"?>
 <p:sldMaster xmlns:a="http://schemas.openxmlformats.org/drawingml/2006/main" xmlns:r="http://schemas.openxmlformats.org/officeDocument/2006/relationships" xmlns:p="http://schemas.openxmlformats.org/presentationml/2006/main">
   <p:cSld>
+    <p:bg>
+      <p:bgRef idx="1001">
+        <a:schemeClr val="bg1"/>
+      </p:bgRef>
+    </p:bg>
     <p:spTree>
       <p:nvGrpSpPr>
         <p:cNvPr id="1" name=""/>
@@ -2130,7 +1921,7 @@
           </a:prstGeom>
           <a:extLst>
             <a:ext uri="{C572A759-6A51-4108-AA02-DFA0A04FC94B}">
-              <ma14:wrappingTextBoxFlag xmlns:ma14="http://schemas.microsoft.com/office/mac/drawingml/2011/main" val="0"/>
+              <ma14:wrappingTextBoxFlag xmlns:ma14="http://schemas.microsoft.com/office/mac/drawingml/2011/main" xmlns="" val="0"/>
             </a:ext>
           </a:extLst>
         </p:spPr>
@@ -2148,8 +1939,8 @@
           <a:p>
             <a:pPr algn="r"/>
             <a:fld id="{F7021451-1387-4CA6-816F-3879F97B5CBC}" type="slidenum">
-              <a:rPr b="0" lang="en-US"/>
-              <a:t>null</a:t>
+              <a:rPr lang="en-US" b="0"/>
+              <a:t>‹#›</a:t>
             </a:fld>
             <a:endParaRPr lang="en-US"/>
           </a:p>
@@ -2439,9 +2230,11 @@
       <p:sp>
         <p:nvSpPr>
           <p:cNvPr id="2" name="Text 0"/>
-          <p:cNvSpPr/>
+          <p:cNvSpPr>
+            <a:spLocks noGrp="1"/>
+          </p:cNvSpPr>
           <p:nvPr>
-            <p:ph idx="100" type="body" hasCustomPrompt="1"/>
+            <p:ph type="body" idx="100" hasCustomPrompt="1"/>
           </p:nvPr>
         </p:nvSpPr>
         <p:spPr>
@@ -2459,11 +2252,11 @@
           <a:bodyPr wrap="square" lIns="0" tIns="0" rIns="0" bIns="0" rtlCol="0" anchor="t"/>
           <a:lstStyle/>
           <a:p>
-            <a:pPr indent="0" marL="0">
-              <a:buNone/>
-            </a:pPr>
-            <a:r>
-              <a:rPr lang="en-US" sz="1400" b="1" spc="300" kern="0" dirty="0">
+            <a:pPr marL="0" indent="0">
+              <a:buNone/>
+            </a:pPr>
+            <a:r>
+              <a:rPr lang="en-US" sz="1400" b="1" kern="0" spc="300" dirty="0">
                 <a:solidFill>
                   <a:schemeClr val="accent2"/>
                 </a:solidFill>
@@ -2477,9 +2270,11 @@
       <p:sp>
         <p:nvSpPr>
           <p:cNvPr id="3" name="Text 0"/>
-          <p:cNvSpPr/>
+          <p:cNvSpPr>
+            <a:spLocks noGrp="1"/>
+          </p:cNvSpPr>
           <p:nvPr>
-            <p:ph idx="101" type="title" hasCustomPrompt="1"/>
+            <p:ph type="title" idx="101" hasCustomPrompt="1"/>
           </p:nvPr>
         </p:nvSpPr>
         <p:spPr>
@@ -2497,7 +2292,7 @@
           <a:bodyPr wrap="square" lIns="0" tIns="0" rIns="0" bIns="0" rtlCol="0" anchor="t"/>
           <a:lstStyle/>
           <a:p>
-            <a:pPr algn="l" indent="0" marL="0">
+            <a:pPr marL="0" indent="0" algn="l">
               <a:buNone/>
             </a:pPr>
             <a:r>
@@ -2515,9 +2310,11 @@
       <p:sp>
         <p:nvSpPr>
           <p:cNvPr id="4" name="Text 0"/>
-          <p:cNvSpPr/>
+          <p:cNvSpPr>
+            <a:spLocks noGrp="1"/>
+          </p:cNvSpPr>
           <p:nvPr>
-            <p:ph idx="102" type="body" hasCustomPrompt="1"/>
+            <p:ph type="body" idx="102" hasCustomPrompt="1"/>
           </p:nvPr>
         </p:nvSpPr>
         <p:spPr>
@@ -2535,7 +2332,7 @@
           <a:bodyPr wrap="square" lIns="0" tIns="0" rIns="0" bIns="0" rtlCol="0" anchor="t"/>
           <a:lstStyle/>
           <a:p>
-            <a:pPr algn="l" indent="0" marL="0">
+            <a:pPr marL="0" indent="0" algn="l">
               <a:buNone/>
             </a:pPr>
             <a:r>
@@ -2592,14 +2389,14 @@
       </p:sp>
       <p:pic>
         <p:nvPicPr>
-          <p:cNvPr id="7" name="Cover icon" descr="Document icon">    </p:cNvPr>
+          <p:cNvPr id="7" name="Cover icon" descr="Document icon"/>
           <p:cNvPicPr>
             <a:picLocks noChangeAspect="1"/>
           </p:cNvPicPr>
           <p:nvPr/>
         </p:nvPicPr>
         <p:blipFill>
-          <a:blip r:embed="rId1"/>
+          <a:blip r:embed="rId3"/>
           <a:stretch>
             <a:fillRect/>
           </a:stretch>
@@ -2635,7 +2432,7 @@
           <a:bodyPr wrap="square" lIns="0" tIns="0" rIns="0" bIns="0" rtlCol="0" anchor="t"/>
           <a:lstStyle/>
           <a:p>
-            <a:pPr indent="0" marL="0">
+            <a:pPr marL="0" indent="0">
               <a:buNone/>
             </a:pPr>
             <a:r>
@@ -2671,7 +2468,7 @@
           <a:bodyPr wrap="square" lIns="0" tIns="0" rIns="0" bIns="0" rtlCol="0" anchor="t"/>
           <a:lstStyle/>
           <a:p>
-            <a:pPr algn="r" indent="0" marL="0">
+            <a:pPr marL="0" indent="0" algn="r">
               <a:buNone/>
             </a:pPr>
             <a:r>
@@ -2714,9 +2511,11 @@
       <p:sp>
         <p:nvSpPr>
           <p:cNvPr id="2" name="Text 1"/>
-          <p:cNvSpPr/>
+          <p:cNvSpPr>
+            <a:spLocks noGrp="1"/>
+          </p:cNvSpPr>
           <p:nvPr>
-            <p:ph idx="101" type="body" hasCustomPrompt="1"/>
+            <p:ph type="body" idx="101" hasCustomPrompt="1"/>
           </p:nvPr>
         </p:nvSpPr>
         <p:spPr>
@@ -2734,11 +2533,11 @@
           <a:bodyPr wrap="square" lIns="0" tIns="0" rIns="0" bIns="0" rtlCol="0" anchor="t"/>
           <a:lstStyle/>
           <a:p>
-            <a:pPr indent="0" marL="0">
-              <a:buNone/>
-            </a:pPr>
-            <a:r>
-              <a:rPr lang="en-US" sz="1300" b="1" spc="300" kern="0" dirty="0">
+            <a:pPr marL="0" indent="0">
+              <a:buNone/>
+            </a:pPr>
+            <a:r>
+              <a:rPr lang="en-US" sz="1300" b="1" kern="0" spc="300" dirty="0">
                 <a:solidFill>
                   <a:schemeClr val="accent1"/>
                 </a:solidFill>
@@ -2752,9 +2551,11 @@
       <p:sp>
         <p:nvSpPr>
           <p:cNvPr id="3" name="Text 1"/>
-          <p:cNvSpPr/>
+          <p:cNvSpPr>
+            <a:spLocks noGrp="1"/>
+          </p:cNvSpPr>
           <p:nvPr>
-            <p:ph idx="102" type="title" hasCustomPrompt="1"/>
+            <p:ph type="title" idx="102" hasCustomPrompt="1"/>
           </p:nvPr>
         </p:nvSpPr>
         <p:spPr>
@@ -2772,7 +2573,7 @@
           <a:bodyPr wrap="square" lIns="0" tIns="0" rIns="0" bIns="0" rtlCol="0" anchor="t"/>
           <a:lstStyle/>
           <a:p>
-            <a:pPr algn="l" indent="0" marL="0">
+            <a:pPr marL="0" indent="0" algn="l">
               <a:buNone/>
             </a:pPr>
             <a:r>
@@ -2808,7 +2609,7 @@
           </a:solidFill>
           <a:ln/>
           <a:effectLst>
-            <a:outerShdw sx="100000" sy="100000" kx="0" ky="0" algn="bl" rotWithShape="0" blurRad="127000" dist="25400" dir="5400000">
+            <a:outerShdw blurRad="127000" dist="25400" dir="5400000" algn="bl" rotWithShape="0">
               <a:srgbClr val="0F1E2E">
                 <a:alpha val="14000"/>
               </a:srgbClr>
@@ -2838,14 +2639,14 @@
       </p:sp>
       <p:pic>
         <p:nvPicPr>
-          <p:cNvPr id="6" name="Column icon 1" descr="Column icon 1">    </p:cNvPr>
+          <p:cNvPr id="6" name="Column icon 1" descr="Column icon 1"/>
           <p:cNvPicPr>
             <a:picLocks noChangeAspect="1"/>
           </p:cNvPicPr>
           <p:nvPr/>
         </p:nvPicPr>
         <p:blipFill>
-          <a:blip r:embed="rId1"/>
+          <a:blip r:embed="rId3"/>
           <a:stretch>
             <a:fillRect/>
           </a:stretch>
@@ -2881,7 +2682,7 @@
           <a:bodyPr wrap="square" lIns="0" tIns="0" rIns="0" bIns="0" rtlCol="0" anchor="ctr"/>
           <a:lstStyle/>
           <a:p>
-            <a:pPr indent="0" marL="0">
+            <a:pPr marL="0" indent="0">
               <a:buNone/>
             </a:pPr>
             <a:r>
@@ -2993,7 +2794,7 @@
           </a:solidFill>
           <a:ln/>
           <a:effectLst>
-            <a:outerShdw sx="100000" sy="100000" kx="0" ky="0" algn="bl" rotWithShape="0" blurRad="127000" dist="25400" dir="5400000">
+            <a:outerShdw blurRad="127000" dist="25400" dir="5400000" algn="bl" rotWithShape="0">
               <a:srgbClr val="0F1E2E">
                 <a:alpha val="14000"/>
               </a:srgbClr>
@@ -3023,14 +2824,14 @@
       </p:sp>
       <p:pic>
         <p:nvPicPr>
-          <p:cNvPr id="11" name="Column icon 2" descr="Column icon 2">    </p:cNvPr>
+          <p:cNvPr id="11" name="Column icon 2" descr="Column icon 2"/>
           <p:cNvPicPr>
             <a:picLocks noChangeAspect="1"/>
           </p:cNvPicPr>
           <p:nvPr/>
         </p:nvPicPr>
         <p:blipFill>
-          <a:blip r:embed="rId2"/>
+          <a:blip r:embed="rId4"/>
           <a:stretch>
             <a:fillRect/>
           </a:stretch>
@@ -3066,7 +2867,7 @@
           <a:bodyPr wrap="square" lIns="0" tIns="0" rIns="0" bIns="0" rtlCol="0" anchor="ctr"/>
           <a:lstStyle/>
           <a:p>
-            <a:pPr indent="0" marL="0">
+            <a:pPr marL="0" indent="0">
               <a:buNone/>
             </a:pPr>
             <a:r>
@@ -3196,7 +2997,7 @@
           <a:bodyPr wrap="square" lIns="0" tIns="0" rIns="0" bIns="0" rtlCol="0" anchor="t"/>
           <a:lstStyle/>
           <a:p>
-            <a:pPr indent="0" marL="0">
+            <a:pPr marL="0" indent="0">
               <a:buNone/>
             </a:pPr>
             <a:r>
@@ -3205,7 +3006,23 @@
                   <a:schemeClr val="accent1"/>
                 </a:solidFill>
               </a:rPr>
-              <a:t>Code, tests, and write-ups: github.com/[your-username]/prd-genie</a:t>
+              <a:t>Code, tests, and write-ups: github.com</a:t>
+            </a:r>
+            <a:r>
+              <a:rPr lang="en-US" sz="1800" b="1">
+                <a:solidFill>
+                  <a:schemeClr val="accent1"/>
+                </a:solidFill>
+              </a:rPr>
+              <a:t>/bsanthosh1985/</a:t>
+            </a:r>
+            <a:r>
+              <a:rPr lang="en-US" sz="1800" b="1" dirty="0">
+                <a:solidFill>
+                  <a:schemeClr val="accent1"/>
+                </a:solidFill>
+              </a:rPr>
+              <a:t>prd-genie</a:t>
             </a:r>
             <a:endParaRPr lang="en-US" sz="1800" dirty="0"/>
           </a:p>
@@ -3231,7 +3048,7 @@
           </a:prstGeom>
           <a:extLst>
             <a:ext uri="{C572A759-6A51-4108-AA02-DFA0A04FC94B}">
-              <ma14:wrappingTextBoxFlag xmlns:ma14="http://schemas.microsoft.com/office/mac/drawingml/2011/main" val="0"/>
+              <ma14:wrappingTextBoxFlag xmlns:ma14="http://schemas.microsoft.com/office/mac/drawingml/2011/main" xmlns="" val="0"/>
             </a:ext>
           </a:extLst>
         </p:spPr>
@@ -3249,7 +3066,7 @@
           <a:p>
             <a:pPr algn="r"/>
             <a:fld id="{F7021451-1387-4CA6-816F-3879F97B5CBC}" type="slidenum">
-              <a:rPr b="0" lang="en-US"/>
+              <a:rPr lang="en-US" b="0"/>
               <a:t>10</a:t>
             </a:fld>
             <a:endParaRPr lang="en-US"/>
@@ -3284,9 +3101,11 @@
       <p:sp>
         <p:nvSpPr>
           <p:cNvPr id="2" name="Text 1"/>
-          <p:cNvSpPr/>
+          <p:cNvSpPr>
+            <a:spLocks noGrp="1"/>
+          </p:cNvSpPr>
           <p:nvPr>
-            <p:ph idx="101" type="body" hasCustomPrompt="1"/>
+            <p:ph type="body" idx="101" hasCustomPrompt="1"/>
           </p:nvPr>
         </p:nvSpPr>
         <p:spPr>
@@ -3304,11 +3123,11 @@
           <a:bodyPr wrap="square" lIns="0" tIns="0" rIns="0" bIns="0" rtlCol="0" anchor="t"/>
           <a:lstStyle/>
           <a:p>
-            <a:pPr indent="0" marL="0">
-              <a:buNone/>
-            </a:pPr>
-            <a:r>
-              <a:rPr lang="en-US" sz="1300" b="1" spc="300" kern="0" dirty="0">
+            <a:pPr marL="0" indent="0">
+              <a:buNone/>
+            </a:pPr>
+            <a:r>
+              <a:rPr lang="en-US" sz="1300" b="1" kern="0" spc="300" dirty="0">
                 <a:solidFill>
                   <a:schemeClr val="accent1"/>
                 </a:solidFill>
@@ -3322,9 +3141,11 @@
       <p:sp>
         <p:nvSpPr>
           <p:cNvPr id="3" name="Text 1"/>
-          <p:cNvSpPr/>
+          <p:cNvSpPr>
+            <a:spLocks noGrp="1"/>
+          </p:cNvSpPr>
           <p:nvPr>
-            <p:ph idx="102" type="title" hasCustomPrompt="1"/>
+            <p:ph type="title" idx="102" hasCustomPrompt="1"/>
           </p:nvPr>
         </p:nvSpPr>
         <p:spPr>
@@ -3342,7 +3163,7 @@
           <a:bodyPr wrap="square" lIns="0" tIns="0" rIns="0" bIns="0" rtlCol="0" anchor="t"/>
           <a:lstStyle/>
           <a:p>
-            <a:pPr algn="l" indent="0" marL="0">
+            <a:pPr marL="0" indent="0" algn="l">
               <a:buNone/>
             </a:pPr>
             <a:r>
@@ -3378,7 +3199,7 @@
           </a:solidFill>
           <a:ln/>
           <a:effectLst>
-            <a:outerShdw sx="100000" sy="100000" kx="0" ky="0" algn="bl" rotWithShape="0" blurRad="127000" dist="25400" dir="5400000">
+            <a:outerShdw blurRad="127000" dist="25400" dir="5400000" algn="bl" rotWithShape="0">
               <a:srgbClr val="0F1E2E">
                 <a:alpha val="14000"/>
               </a:srgbClr>
@@ -3408,297 +3229,7 @@
       </p:sp>
       <p:pic>
         <p:nvPicPr>
-          <p:cNvPr id="6" name="Problem icon 1" descr="Problem icon 1">    </p:cNvPr>
-          <p:cNvPicPr>
-            <a:picLocks noChangeAspect="1"/>
-          </p:cNvPicPr>
-          <p:nvPr/>
-        </p:nvPicPr>
-        <p:blipFill>
-          <a:blip r:embed="rId1"/>
-          <a:stretch>
-            <a:fillRect/>
-          </a:stretch>
-        </p:blipFill>
-        <p:spPr>
-          <a:xfrm>
-            <a:off x="1087222" y="2230222"/>
-            <a:ext cx="294437" cy="294437"/>
-          </a:xfrm>
-          <a:prstGeom prst="rect">
-            <a:avLst/>
-          </a:prstGeom>
-        </p:spPr>
-      </p:pic>
-      <p:sp>
-        <p:nvSpPr>
-          <p:cNvPr id="7" name="Problem title 1"/>
-          <p:cNvSpPr txBox="1"/>
-          <p:nvPr/>
-        </p:nvSpPr>
-        <p:spPr>
-          <a:xfrm>
-            <a:off x="914400" y="2926080"/>
-            <a:ext cx="2011680" cy="777240"/>
-          </a:xfrm>
-          <a:prstGeom prst="rect">
-            <a:avLst/>
-          </a:prstGeom>
-          <a:noFill/>
-          <a:ln/>
-        </p:spPr>
-        <p:txBody>
-          <a:bodyPr wrap="square" lIns="0" tIns="0" rIns="0" bIns="0" rtlCol="0" anchor="t"/>
-          <a:lstStyle/>
-          <a:p>
-            <a:pPr indent="0" marL="0">
-              <a:buNone/>
-            </a:pPr>
-            <a:r>
-              <a:rPr lang="en-US" sz="1900" b="1" dirty="0">
-                <a:solidFill>
-                  <a:schemeClr val="tx1"/>
-                </a:solidFill>
-              </a:rPr>
-              <a:t>Scope lives in meetings</a:t>
-            </a:r>
-            <a:endParaRPr lang="en-US" sz="1900" dirty="0"/>
-          </a:p>
-        </p:txBody>
-      </p:sp>
-      <p:sp>
-        <p:nvSpPr>
-          <p:cNvPr id="8" name="Problem text 1"/>
-          <p:cNvSpPr txBox="1"/>
-          <p:nvPr/>
-        </p:nvSpPr>
-        <p:spPr>
-          <a:xfrm>
-            <a:off x="914400" y="3749040"/>
-            <a:ext cx="2011680" cy="1097280"/>
-          </a:xfrm>
-          <a:prstGeom prst="rect">
-            <a:avLst/>
-          </a:prstGeom>
-          <a:noFill/>
-          <a:ln/>
-        </p:spPr>
-        <p:txBody>
-          <a:bodyPr wrap="square" lIns="0" tIns="0" rIns="0" bIns="0" rtlCol="0" anchor="t"/>
-          <a:lstStyle/>
-          <a:p>
-            <a:pPr indent="0" marL="0">
-              <a:buNone/>
-            </a:pPr>
-            <a:r>
-              <a:rPr lang="en-US" sz="1500" dirty="0">
-                <a:solidFill>
-                  <a:schemeClr val="accent4"/>
-                </a:solidFill>
-              </a:rPr>
-              <a:t>PMs pull requirements out of transcripts by hand.</a:t>
-            </a:r>
-            <a:endParaRPr lang="en-US" sz="1500" dirty="0"/>
-          </a:p>
-        </p:txBody>
-      </p:sp>
-      <p:sp>
-        <p:nvSpPr>
-          <p:cNvPr id="9" name="Problem card 2"/>
-          <p:cNvSpPr/>
-          <p:nvPr/>
-        </p:nvSpPr>
-        <p:spPr>
-          <a:xfrm>
-            <a:off x="3451860" y="1783080"/>
-            <a:ext cx="2537460" cy="3246120"/>
-          </a:xfrm>
-          <a:prstGeom prst="roundRect">
-            <a:avLst>
-              <a:gd name="adj" fmla="val 4324"/>
-            </a:avLst>
-          </a:prstGeom>
-          <a:solidFill>
-            <a:schemeClr val="bg1"/>
-          </a:solidFill>
-          <a:ln/>
-          <a:effectLst>
-            <a:outerShdw sx="100000" sy="100000" kx="0" ky="0" algn="bl" rotWithShape="0" blurRad="127000" dist="25400" dir="5400000">
-              <a:srgbClr val="0F1E2E">
-                <a:alpha val="14000"/>
-              </a:srgbClr>
-            </a:outerShdw>
-          </a:effectLst>
-        </p:spPr>
-      </p:sp>
-      <p:sp>
-        <p:nvSpPr>
-          <p:cNvPr id="10" name="Problem icon 2 circle"/>
-          <p:cNvSpPr/>
-          <p:nvPr/>
-        </p:nvSpPr>
-        <p:spPr>
-          <a:xfrm>
-            <a:off x="3726180" y="2057400"/>
-            <a:ext cx="640080" cy="640080"/>
-          </a:xfrm>
-          <a:prstGeom prst="ellipse">
-            <a:avLst/>
-          </a:prstGeom>
-          <a:solidFill>
-            <a:schemeClr val="accent1"/>
-          </a:solidFill>
-          <a:ln/>
-        </p:spPr>
-      </p:sp>
-      <p:pic>
-        <p:nvPicPr>
-          <p:cNvPr id="11" name="Problem icon 2" descr="Problem icon 2">    </p:cNvPr>
-          <p:cNvPicPr>
-            <a:picLocks noChangeAspect="1"/>
-          </p:cNvPicPr>
-          <p:nvPr/>
-        </p:nvPicPr>
-        <p:blipFill>
-          <a:blip r:embed="rId2"/>
-          <a:stretch>
-            <a:fillRect/>
-          </a:stretch>
-        </p:blipFill>
-        <p:spPr>
-          <a:xfrm>
-            <a:off x="3899002" y="2230222"/>
-            <a:ext cx="294437" cy="294437"/>
-          </a:xfrm>
-          <a:prstGeom prst="rect">
-            <a:avLst/>
-          </a:prstGeom>
-        </p:spPr>
-      </p:pic>
-      <p:sp>
-        <p:nvSpPr>
-          <p:cNvPr id="12" name="Problem title 2"/>
-          <p:cNvSpPr txBox="1"/>
-          <p:nvPr/>
-        </p:nvSpPr>
-        <p:spPr>
-          <a:xfrm>
-            <a:off x="3726180" y="2926080"/>
-            <a:ext cx="2011680" cy="777240"/>
-          </a:xfrm>
-          <a:prstGeom prst="rect">
-            <a:avLst/>
-          </a:prstGeom>
-          <a:noFill/>
-          <a:ln/>
-        </p:spPr>
-        <p:txBody>
-          <a:bodyPr wrap="square" lIns="0" tIns="0" rIns="0" bIns="0" rtlCol="0" anchor="t"/>
-          <a:lstStyle/>
-          <a:p>
-            <a:pPr indent="0" marL="0">
-              <a:buNone/>
-            </a:pPr>
-            <a:r>
-              <a:rPr lang="en-US" sz="1900" b="1" dirty="0">
-                <a:solidFill>
-                  <a:schemeClr val="tx1"/>
-                </a:solidFill>
-              </a:rPr>
-              <a:t>PRDs are written by hand</a:t>
-            </a:r>
-            <a:endParaRPr lang="en-US" sz="1900" dirty="0"/>
-          </a:p>
-        </p:txBody>
-      </p:sp>
-      <p:sp>
-        <p:nvSpPr>
-          <p:cNvPr id="13" name="Problem text 2"/>
-          <p:cNvSpPr txBox="1"/>
-          <p:nvPr/>
-        </p:nvSpPr>
-        <p:spPr>
-          <a:xfrm>
-            <a:off x="3726180" y="3749040"/>
-            <a:ext cx="2011680" cy="1097280"/>
-          </a:xfrm>
-          <a:prstGeom prst="rect">
-            <a:avLst/>
-          </a:prstGeom>
-          <a:noFill/>
-          <a:ln/>
-        </p:spPr>
-        <p:txBody>
-          <a:bodyPr wrap="square" lIns="0" tIns="0" rIns="0" bIns="0" rtlCol="0" anchor="t"/>
-          <a:lstStyle/>
-          <a:p>
-            <a:pPr indent="0" marL="0">
-              <a:buNone/>
-            </a:pPr>
-            <a:r>
-              <a:rPr lang="en-US" sz="1500" dirty="0">
-                <a:solidFill>
-                  <a:schemeClr val="accent4"/>
-                </a:solidFill>
-              </a:rPr>
-              <a:t>Turning discussion into PRDs, epics, and stories is manual and iterative.</a:t>
-            </a:r>
-            <a:endParaRPr lang="en-US" sz="1500" dirty="0"/>
-          </a:p>
-        </p:txBody>
-      </p:sp>
-      <p:sp>
-        <p:nvSpPr>
-          <p:cNvPr id="14" name="Problem card 3"/>
-          <p:cNvSpPr/>
-          <p:nvPr/>
-        </p:nvSpPr>
-        <p:spPr>
-          <a:xfrm>
-            <a:off x="6263640" y="1783080"/>
-            <a:ext cx="2537460" cy="3246120"/>
-          </a:xfrm>
-          <a:prstGeom prst="roundRect">
-            <a:avLst>
-              <a:gd name="adj" fmla="val 4324"/>
-            </a:avLst>
-          </a:prstGeom>
-          <a:solidFill>
-            <a:schemeClr val="bg1"/>
-          </a:solidFill>
-          <a:ln/>
-          <a:effectLst>
-            <a:outerShdw sx="100000" sy="100000" kx="0" ky="0" algn="bl" rotWithShape="0" blurRad="127000" dist="25400" dir="5400000">
-              <a:srgbClr val="0F1E2E">
-                <a:alpha val="14000"/>
-              </a:srgbClr>
-            </a:outerShdw>
-          </a:effectLst>
-        </p:spPr>
-      </p:sp>
-      <p:sp>
-        <p:nvSpPr>
-          <p:cNvPr id="15" name="Problem icon 3 circle"/>
-          <p:cNvSpPr/>
-          <p:nvPr/>
-        </p:nvSpPr>
-        <p:spPr>
-          <a:xfrm>
-            <a:off x="6537960" y="2057400"/>
-            <a:ext cx="640080" cy="640080"/>
-          </a:xfrm>
-          <a:prstGeom prst="ellipse">
-            <a:avLst/>
-          </a:prstGeom>
-          <a:solidFill>
-            <a:schemeClr val="accent1"/>
-          </a:solidFill>
-          <a:ln/>
-        </p:spPr>
-      </p:sp>
-      <p:pic>
-        <p:nvPicPr>
-          <p:cNvPr id="16" name="Problem icon 3" descr="Problem icon 3">    </p:cNvPr>
+          <p:cNvPr id="6" name="Problem icon 1" descr="Problem icon 1"/>
           <p:cNvPicPr>
             <a:picLocks noChangeAspect="1"/>
           </p:cNvPicPr>
@@ -3712,7 +3243,7 @@
         </p:blipFill>
         <p:spPr>
           <a:xfrm>
-            <a:off x="6710782" y="2230222"/>
+            <a:off x="1087222" y="2230222"/>
             <a:ext cx="294437" cy="294437"/>
           </a:xfrm>
           <a:prstGeom prst="rect">
@@ -3722,13 +3253,13 @@
       </p:pic>
       <p:sp>
         <p:nvSpPr>
-          <p:cNvPr id="17" name="Problem title 3"/>
+          <p:cNvPr id="7" name="Problem title 1"/>
           <p:cNvSpPr txBox="1"/>
           <p:nvPr/>
         </p:nvSpPr>
         <p:spPr>
           <a:xfrm>
-            <a:off x="6537960" y="2926080"/>
+            <a:off x="914400" y="2926080"/>
             <a:ext cx="2011680" cy="777240"/>
           </a:xfrm>
           <a:prstGeom prst="rect">
@@ -3741,7 +3272,7 @@
           <a:bodyPr wrap="square" lIns="0" tIns="0" rIns="0" bIns="0" rtlCol="0" anchor="t"/>
           <a:lstStyle/>
           <a:p>
-            <a:pPr indent="0" marL="0">
+            <a:pPr marL="0" indent="0">
               <a:buNone/>
             </a:pPr>
             <a:r>
@@ -3750,7 +3281,7 @@
                   <a:schemeClr val="tx1"/>
                 </a:solidFill>
               </a:rPr>
-              <a:t>Every PM uses a different format</a:t>
+              <a:t>Scope lives in meetings</a:t>
             </a:r>
             <a:endParaRPr lang="en-US" sz="1900" dirty="0"/>
           </a:p>
@@ -3758,13 +3289,13 @@
       </p:sp>
       <p:sp>
         <p:nvSpPr>
-          <p:cNvPr id="18" name="Problem text 3"/>
+          <p:cNvPr id="8" name="Problem text 1"/>
           <p:cNvSpPr txBox="1"/>
           <p:nvPr/>
         </p:nvSpPr>
         <p:spPr>
           <a:xfrm>
-            <a:off x="6537960" y="3749040"/>
+            <a:off x="914400" y="3749040"/>
             <a:ext cx="2011680" cy="1097280"/>
           </a:xfrm>
           <a:prstGeom prst="rect">
@@ -3777,7 +3308,7 @@
           <a:bodyPr wrap="square" lIns="0" tIns="0" rIns="0" bIns="0" rtlCol="0" anchor="t"/>
           <a:lstStyle/>
           <a:p>
-            <a:pPr indent="0" marL="0">
+            <a:pPr marL="0" indent="0">
               <a:buNone/>
             </a:pPr>
             <a:r>
@@ -3786,7 +3317,7 @@
                   <a:schemeClr val="accent4"/>
                 </a:solidFill>
               </a:rPr>
-              <a:t>Engineering cannot estimate from PRDs that all look different.</a:t>
+              <a:t>PMs pull requirements out of transcripts by hand.</a:t>
             </a:r>
             <a:endParaRPr lang="en-US" sz="1500" dirty="0"/>
           </a:p>
@@ -3794,13 +3325,13 @@
       </p:sp>
       <p:sp>
         <p:nvSpPr>
-          <p:cNvPr id="19" name="Problem card 4"/>
+          <p:cNvPr id="9" name="Problem card 2"/>
           <p:cNvSpPr/>
           <p:nvPr/>
         </p:nvSpPr>
         <p:spPr>
           <a:xfrm>
-            <a:off x="9075420" y="1783080"/>
+            <a:off x="3451860" y="1783080"/>
             <a:ext cx="2537460" cy="3246120"/>
           </a:xfrm>
           <a:prstGeom prst="roundRect">
@@ -3813,7 +3344,7 @@
           </a:solidFill>
           <a:ln/>
           <a:effectLst>
-            <a:outerShdw sx="100000" sy="100000" kx="0" ky="0" algn="bl" rotWithShape="0" blurRad="127000" dist="25400" dir="5400000">
+            <a:outerShdw blurRad="127000" dist="25400" dir="5400000" algn="bl" rotWithShape="0">
               <a:srgbClr val="0F1E2E">
                 <a:alpha val="14000"/>
               </a:srgbClr>
@@ -3823,13 +3354,13 @@
       </p:sp>
       <p:sp>
         <p:nvSpPr>
-          <p:cNvPr id="20" name="Problem icon 4 circle"/>
+          <p:cNvPr id="10" name="Problem icon 2 circle"/>
           <p:cNvSpPr/>
           <p:nvPr/>
         </p:nvSpPr>
         <p:spPr>
           <a:xfrm>
-            <a:off x="9349740" y="2057400"/>
+            <a:off x="3726180" y="2057400"/>
             <a:ext cx="640080" cy="640080"/>
           </a:xfrm>
           <a:prstGeom prst="ellipse">
@@ -3843,7 +3374,7 @@
       </p:sp>
       <p:pic>
         <p:nvPicPr>
-          <p:cNvPr id="21" name="Problem icon 4" descr="Problem icon 4">    </p:cNvPr>
+          <p:cNvPr id="11" name="Problem icon 2" descr="Problem icon 2"/>
           <p:cNvPicPr>
             <a:picLocks noChangeAspect="1"/>
           </p:cNvPicPr>
@@ -3857,6 +3388,296 @@
         </p:blipFill>
         <p:spPr>
           <a:xfrm>
+            <a:off x="3899002" y="2230222"/>
+            <a:ext cx="294437" cy="294437"/>
+          </a:xfrm>
+          <a:prstGeom prst="rect">
+            <a:avLst/>
+          </a:prstGeom>
+        </p:spPr>
+      </p:pic>
+      <p:sp>
+        <p:nvSpPr>
+          <p:cNvPr id="12" name="Problem title 2"/>
+          <p:cNvSpPr txBox="1"/>
+          <p:nvPr/>
+        </p:nvSpPr>
+        <p:spPr>
+          <a:xfrm>
+            <a:off x="3726180" y="2926080"/>
+            <a:ext cx="2011680" cy="777240"/>
+          </a:xfrm>
+          <a:prstGeom prst="rect">
+            <a:avLst/>
+          </a:prstGeom>
+          <a:noFill/>
+          <a:ln/>
+        </p:spPr>
+        <p:txBody>
+          <a:bodyPr wrap="square" lIns="0" tIns="0" rIns="0" bIns="0" rtlCol="0" anchor="t"/>
+          <a:lstStyle/>
+          <a:p>
+            <a:pPr marL="0" indent="0">
+              <a:buNone/>
+            </a:pPr>
+            <a:r>
+              <a:rPr lang="en-US" sz="1900" b="1" dirty="0">
+                <a:solidFill>
+                  <a:schemeClr val="tx1"/>
+                </a:solidFill>
+              </a:rPr>
+              <a:t>PRDs are written by hand</a:t>
+            </a:r>
+            <a:endParaRPr lang="en-US" sz="1900" dirty="0"/>
+          </a:p>
+        </p:txBody>
+      </p:sp>
+      <p:sp>
+        <p:nvSpPr>
+          <p:cNvPr id="13" name="Problem text 2"/>
+          <p:cNvSpPr txBox="1"/>
+          <p:nvPr/>
+        </p:nvSpPr>
+        <p:spPr>
+          <a:xfrm>
+            <a:off x="3726180" y="3749040"/>
+            <a:ext cx="2011680" cy="1097280"/>
+          </a:xfrm>
+          <a:prstGeom prst="rect">
+            <a:avLst/>
+          </a:prstGeom>
+          <a:noFill/>
+          <a:ln/>
+        </p:spPr>
+        <p:txBody>
+          <a:bodyPr wrap="square" lIns="0" tIns="0" rIns="0" bIns="0" rtlCol="0" anchor="t"/>
+          <a:lstStyle/>
+          <a:p>
+            <a:pPr marL="0" indent="0">
+              <a:buNone/>
+            </a:pPr>
+            <a:r>
+              <a:rPr lang="en-US" sz="1500" dirty="0">
+                <a:solidFill>
+                  <a:schemeClr val="accent4"/>
+                </a:solidFill>
+              </a:rPr>
+              <a:t>Turning discussion into PRDs, epics, and stories is manual and iterative.</a:t>
+            </a:r>
+            <a:endParaRPr lang="en-US" sz="1500" dirty="0"/>
+          </a:p>
+        </p:txBody>
+      </p:sp>
+      <p:sp>
+        <p:nvSpPr>
+          <p:cNvPr id="14" name="Problem card 3"/>
+          <p:cNvSpPr/>
+          <p:nvPr/>
+        </p:nvSpPr>
+        <p:spPr>
+          <a:xfrm>
+            <a:off x="6263640" y="1783080"/>
+            <a:ext cx="2537460" cy="3246120"/>
+          </a:xfrm>
+          <a:prstGeom prst="roundRect">
+            <a:avLst>
+              <a:gd name="adj" fmla="val 4324"/>
+            </a:avLst>
+          </a:prstGeom>
+          <a:solidFill>
+            <a:schemeClr val="bg1"/>
+          </a:solidFill>
+          <a:ln/>
+          <a:effectLst>
+            <a:outerShdw blurRad="127000" dist="25400" dir="5400000" algn="bl" rotWithShape="0">
+              <a:srgbClr val="0F1E2E">
+                <a:alpha val="14000"/>
+              </a:srgbClr>
+            </a:outerShdw>
+          </a:effectLst>
+        </p:spPr>
+      </p:sp>
+      <p:sp>
+        <p:nvSpPr>
+          <p:cNvPr id="15" name="Problem icon 3 circle"/>
+          <p:cNvSpPr/>
+          <p:nvPr/>
+        </p:nvSpPr>
+        <p:spPr>
+          <a:xfrm>
+            <a:off x="6537960" y="2057400"/>
+            <a:ext cx="640080" cy="640080"/>
+          </a:xfrm>
+          <a:prstGeom prst="ellipse">
+            <a:avLst/>
+          </a:prstGeom>
+          <a:solidFill>
+            <a:schemeClr val="accent1"/>
+          </a:solidFill>
+          <a:ln/>
+        </p:spPr>
+      </p:sp>
+      <p:pic>
+        <p:nvPicPr>
+          <p:cNvPr id="16" name="Problem icon 3" descr="Problem icon 3"/>
+          <p:cNvPicPr>
+            <a:picLocks noChangeAspect="1"/>
+          </p:cNvPicPr>
+          <p:nvPr/>
+        </p:nvPicPr>
+        <p:blipFill>
+          <a:blip r:embed="rId5"/>
+          <a:stretch>
+            <a:fillRect/>
+          </a:stretch>
+        </p:blipFill>
+        <p:spPr>
+          <a:xfrm>
+            <a:off x="6710782" y="2230222"/>
+            <a:ext cx="294437" cy="294437"/>
+          </a:xfrm>
+          <a:prstGeom prst="rect">
+            <a:avLst/>
+          </a:prstGeom>
+        </p:spPr>
+      </p:pic>
+      <p:sp>
+        <p:nvSpPr>
+          <p:cNvPr id="17" name="Problem title 3"/>
+          <p:cNvSpPr txBox="1"/>
+          <p:nvPr/>
+        </p:nvSpPr>
+        <p:spPr>
+          <a:xfrm>
+            <a:off x="6537960" y="2926080"/>
+            <a:ext cx="2011680" cy="777240"/>
+          </a:xfrm>
+          <a:prstGeom prst="rect">
+            <a:avLst/>
+          </a:prstGeom>
+          <a:noFill/>
+          <a:ln/>
+        </p:spPr>
+        <p:txBody>
+          <a:bodyPr wrap="square" lIns="0" tIns="0" rIns="0" bIns="0" rtlCol="0" anchor="t"/>
+          <a:lstStyle/>
+          <a:p>
+            <a:pPr marL="0" indent="0">
+              <a:buNone/>
+            </a:pPr>
+            <a:r>
+              <a:rPr lang="en-US" sz="1900" b="1" dirty="0">
+                <a:solidFill>
+                  <a:schemeClr val="tx1"/>
+                </a:solidFill>
+              </a:rPr>
+              <a:t>Every PM uses a different format</a:t>
+            </a:r>
+            <a:endParaRPr lang="en-US" sz="1900" dirty="0"/>
+          </a:p>
+        </p:txBody>
+      </p:sp>
+      <p:sp>
+        <p:nvSpPr>
+          <p:cNvPr id="18" name="Problem text 3"/>
+          <p:cNvSpPr txBox="1"/>
+          <p:nvPr/>
+        </p:nvSpPr>
+        <p:spPr>
+          <a:xfrm>
+            <a:off x="6537960" y="3749040"/>
+            <a:ext cx="2011680" cy="1097280"/>
+          </a:xfrm>
+          <a:prstGeom prst="rect">
+            <a:avLst/>
+          </a:prstGeom>
+          <a:noFill/>
+          <a:ln/>
+        </p:spPr>
+        <p:txBody>
+          <a:bodyPr wrap="square" lIns="0" tIns="0" rIns="0" bIns="0" rtlCol="0" anchor="t"/>
+          <a:lstStyle/>
+          <a:p>
+            <a:pPr marL="0" indent="0">
+              <a:buNone/>
+            </a:pPr>
+            <a:r>
+              <a:rPr lang="en-US" sz="1500" dirty="0">
+                <a:solidFill>
+                  <a:schemeClr val="accent4"/>
+                </a:solidFill>
+              </a:rPr>
+              <a:t>Engineering cannot estimate from PRDs that all look different.</a:t>
+            </a:r>
+            <a:endParaRPr lang="en-US" sz="1500" dirty="0"/>
+          </a:p>
+        </p:txBody>
+      </p:sp>
+      <p:sp>
+        <p:nvSpPr>
+          <p:cNvPr id="19" name="Problem card 4"/>
+          <p:cNvSpPr/>
+          <p:nvPr/>
+        </p:nvSpPr>
+        <p:spPr>
+          <a:xfrm>
+            <a:off x="9075420" y="1783080"/>
+            <a:ext cx="2537460" cy="3246120"/>
+          </a:xfrm>
+          <a:prstGeom prst="roundRect">
+            <a:avLst>
+              <a:gd name="adj" fmla="val 4324"/>
+            </a:avLst>
+          </a:prstGeom>
+          <a:solidFill>
+            <a:schemeClr val="bg1"/>
+          </a:solidFill>
+          <a:ln/>
+          <a:effectLst>
+            <a:outerShdw blurRad="127000" dist="25400" dir="5400000" algn="bl" rotWithShape="0">
+              <a:srgbClr val="0F1E2E">
+                <a:alpha val="14000"/>
+              </a:srgbClr>
+            </a:outerShdw>
+          </a:effectLst>
+        </p:spPr>
+      </p:sp>
+      <p:sp>
+        <p:nvSpPr>
+          <p:cNvPr id="20" name="Problem icon 4 circle"/>
+          <p:cNvSpPr/>
+          <p:nvPr/>
+        </p:nvSpPr>
+        <p:spPr>
+          <a:xfrm>
+            <a:off x="9349740" y="2057400"/>
+            <a:ext cx="640080" cy="640080"/>
+          </a:xfrm>
+          <a:prstGeom prst="ellipse">
+            <a:avLst/>
+          </a:prstGeom>
+          <a:solidFill>
+            <a:schemeClr val="accent1"/>
+          </a:solidFill>
+          <a:ln/>
+        </p:spPr>
+      </p:sp>
+      <p:pic>
+        <p:nvPicPr>
+          <p:cNvPr id="21" name="Problem icon 4" descr="Problem icon 4"/>
+          <p:cNvPicPr>
+            <a:picLocks noChangeAspect="1"/>
+          </p:cNvPicPr>
+          <p:nvPr/>
+        </p:nvPicPr>
+        <p:blipFill>
+          <a:blip r:embed="rId6"/>
+          <a:stretch>
+            <a:fillRect/>
+          </a:stretch>
+        </p:blipFill>
+        <p:spPr>
+          <a:xfrm>
             <a:off x="9522562" y="2230222"/>
             <a:ext cx="294437" cy="294437"/>
           </a:xfrm>
@@ -3886,7 +3707,7 @@
           <a:bodyPr wrap="square" lIns="0" tIns="0" rIns="0" bIns="0" rtlCol="0" anchor="t"/>
           <a:lstStyle/>
           <a:p>
-            <a:pPr indent="0" marL="0">
+            <a:pPr marL="0" indent="0">
               <a:buNone/>
             </a:pPr>
             <a:r>
@@ -3922,7 +3743,7 @@
           <a:bodyPr wrap="square" lIns="0" tIns="0" rIns="0" bIns="0" rtlCol="0" anchor="t"/>
           <a:lstStyle/>
           <a:p>
-            <a:pPr indent="0" marL="0">
+            <a:pPr marL="0" indent="0">
               <a:buNone/>
             </a:pPr>
             <a:r>
@@ -3958,7 +3779,7 @@
           <a:bodyPr wrap="square" lIns="0" tIns="0" rIns="0" bIns="0" rtlCol="0" anchor="t"/>
           <a:lstStyle/>
           <a:p>
-            <a:pPr indent="0" marL="0">
+            <a:pPr marL="0" indent="0">
               <a:buNone/>
             </a:pPr>
             <a:r>
@@ -3993,7 +3814,7 @@
           </a:prstGeom>
           <a:extLst>
             <a:ext uri="{C572A759-6A51-4108-AA02-DFA0A04FC94B}">
-              <ma14:wrappingTextBoxFlag xmlns:ma14="http://schemas.microsoft.com/office/mac/drawingml/2011/main" val="0"/>
+              <ma14:wrappingTextBoxFlag xmlns:ma14="http://schemas.microsoft.com/office/mac/drawingml/2011/main" xmlns="" val="0"/>
             </a:ext>
           </a:extLst>
         </p:spPr>
@@ -4011,7 +3832,7 @@
           <a:p>
             <a:pPr algn="r"/>
             <a:fld id="{F7021451-1387-4CA6-816F-3879F97B5CBC}" type="slidenum">
-              <a:rPr b="0" lang="en-US"/>
+              <a:rPr lang="en-US" b="0"/>
               <a:t>2</a:t>
             </a:fld>
             <a:endParaRPr lang="en-US"/>
@@ -4046,9 +3867,11 @@
       <p:sp>
         <p:nvSpPr>
           <p:cNvPr id="2" name="Text 1"/>
-          <p:cNvSpPr/>
+          <p:cNvSpPr>
+            <a:spLocks noGrp="1"/>
+          </p:cNvSpPr>
           <p:nvPr>
-            <p:ph idx="101" type="body" hasCustomPrompt="1"/>
+            <p:ph type="body" idx="101" hasCustomPrompt="1"/>
           </p:nvPr>
         </p:nvSpPr>
         <p:spPr>
@@ -4066,11 +3889,11 @@
           <a:bodyPr wrap="square" lIns="0" tIns="0" rIns="0" bIns="0" rtlCol="0" anchor="t"/>
           <a:lstStyle/>
           <a:p>
-            <a:pPr indent="0" marL="0">
-              <a:buNone/>
-            </a:pPr>
-            <a:r>
-              <a:rPr lang="en-US" sz="1300" b="1" spc="300" kern="0" dirty="0">
+            <a:pPr marL="0" indent="0">
+              <a:buNone/>
+            </a:pPr>
+            <a:r>
+              <a:rPr lang="en-US" sz="1300" b="1" kern="0" spc="300" dirty="0">
                 <a:solidFill>
                   <a:schemeClr val="accent1"/>
                 </a:solidFill>
@@ -4084,9 +3907,11 @@
       <p:sp>
         <p:nvSpPr>
           <p:cNvPr id="3" name="Text 1"/>
-          <p:cNvSpPr/>
+          <p:cNvSpPr>
+            <a:spLocks noGrp="1"/>
+          </p:cNvSpPr>
           <p:nvPr>
-            <p:ph idx="102" type="title" hasCustomPrompt="1"/>
+            <p:ph type="title" idx="102" hasCustomPrompt="1"/>
           </p:nvPr>
         </p:nvSpPr>
         <p:spPr>
@@ -4104,7 +3929,7 @@
           <a:bodyPr wrap="square" lIns="0" tIns="0" rIns="0" bIns="0" rtlCol="0" anchor="t"/>
           <a:lstStyle/>
           <a:p>
-            <a:pPr algn="l" indent="0" marL="0">
+            <a:pPr marL="0" indent="0" algn="l">
               <a:buNone/>
             </a:pPr>
             <a:r>
@@ -4140,7 +3965,7 @@
           </a:solidFill>
           <a:ln/>
           <a:effectLst>
-            <a:outerShdw sx="100000" sy="100000" kx="0" ky="0" algn="bl" rotWithShape="0" blurRad="127000" dist="25400" dir="5400000">
+            <a:outerShdw blurRad="127000" dist="25400" dir="5400000" algn="bl" rotWithShape="0">
               <a:srgbClr val="0F1E2E">
                 <a:alpha val="14000"/>
               </a:srgbClr>
@@ -4169,7 +3994,7 @@
           <a:bodyPr wrap="square" lIns="0" tIns="0" rIns="0" bIns="0" rtlCol="0" anchor="t"/>
           <a:lstStyle/>
           <a:p>
-            <a:pPr indent="0" marL="0">
+            <a:pPr marL="0" indent="0">
               <a:buNone/>
             </a:pPr>
             <a:r>
@@ -4205,7 +4030,7 @@
           <a:bodyPr wrap="square" lIns="0" tIns="0" rIns="0" bIns="0" rtlCol="0" anchor="t"/>
           <a:lstStyle/>
           <a:p>
-            <a:pPr indent="0" marL="0">
+            <a:pPr marL="0" indent="0">
               <a:buNone/>
             </a:pPr>
             <a:r>
@@ -4261,7 +4086,7 @@
           </a:solidFill>
           <a:ln/>
           <a:effectLst>
-            <a:outerShdw sx="100000" sy="100000" kx="0" ky="0" algn="bl" rotWithShape="0" blurRad="127000" dist="25400" dir="5400000">
+            <a:outerShdw blurRad="127000" dist="25400" dir="5400000" algn="bl" rotWithShape="0">
               <a:srgbClr val="0F1E2E">
                 <a:alpha val="14000"/>
               </a:srgbClr>
@@ -4290,7 +4115,7 @@
           <a:bodyPr wrap="square" lIns="0" tIns="0" rIns="0" bIns="0" rtlCol="0" anchor="t"/>
           <a:lstStyle/>
           <a:p>
-            <a:pPr indent="0" marL="0">
+            <a:pPr marL="0" indent="0">
               <a:buNone/>
             </a:pPr>
             <a:r>
@@ -4326,7 +4151,7 @@
           <a:bodyPr wrap="square" lIns="0" tIns="0" rIns="0" bIns="0" rtlCol="0" anchor="t"/>
           <a:lstStyle/>
           <a:p>
-            <a:pPr indent="0" marL="0">
+            <a:pPr marL="0" indent="0">
               <a:buNone/>
             </a:pPr>
             <a:r>
@@ -4382,7 +4207,7 @@
           </a:solidFill>
           <a:ln/>
           <a:effectLst>
-            <a:outerShdw sx="100000" sy="100000" kx="0" ky="0" algn="bl" rotWithShape="0" blurRad="127000" dist="25400" dir="5400000">
+            <a:outerShdw blurRad="127000" dist="25400" dir="5400000" algn="bl" rotWithShape="0">
               <a:srgbClr val="0F1E2E">
                 <a:alpha val="14000"/>
               </a:srgbClr>
@@ -4431,7 +4256,7 @@
           <a:bodyPr wrap="square" lIns="0" tIns="0" rIns="0" bIns="0" rtlCol="0" anchor="ctr"/>
           <a:lstStyle/>
           <a:p>
-            <a:pPr indent="0" marL="0">
+            <a:pPr marL="0" indent="0">
               <a:buNone/>
             </a:pPr>
             <a:r>
@@ -4467,7 +4292,7 @@
           </a:solidFill>
           <a:ln/>
           <a:effectLst>
-            <a:outerShdw sx="100000" sy="100000" kx="0" ky="0" algn="bl" rotWithShape="0" blurRad="127000" dist="25400" dir="5400000">
+            <a:outerShdw blurRad="127000" dist="25400" dir="5400000" algn="bl" rotWithShape="0">
               <a:srgbClr val="0F1E2E">
                 <a:alpha val="14000"/>
               </a:srgbClr>
@@ -4516,7 +4341,7 @@
           <a:bodyPr wrap="square" lIns="0" tIns="0" rIns="0" bIns="0" rtlCol="0" anchor="ctr"/>
           <a:lstStyle/>
           <a:p>
-            <a:pPr indent="0" marL="0">
+            <a:pPr marL="0" indent="0">
               <a:buNone/>
             </a:pPr>
             <a:r>
@@ -4552,7 +4377,7 @@
           </a:solidFill>
           <a:ln/>
           <a:effectLst>
-            <a:outerShdw sx="100000" sy="100000" kx="0" ky="0" algn="bl" rotWithShape="0" blurRad="127000" dist="25400" dir="5400000">
+            <a:outerShdw blurRad="127000" dist="25400" dir="5400000" algn="bl" rotWithShape="0">
               <a:srgbClr val="0F1E2E">
                 <a:alpha val="14000"/>
               </a:srgbClr>
@@ -4601,7 +4426,7 @@
           <a:bodyPr wrap="square" lIns="0" tIns="0" rIns="0" bIns="0" rtlCol="0" anchor="ctr"/>
           <a:lstStyle/>
           <a:p>
-            <a:pPr indent="0" marL="0">
+            <a:pPr marL="0" indent="0">
               <a:buNone/>
             </a:pPr>
             <a:r>
@@ -4637,7 +4462,7 @@
           </a:solidFill>
           <a:ln/>
           <a:effectLst>
-            <a:outerShdw sx="100000" sy="100000" kx="0" ky="0" algn="bl" rotWithShape="0" blurRad="127000" dist="25400" dir="5400000">
+            <a:outerShdw blurRad="127000" dist="25400" dir="5400000" algn="bl" rotWithShape="0">
               <a:srgbClr val="0F1E2E">
                 <a:alpha val="14000"/>
               </a:srgbClr>
@@ -4686,7 +4511,7 @@
           <a:bodyPr wrap="square" lIns="0" tIns="0" rIns="0" bIns="0" rtlCol="0" anchor="ctr"/>
           <a:lstStyle/>
           <a:p>
-            <a:pPr indent="0" marL="0">
+            <a:pPr marL="0" indent="0">
               <a:buNone/>
             </a:pPr>
             <a:r>
@@ -4722,7 +4547,7 @@
           <a:bodyPr wrap="square" lIns="0" tIns="0" rIns="0" bIns="0" rtlCol="0" anchor="t"/>
           <a:lstStyle/>
           <a:p>
-            <a:pPr indent="0" marL="0">
+            <a:pPr marL="0" indent="0">
               <a:buNone/>
             </a:pPr>
             <a:r>
@@ -4757,7 +4582,7 @@
           </a:prstGeom>
           <a:extLst>
             <a:ext uri="{C572A759-6A51-4108-AA02-DFA0A04FC94B}">
-              <ma14:wrappingTextBoxFlag xmlns:ma14="http://schemas.microsoft.com/office/mac/drawingml/2011/main" val="0"/>
+              <ma14:wrappingTextBoxFlag xmlns:ma14="http://schemas.microsoft.com/office/mac/drawingml/2011/main" xmlns="" val="0"/>
             </a:ext>
           </a:extLst>
         </p:spPr>
@@ -4775,7 +4600,7 @@
           <a:p>
             <a:pPr algn="r"/>
             <a:fld id="{F7021451-1387-4CA6-816F-3879F97B5CBC}" type="slidenum">
-              <a:rPr b="0" lang="en-US"/>
+              <a:rPr lang="en-US" b="0"/>
               <a:t>3</a:t>
             </a:fld>
             <a:endParaRPr lang="en-US"/>
@@ -4810,9 +4635,11 @@
       <p:sp>
         <p:nvSpPr>
           <p:cNvPr id="2" name="Text 1"/>
-          <p:cNvSpPr/>
+          <p:cNvSpPr>
+            <a:spLocks noGrp="1"/>
+          </p:cNvSpPr>
           <p:nvPr>
-            <p:ph idx="101" type="body" hasCustomPrompt="1"/>
+            <p:ph type="body" idx="101" hasCustomPrompt="1"/>
           </p:nvPr>
         </p:nvSpPr>
         <p:spPr>
@@ -4830,11 +4657,11 @@
           <a:bodyPr wrap="square" lIns="0" tIns="0" rIns="0" bIns="0" rtlCol="0" anchor="t"/>
           <a:lstStyle/>
           <a:p>
-            <a:pPr indent="0" marL="0">
-              <a:buNone/>
-            </a:pPr>
-            <a:r>
-              <a:rPr lang="en-US" sz="1300" b="1" spc="300" kern="0" dirty="0">
+            <a:pPr marL="0" indent="0">
+              <a:buNone/>
+            </a:pPr>
+            <a:r>
+              <a:rPr lang="en-US" sz="1300" b="1" kern="0" spc="300" dirty="0">
                 <a:solidFill>
                   <a:schemeClr val="accent2"/>
                 </a:solidFill>
@@ -4848,9 +4675,11 @@
       <p:sp>
         <p:nvSpPr>
           <p:cNvPr id="3" name="Text 1"/>
-          <p:cNvSpPr/>
+          <p:cNvSpPr>
+            <a:spLocks noGrp="1"/>
+          </p:cNvSpPr>
           <p:nvPr>
-            <p:ph idx="102" type="title" hasCustomPrompt="1"/>
+            <p:ph type="title" idx="102" hasCustomPrompt="1"/>
           </p:nvPr>
         </p:nvSpPr>
         <p:spPr>
@@ -4868,7 +4697,7 @@
           <a:bodyPr wrap="square" lIns="0" tIns="0" rIns="0" bIns="0" rtlCol="0" anchor="t"/>
           <a:lstStyle/>
           <a:p>
-            <a:pPr algn="l" indent="0" marL="0">
+            <a:pPr marL="0" indent="0" algn="l">
               <a:buNone/>
             </a:pPr>
             <a:r>
@@ -4926,11 +4755,11 @@
           <a:bodyPr wrap="square" lIns="0" tIns="0" rIns="0" bIns="0" rtlCol="0" anchor="t"/>
           <a:lstStyle/>
           <a:p>
-            <a:pPr indent="0" marL="0">
-              <a:buNone/>
-            </a:pPr>
-            <a:r>
-              <a:rPr lang="en-US" sz="1200" b="1" spc="200" kern="0" dirty="0">
+            <a:pPr marL="0" indent="0">
+              <a:buNone/>
+            </a:pPr>
+            <a:r>
+              <a:rPr lang="en-US" sz="1200" b="1" kern="0" spc="200" dirty="0">
                 <a:solidFill>
                   <a:schemeClr val="accent2"/>
                 </a:solidFill>
@@ -4962,7 +4791,7 @@
           <a:bodyPr wrap="square" lIns="0" tIns="0" rIns="0" bIns="0" rtlCol="0" anchor="t"/>
           <a:lstStyle/>
           <a:p>
-            <a:pPr indent="0" marL="0">
+            <a:pPr marL="0" indent="0">
               <a:buNone/>
             </a:pPr>
             <a:r>
@@ -4998,7 +4827,7 @@
           <a:bodyPr wrap="square" lIns="0" tIns="0" rIns="0" bIns="0" rtlCol="0" anchor="t"/>
           <a:lstStyle/>
           <a:p>
-            <a:pPr indent="0" marL="0">
+            <a:pPr marL="0" indent="0">
               <a:buNone/>
             </a:pPr>
             <a:r>
@@ -5076,11 +4905,11 @@
           <a:bodyPr wrap="square" lIns="0" tIns="0" rIns="0" bIns="0" rtlCol="0" anchor="t"/>
           <a:lstStyle/>
           <a:p>
-            <a:pPr indent="0" marL="0">
-              <a:buNone/>
-            </a:pPr>
-            <a:r>
-              <a:rPr lang="en-US" sz="1200" b="1" spc="200" kern="0" dirty="0">
+            <a:pPr marL="0" indent="0">
+              <a:buNone/>
+            </a:pPr>
+            <a:r>
+              <a:rPr lang="en-US" sz="1200" b="1" kern="0" spc="200" dirty="0">
                 <a:solidFill>
                   <a:schemeClr val="accent2"/>
                 </a:solidFill>
@@ -5112,7 +4941,7 @@
           <a:bodyPr wrap="square" lIns="0" tIns="0" rIns="0" bIns="0" rtlCol="0" anchor="t"/>
           <a:lstStyle/>
           <a:p>
-            <a:pPr indent="0" marL="0">
+            <a:pPr marL="0" indent="0">
               <a:buNone/>
             </a:pPr>
             <a:r>
@@ -5148,7 +4977,7 @@
           <a:bodyPr wrap="square" lIns="0" tIns="0" rIns="0" bIns="0" rtlCol="0" anchor="t"/>
           <a:lstStyle/>
           <a:p>
-            <a:pPr indent="0" marL="0">
+            <a:pPr marL="0" indent="0">
               <a:buNone/>
             </a:pPr>
             <a:r>
@@ -5226,11 +5055,11 @@
           <a:bodyPr wrap="square" lIns="0" tIns="0" rIns="0" bIns="0" rtlCol="0" anchor="t"/>
           <a:lstStyle/>
           <a:p>
-            <a:pPr indent="0" marL="0">
-              <a:buNone/>
-            </a:pPr>
-            <a:r>
-              <a:rPr lang="en-US" sz="1200" b="1" spc="200" kern="0" dirty="0">
+            <a:pPr marL="0" indent="0">
+              <a:buNone/>
+            </a:pPr>
+            <a:r>
+              <a:rPr lang="en-US" sz="1200" b="1" kern="0" spc="200" dirty="0">
                 <a:solidFill>
                   <a:schemeClr val="accent2"/>
                 </a:solidFill>
@@ -5262,7 +5091,7 @@
           <a:bodyPr wrap="square" lIns="0" tIns="0" rIns="0" bIns="0" rtlCol="0" anchor="t"/>
           <a:lstStyle/>
           <a:p>
-            <a:pPr indent="0" marL="0">
+            <a:pPr marL="0" indent="0">
               <a:buNone/>
             </a:pPr>
             <a:r>
@@ -5298,7 +5127,7 @@
           <a:bodyPr wrap="square" lIns="0" tIns="0" rIns="0" bIns="0" rtlCol="0" anchor="t"/>
           <a:lstStyle/>
           <a:p>
-            <a:pPr indent="0" marL="0">
+            <a:pPr marL="0" indent="0">
               <a:buNone/>
             </a:pPr>
             <a:r>
@@ -5376,11 +5205,11 @@
           <a:bodyPr wrap="square" lIns="0" tIns="0" rIns="0" bIns="0" rtlCol="0" anchor="t"/>
           <a:lstStyle/>
           <a:p>
-            <a:pPr indent="0" marL="0">
-              <a:buNone/>
-            </a:pPr>
-            <a:r>
-              <a:rPr lang="en-US" sz="1200" b="1" spc="200" kern="0" dirty="0">
+            <a:pPr marL="0" indent="0">
+              <a:buNone/>
+            </a:pPr>
+            <a:r>
+              <a:rPr lang="en-US" sz="1200" b="1" kern="0" spc="200" dirty="0">
                 <a:solidFill>
                   <a:schemeClr val="accent2"/>
                 </a:solidFill>
@@ -5412,7 +5241,7 @@
           <a:bodyPr wrap="square" lIns="0" tIns="0" rIns="0" bIns="0" rtlCol="0" anchor="t"/>
           <a:lstStyle/>
           <a:p>
-            <a:pPr indent="0" marL="0">
+            <a:pPr marL="0" indent="0">
               <a:buNone/>
             </a:pPr>
             <a:r>
@@ -5448,7 +5277,7 @@
           <a:bodyPr wrap="square" lIns="0" tIns="0" rIns="0" bIns="0" rtlCol="0" anchor="t"/>
           <a:lstStyle/>
           <a:p>
-            <a:pPr indent="0" marL="0">
+            <a:pPr marL="0" indent="0">
               <a:buNone/>
             </a:pPr>
             <a:r>
@@ -5526,11 +5355,11 @@
           <a:bodyPr wrap="square" lIns="0" tIns="0" rIns="0" bIns="0" rtlCol="0" anchor="t"/>
           <a:lstStyle/>
           <a:p>
-            <a:pPr indent="0" marL="0">
-              <a:buNone/>
-            </a:pPr>
-            <a:r>
-              <a:rPr lang="en-US" sz="1200" b="1" spc="200" kern="0" dirty="0">
+            <a:pPr marL="0" indent="0">
+              <a:buNone/>
+            </a:pPr>
+            <a:r>
+              <a:rPr lang="en-US" sz="1200" b="1" kern="0" spc="200" dirty="0">
                 <a:solidFill>
                   <a:schemeClr val="accent2"/>
                 </a:solidFill>
@@ -5562,7 +5391,7 @@
           <a:bodyPr wrap="square" lIns="0" tIns="0" rIns="0" bIns="0" rtlCol="0" anchor="t"/>
           <a:lstStyle/>
           <a:p>
-            <a:pPr indent="0" marL="0">
+            <a:pPr marL="0" indent="0">
               <a:buNone/>
             </a:pPr>
             <a:r>
@@ -5598,7 +5427,7 @@
           <a:bodyPr wrap="square" lIns="0" tIns="0" rIns="0" bIns="0" rtlCol="0" anchor="t"/>
           <a:lstStyle/>
           <a:p>
-            <a:pPr indent="0" marL="0">
+            <a:pPr marL="0" indent="0">
               <a:buNone/>
             </a:pPr>
             <a:r>
@@ -5656,11 +5485,11 @@
           <a:bodyPr wrap="square" lIns="0" tIns="0" rIns="0" bIns="0" rtlCol="0" anchor="t"/>
           <a:lstStyle/>
           <a:p>
-            <a:pPr indent="0" marL="0">
-              <a:buNone/>
-            </a:pPr>
-            <a:r>
-              <a:rPr lang="en-US" sz="1200" b="1" spc="200" kern="0" dirty="0">
+            <a:pPr marL="0" indent="0">
+              <a:buNone/>
+            </a:pPr>
+            <a:r>
+              <a:rPr lang="en-US" sz="1200" b="1" kern="0" spc="200" dirty="0">
                 <a:solidFill>
                   <a:schemeClr val="accent3"/>
                 </a:solidFill>
@@ -5692,7 +5521,7 @@
           <a:bodyPr wrap="square" lIns="0" tIns="0" rIns="0" bIns="0" rtlCol="0" anchor="t"/>
           <a:lstStyle/>
           <a:p>
-            <a:pPr indent="0" marL="0">
+            <a:pPr marL="0" indent="0">
               <a:buNone/>
             </a:pPr>
             <a:r>
@@ -5750,11 +5579,11 @@
           <a:bodyPr wrap="square" lIns="0" tIns="0" rIns="0" bIns="0" rtlCol="0" anchor="t"/>
           <a:lstStyle/>
           <a:p>
-            <a:pPr indent="0" marL="0">
-              <a:buNone/>
-            </a:pPr>
-            <a:r>
-              <a:rPr lang="en-US" sz="1200" b="1" spc="200" kern="0" dirty="0">
+            <a:pPr marL="0" indent="0">
+              <a:buNone/>
+            </a:pPr>
+            <a:r>
+              <a:rPr lang="en-US" sz="1200" b="1" kern="0" spc="200" dirty="0">
                 <a:solidFill>
                   <a:schemeClr val="accent3"/>
                 </a:solidFill>
@@ -5786,7 +5615,7 @@
           <a:bodyPr wrap="square" lIns="0" tIns="0" rIns="0" bIns="0" rtlCol="0" anchor="t"/>
           <a:lstStyle/>
           <a:p>
-            <a:pPr indent="0" marL="0">
+            <a:pPr marL="0" indent="0">
               <a:buNone/>
             </a:pPr>
             <a:r>
@@ -5844,11 +5673,11 @@
           <a:bodyPr wrap="square" lIns="0" tIns="0" rIns="0" bIns="0" rtlCol="0" anchor="t"/>
           <a:lstStyle/>
           <a:p>
-            <a:pPr indent="0" marL="0">
-              <a:buNone/>
-            </a:pPr>
-            <a:r>
-              <a:rPr lang="en-US" sz="1200" b="1" spc="200" kern="0" dirty="0">
+            <a:pPr marL="0" indent="0">
+              <a:buNone/>
+            </a:pPr>
+            <a:r>
+              <a:rPr lang="en-US" sz="1200" b="1" kern="0" spc="200" dirty="0">
                 <a:solidFill>
                   <a:schemeClr val="accent3"/>
                 </a:solidFill>
@@ -5880,7 +5709,7 @@
           <a:bodyPr wrap="square" lIns="0" tIns="0" rIns="0" bIns="0" rtlCol="0" anchor="t"/>
           <a:lstStyle/>
           <a:p>
-            <a:pPr indent="0" marL="0">
+            <a:pPr marL="0" indent="0">
               <a:buNone/>
             </a:pPr>
             <a:r>
@@ -5916,7 +5745,7 @@
           <a:bodyPr wrap="square" lIns="0" tIns="0" rIns="0" bIns="0" rtlCol="0" anchor="t"/>
           <a:lstStyle/>
           <a:p>
-            <a:pPr indent="0" marL="0">
+            <a:pPr marL="0" indent="0">
               <a:buNone/>
             </a:pPr>
             <a:r>
@@ -5933,7 +5762,7 @@
       </p:sp>
       <p:sp>
         <p:nvSpPr>
-          <p:cNvPr id="25" name="Slide Number Placeholder 0"/>
+          <p:cNvPr id="38" name="Slide Number Placeholder 0"/>
           <p:cNvSpPr>
             <a:spLocks noGrp="1"/>
           </p:cNvSpPr>
@@ -5951,7 +5780,7 @@
           </a:prstGeom>
           <a:extLst>
             <a:ext uri="{C572A759-6A51-4108-AA02-DFA0A04FC94B}">
-              <ma14:wrappingTextBoxFlag xmlns:ma14="http://schemas.microsoft.com/office/mac/drawingml/2011/main" val="0"/>
+              <ma14:wrappingTextBoxFlag xmlns:ma14="http://schemas.microsoft.com/office/mac/drawingml/2011/main" xmlns="" val="0"/>
             </a:ext>
           </a:extLst>
         </p:spPr>
@@ -5969,7 +5798,7 @@
           <a:p>
             <a:pPr algn="r"/>
             <a:fld id="{F7021451-1387-4CA6-816F-3879F97B5CBC}" type="slidenum">
-              <a:rPr b="0" lang="en-US"/>
+              <a:rPr lang="en-US" b="0"/>
               <a:t>4</a:t>
             </a:fld>
             <a:endParaRPr lang="en-US"/>
@@ -6004,9 +5833,11 @@
       <p:sp>
         <p:nvSpPr>
           <p:cNvPr id="2" name="Text 1"/>
-          <p:cNvSpPr/>
+          <p:cNvSpPr>
+            <a:spLocks noGrp="1"/>
+          </p:cNvSpPr>
           <p:nvPr>
-            <p:ph idx="101" type="body" hasCustomPrompt="1"/>
+            <p:ph type="body" idx="101" hasCustomPrompt="1"/>
           </p:nvPr>
         </p:nvSpPr>
         <p:spPr>
@@ -6024,11 +5855,11 @@
           <a:bodyPr wrap="square" lIns="0" tIns="0" rIns="0" bIns="0" rtlCol="0" anchor="t"/>
           <a:lstStyle/>
           <a:p>
-            <a:pPr indent="0" marL="0">
-              <a:buNone/>
-            </a:pPr>
-            <a:r>
-              <a:rPr lang="en-US" sz="1300" b="1" spc="300" kern="0" dirty="0">
+            <a:pPr marL="0" indent="0">
+              <a:buNone/>
+            </a:pPr>
+            <a:r>
+              <a:rPr lang="en-US" sz="1300" b="1" kern="0" spc="300" dirty="0">
                 <a:solidFill>
                   <a:schemeClr val="accent1"/>
                 </a:solidFill>
@@ -6042,9 +5873,11 @@
       <p:sp>
         <p:nvSpPr>
           <p:cNvPr id="3" name="Text 1"/>
-          <p:cNvSpPr/>
+          <p:cNvSpPr>
+            <a:spLocks noGrp="1"/>
+          </p:cNvSpPr>
           <p:nvPr>
-            <p:ph idx="102" type="title" hasCustomPrompt="1"/>
+            <p:ph type="title" idx="102" hasCustomPrompt="1"/>
           </p:nvPr>
         </p:nvSpPr>
         <p:spPr>
@@ -6062,7 +5895,7 @@
           <a:bodyPr wrap="square" lIns="0" tIns="0" rIns="0" bIns="0" rtlCol="0" anchor="t"/>
           <a:lstStyle/>
           <a:p>
-            <a:pPr algn="l" indent="0" marL="0">
+            <a:pPr marL="0" indent="0" algn="l">
               <a:buNone/>
             </a:pPr>
             <a:r>
@@ -6098,7 +5931,7 @@
           </a:solidFill>
           <a:ln/>
           <a:effectLst>
-            <a:outerShdw sx="100000" sy="100000" kx="0" ky="0" algn="bl" rotWithShape="0" blurRad="127000" dist="25400" dir="5400000">
+            <a:outerShdw blurRad="127000" dist="25400" dir="5400000" algn="bl" rotWithShape="0">
               <a:srgbClr val="0F1E2E">
                 <a:alpha val="14000"/>
               </a:srgbClr>
@@ -6128,297 +5961,7 @@
       </p:sp>
       <p:pic>
         <p:nvPicPr>
-          <p:cNvPr id="6" name="Trust icon 1" descr="Trust icon 1">    </p:cNvPr>
-          <p:cNvPicPr>
-            <a:picLocks noChangeAspect="1"/>
-          </p:cNvPicPr>
-          <p:nvPr/>
-        </p:nvPicPr>
-        <p:blipFill>
-          <a:blip r:embed="rId1"/>
-          <a:stretch>
-            <a:fillRect/>
-          </a:stretch>
-        </p:blipFill>
-        <p:spPr>
-          <a:xfrm>
-            <a:off x="1157630" y="2346350"/>
-            <a:ext cx="336499" cy="336499"/>
-          </a:xfrm>
-          <a:prstGeom prst="rect">
-            <a:avLst/>
-          </a:prstGeom>
-        </p:spPr>
-      </p:pic>
-      <p:sp>
-        <p:nvSpPr>
-          <p:cNvPr id="7" name="Trust title 1"/>
-          <p:cNvSpPr txBox="1"/>
-          <p:nvPr/>
-        </p:nvSpPr>
-        <p:spPr>
-          <a:xfrm>
-            <a:off x="2011680" y="2075688"/>
-            <a:ext cx="3749040" cy="411480"/>
-          </a:xfrm>
-          <a:prstGeom prst="rect">
-            <a:avLst/>
-          </a:prstGeom>
-          <a:noFill/>
-          <a:ln/>
-        </p:spPr>
-        <p:txBody>
-          <a:bodyPr wrap="square" lIns="0" tIns="0" rIns="0" bIns="0" rtlCol="0" anchor="t"/>
-          <a:lstStyle/>
-          <a:p>
-            <a:pPr indent="0" marL="0">
-              <a:buNone/>
-            </a:pPr>
-            <a:r>
-              <a:rPr lang="en-US" sz="1900" b="1" dirty="0">
-                <a:solidFill>
-                  <a:schemeClr val="tx1"/>
-                </a:solidFill>
-              </a:rPr>
-              <a:t>Verbatim quotes</a:t>
-            </a:r>
-            <a:endParaRPr lang="en-US" sz="1900" dirty="0"/>
-          </a:p>
-        </p:txBody>
-      </p:sp>
-      <p:sp>
-        <p:nvSpPr>
-          <p:cNvPr id="8" name="Trust text 1"/>
-          <p:cNvSpPr txBox="1"/>
-          <p:nvPr/>
-        </p:nvSpPr>
-        <p:spPr>
-          <a:xfrm>
-            <a:off x="2011680" y="2560320"/>
-            <a:ext cx="3749040" cy="1005840"/>
-          </a:xfrm>
-          <a:prstGeom prst="rect">
-            <a:avLst/>
-          </a:prstGeom>
-          <a:noFill/>
-          <a:ln/>
-        </p:spPr>
-        <p:txBody>
-          <a:bodyPr wrap="square" lIns="0" tIns="0" rIns="0" bIns="0" rtlCol="0" anchor="t"/>
-          <a:lstStyle/>
-          <a:p>
-            <a:pPr indent="0" marL="0">
-              <a:buNone/>
-            </a:pPr>
-            <a:r>
-              <a:rPr lang="en-US" sz="1500" dirty="0">
-                <a:solidFill>
-                  <a:schemeClr val="accent4"/>
-                </a:solidFill>
-              </a:rPr>
-              <a:t>Each requirement carries a quote from the source, and a score checks the quote is really there.</a:t>
-            </a:r>
-            <a:endParaRPr lang="en-US" sz="1500" dirty="0"/>
-          </a:p>
-        </p:txBody>
-      </p:sp>
-      <p:sp>
-        <p:nvSpPr>
-          <p:cNvPr id="9" name="Trust card 2"/>
-          <p:cNvSpPr/>
-          <p:nvPr/>
-        </p:nvSpPr>
-        <p:spPr>
-          <a:xfrm>
-            <a:off x="6263640" y="1783080"/>
-            <a:ext cx="5349240" cy="1920240"/>
-          </a:xfrm>
-          <a:prstGeom prst="roundRect">
-            <a:avLst>
-              <a:gd name="adj" fmla="val 5714"/>
-            </a:avLst>
-          </a:prstGeom>
-          <a:solidFill>
-            <a:schemeClr val="bg1"/>
-          </a:solidFill>
-          <a:ln/>
-          <a:effectLst>
-            <a:outerShdw sx="100000" sy="100000" kx="0" ky="0" algn="bl" rotWithShape="0" blurRad="127000" dist="25400" dir="5400000">
-              <a:srgbClr val="0F1E2E">
-                <a:alpha val="14000"/>
-              </a:srgbClr>
-            </a:outerShdw>
-          </a:effectLst>
-        </p:spPr>
-      </p:sp>
-      <p:sp>
-        <p:nvSpPr>
-          <p:cNvPr id="10" name="Trust icon 2 circle"/>
-          <p:cNvSpPr/>
-          <p:nvPr/>
-        </p:nvSpPr>
-        <p:spPr>
-          <a:xfrm>
-            <a:off x="6583680" y="2148840"/>
-            <a:ext cx="731520" cy="731520"/>
-          </a:xfrm>
-          <a:prstGeom prst="ellipse">
-            <a:avLst/>
-          </a:prstGeom>
-          <a:solidFill>
-            <a:schemeClr val="accent1"/>
-          </a:solidFill>
-          <a:ln/>
-        </p:spPr>
-      </p:sp>
-      <p:pic>
-        <p:nvPicPr>
-          <p:cNvPr id="11" name="Trust icon 2" descr="Trust icon 2">    </p:cNvPr>
-          <p:cNvPicPr>
-            <a:picLocks noChangeAspect="1"/>
-          </p:cNvPicPr>
-          <p:nvPr/>
-        </p:nvPicPr>
-        <p:blipFill>
-          <a:blip r:embed="rId2"/>
-          <a:stretch>
-            <a:fillRect/>
-          </a:stretch>
-        </p:blipFill>
-        <p:spPr>
-          <a:xfrm>
-            <a:off x="6781190" y="2346350"/>
-            <a:ext cx="336499" cy="336499"/>
-          </a:xfrm>
-          <a:prstGeom prst="rect">
-            <a:avLst/>
-          </a:prstGeom>
-        </p:spPr>
-      </p:pic>
-      <p:sp>
-        <p:nvSpPr>
-          <p:cNvPr id="12" name="Trust title 2"/>
-          <p:cNvSpPr txBox="1"/>
-          <p:nvPr/>
-        </p:nvSpPr>
-        <p:spPr>
-          <a:xfrm>
-            <a:off x="7635240" y="2075688"/>
-            <a:ext cx="3749040" cy="411480"/>
-          </a:xfrm>
-          <a:prstGeom prst="rect">
-            <a:avLst/>
-          </a:prstGeom>
-          <a:noFill/>
-          <a:ln/>
-        </p:spPr>
-        <p:txBody>
-          <a:bodyPr wrap="square" lIns="0" tIns="0" rIns="0" bIns="0" rtlCol="0" anchor="t"/>
-          <a:lstStyle/>
-          <a:p>
-            <a:pPr indent="0" marL="0">
-              <a:buNone/>
-            </a:pPr>
-            <a:r>
-              <a:rPr lang="en-US" sz="1900" b="1" dirty="0">
-                <a:solidFill>
-                  <a:schemeClr val="tx1"/>
-                </a:solidFill>
-              </a:rPr>
-              <a:t>"Not specified"</a:t>
-            </a:r>
-            <a:endParaRPr lang="en-US" sz="1900" dirty="0"/>
-          </a:p>
-        </p:txBody>
-      </p:sp>
-      <p:sp>
-        <p:nvSpPr>
-          <p:cNvPr id="13" name="Trust text 2"/>
-          <p:cNvSpPr txBox="1"/>
-          <p:nvPr/>
-        </p:nvSpPr>
-        <p:spPr>
-          <a:xfrm>
-            <a:off x="7635240" y="2560320"/>
-            <a:ext cx="3749040" cy="1005840"/>
-          </a:xfrm>
-          <a:prstGeom prst="rect">
-            <a:avLst/>
-          </a:prstGeom>
-          <a:noFill/>
-          <a:ln/>
-        </p:spPr>
-        <p:txBody>
-          <a:bodyPr wrap="square" lIns="0" tIns="0" rIns="0" bIns="0" rtlCol="0" anchor="t"/>
-          <a:lstStyle/>
-          <a:p>
-            <a:pPr indent="0" marL="0">
-              <a:buNone/>
-            </a:pPr>
-            <a:r>
-              <a:rPr lang="en-US" sz="1500" dirty="0">
-                <a:solidFill>
-                  <a:schemeClr val="accent4"/>
-                </a:solidFill>
-              </a:rPr>
-              <a:t>Empty PRD sections say so, instead of inventing goals or personas.</a:t>
-            </a:r>
-            <a:endParaRPr lang="en-US" sz="1500" dirty="0"/>
-          </a:p>
-        </p:txBody>
-      </p:sp>
-      <p:sp>
-        <p:nvSpPr>
-          <p:cNvPr id="14" name="Trust card 3"/>
-          <p:cNvSpPr/>
-          <p:nvPr/>
-        </p:nvSpPr>
-        <p:spPr>
-          <a:xfrm>
-            <a:off x="640080" y="3931920"/>
-            <a:ext cx="5349240" cy="1920240"/>
-          </a:xfrm>
-          <a:prstGeom prst="roundRect">
-            <a:avLst>
-              <a:gd name="adj" fmla="val 5714"/>
-            </a:avLst>
-          </a:prstGeom>
-          <a:solidFill>
-            <a:schemeClr val="bg1"/>
-          </a:solidFill>
-          <a:ln/>
-          <a:effectLst>
-            <a:outerShdw sx="100000" sy="100000" kx="0" ky="0" algn="bl" rotWithShape="0" blurRad="127000" dist="25400" dir="5400000">
-              <a:srgbClr val="0F1E2E">
-                <a:alpha val="14000"/>
-              </a:srgbClr>
-            </a:outerShdw>
-          </a:effectLst>
-        </p:spPr>
-      </p:sp>
-      <p:sp>
-        <p:nvSpPr>
-          <p:cNvPr id="15" name="Trust icon 3 circle"/>
-          <p:cNvSpPr/>
-          <p:nvPr/>
-        </p:nvSpPr>
-        <p:spPr>
-          <a:xfrm>
-            <a:off x="960120" y="4297680"/>
-            <a:ext cx="731520" cy="731520"/>
-          </a:xfrm>
-          <a:prstGeom prst="ellipse">
-            <a:avLst/>
-          </a:prstGeom>
-          <a:solidFill>
-            <a:schemeClr val="accent1"/>
-          </a:solidFill>
-          <a:ln/>
-        </p:spPr>
-      </p:sp>
-      <p:pic>
-        <p:nvPicPr>
-          <p:cNvPr id="16" name="Trust icon 3" descr="Trust icon 3">    </p:cNvPr>
+          <p:cNvPr id="6" name="Trust icon 1" descr="Trust icon 1"/>
           <p:cNvPicPr>
             <a:picLocks noChangeAspect="1"/>
           </p:cNvPicPr>
@@ -6432,7 +5975,7 @@
         </p:blipFill>
         <p:spPr>
           <a:xfrm>
-            <a:off x="1157630" y="4495190"/>
+            <a:off x="1157630" y="2346350"/>
             <a:ext cx="336499" cy="336499"/>
           </a:xfrm>
           <a:prstGeom prst="rect">
@@ -6442,13 +5985,13 @@
       </p:pic>
       <p:sp>
         <p:nvSpPr>
-          <p:cNvPr id="17" name="Trust title 3"/>
+          <p:cNvPr id="7" name="Trust title 1"/>
           <p:cNvSpPr txBox="1"/>
           <p:nvPr/>
         </p:nvSpPr>
         <p:spPr>
           <a:xfrm>
-            <a:off x="2011680" y="4224528"/>
+            <a:off x="2011680" y="2075688"/>
             <a:ext cx="3749040" cy="411480"/>
           </a:xfrm>
           <a:prstGeom prst="rect">
@@ -6461,7 +6004,7 @@
           <a:bodyPr wrap="square" lIns="0" tIns="0" rIns="0" bIns="0" rtlCol="0" anchor="t"/>
           <a:lstStyle/>
           <a:p>
-            <a:pPr indent="0" marL="0">
+            <a:pPr marL="0" indent="0">
               <a:buNone/>
             </a:pPr>
             <a:r>
@@ -6470,7 +6013,7 @@
                   <a:schemeClr val="tx1"/>
                 </a:solidFill>
               </a:rPr>
-              <a:t>Conflicts recorded, not settled</a:t>
+              <a:t>Verbatim quotes</a:t>
             </a:r>
             <a:endParaRPr lang="en-US" sz="1900" dirty="0"/>
           </a:p>
@@ -6478,13 +6021,13 @@
       </p:sp>
       <p:sp>
         <p:nvSpPr>
-          <p:cNvPr id="18" name="Trust text 3"/>
+          <p:cNvPr id="8" name="Trust text 1"/>
           <p:cNvSpPr txBox="1"/>
           <p:nvPr/>
         </p:nvSpPr>
         <p:spPr>
           <a:xfrm>
-            <a:off x="2011680" y="4709160"/>
+            <a:off x="2011680" y="2560320"/>
             <a:ext cx="3749040" cy="1005840"/>
           </a:xfrm>
           <a:prstGeom prst="rect">
@@ -6497,7 +6040,7 @@
           <a:bodyPr wrap="square" lIns="0" tIns="0" rIns="0" bIns="0" rtlCol="0" anchor="t"/>
           <a:lstStyle/>
           <a:p>
-            <a:pPr indent="0" marL="0">
+            <a:pPr marL="0" indent="0">
               <a:buNone/>
             </a:pPr>
             <a:r>
@@ -6506,7 +6049,7 @@
                   <a:schemeClr val="accent4"/>
                 </a:solidFill>
               </a:rPr>
-              <a:t>Contradictions and stakeholder disagreements are flagged for people to resolve.</a:t>
+              <a:t>Each requirement carries a quote from the source, and a score checks the quote is really there.</a:t>
             </a:r>
             <a:endParaRPr lang="en-US" sz="1500" dirty="0"/>
           </a:p>
@@ -6514,13 +6057,13 @@
       </p:sp>
       <p:sp>
         <p:nvSpPr>
-          <p:cNvPr id="19" name="Trust card 4"/>
+          <p:cNvPr id="9" name="Trust card 2"/>
           <p:cNvSpPr/>
           <p:nvPr/>
         </p:nvSpPr>
         <p:spPr>
           <a:xfrm>
-            <a:off x="6263640" y="3931920"/>
+            <a:off x="6263640" y="1783080"/>
             <a:ext cx="5349240" cy="1920240"/>
           </a:xfrm>
           <a:prstGeom prst="roundRect">
@@ -6533,7 +6076,7 @@
           </a:solidFill>
           <a:ln/>
           <a:effectLst>
-            <a:outerShdw sx="100000" sy="100000" kx="0" ky="0" algn="bl" rotWithShape="0" blurRad="127000" dist="25400" dir="5400000">
+            <a:outerShdw blurRad="127000" dist="25400" dir="5400000" algn="bl" rotWithShape="0">
               <a:srgbClr val="0F1E2E">
                 <a:alpha val="14000"/>
               </a:srgbClr>
@@ -6543,13 +6086,13 @@
       </p:sp>
       <p:sp>
         <p:nvSpPr>
-          <p:cNvPr id="20" name="Trust icon 4 circle"/>
+          <p:cNvPr id="10" name="Trust icon 2 circle"/>
           <p:cNvSpPr/>
           <p:nvPr/>
         </p:nvSpPr>
         <p:spPr>
           <a:xfrm>
-            <a:off x="6583680" y="4297680"/>
+            <a:off x="6583680" y="2148840"/>
             <a:ext cx="731520" cy="731520"/>
           </a:xfrm>
           <a:prstGeom prst="ellipse">
@@ -6563,7 +6106,7 @@
       </p:sp>
       <p:pic>
         <p:nvPicPr>
-          <p:cNvPr id="21" name="Trust icon 4" descr="Trust icon 4">    </p:cNvPr>
+          <p:cNvPr id="11" name="Trust icon 2" descr="Trust icon 2"/>
           <p:cNvPicPr>
             <a:picLocks noChangeAspect="1"/>
           </p:cNvPicPr>
@@ -6577,6 +6120,296 @@
         </p:blipFill>
         <p:spPr>
           <a:xfrm>
+            <a:off x="6781190" y="2346350"/>
+            <a:ext cx="336499" cy="336499"/>
+          </a:xfrm>
+          <a:prstGeom prst="rect">
+            <a:avLst/>
+          </a:prstGeom>
+        </p:spPr>
+      </p:pic>
+      <p:sp>
+        <p:nvSpPr>
+          <p:cNvPr id="12" name="Trust title 2"/>
+          <p:cNvSpPr txBox="1"/>
+          <p:nvPr/>
+        </p:nvSpPr>
+        <p:spPr>
+          <a:xfrm>
+            <a:off x="7635240" y="2075688"/>
+            <a:ext cx="3749040" cy="411480"/>
+          </a:xfrm>
+          <a:prstGeom prst="rect">
+            <a:avLst/>
+          </a:prstGeom>
+          <a:noFill/>
+          <a:ln/>
+        </p:spPr>
+        <p:txBody>
+          <a:bodyPr wrap="square" lIns="0" tIns="0" rIns="0" bIns="0" rtlCol="0" anchor="t"/>
+          <a:lstStyle/>
+          <a:p>
+            <a:pPr marL="0" indent="0">
+              <a:buNone/>
+            </a:pPr>
+            <a:r>
+              <a:rPr lang="en-US" sz="1900" b="1" dirty="0">
+                <a:solidFill>
+                  <a:schemeClr val="tx1"/>
+                </a:solidFill>
+              </a:rPr>
+              <a:t>"Not specified"</a:t>
+            </a:r>
+            <a:endParaRPr lang="en-US" sz="1900" dirty="0"/>
+          </a:p>
+        </p:txBody>
+      </p:sp>
+      <p:sp>
+        <p:nvSpPr>
+          <p:cNvPr id="13" name="Trust text 2"/>
+          <p:cNvSpPr txBox="1"/>
+          <p:nvPr/>
+        </p:nvSpPr>
+        <p:spPr>
+          <a:xfrm>
+            <a:off x="7635240" y="2560320"/>
+            <a:ext cx="3749040" cy="1005840"/>
+          </a:xfrm>
+          <a:prstGeom prst="rect">
+            <a:avLst/>
+          </a:prstGeom>
+          <a:noFill/>
+          <a:ln/>
+        </p:spPr>
+        <p:txBody>
+          <a:bodyPr wrap="square" lIns="0" tIns="0" rIns="0" bIns="0" rtlCol="0" anchor="t"/>
+          <a:lstStyle/>
+          <a:p>
+            <a:pPr marL="0" indent="0">
+              <a:buNone/>
+            </a:pPr>
+            <a:r>
+              <a:rPr lang="en-US" sz="1500" dirty="0">
+                <a:solidFill>
+                  <a:schemeClr val="accent4"/>
+                </a:solidFill>
+              </a:rPr>
+              <a:t>Empty PRD sections say so, instead of inventing goals or personas.</a:t>
+            </a:r>
+            <a:endParaRPr lang="en-US" sz="1500" dirty="0"/>
+          </a:p>
+        </p:txBody>
+      </p:sp>
+      <p:sp>
+        <p:nvSpPr>
+          <p:cNvPr id="14" name="Trust card 3"/>
+          <p:cNvSpPr/>
+          <p:nvPr/>
+        </p:nvSpPr>
+        <p:spPr>
+          <a:xfrm>
+            <a:off x="640080" y="3931920"/>
+            <a:ext cx="5349240" cy="1920240"/>
+          </a:xfrm>
+          <a:prstGeom prst="roundRect">
+            <a:avLst>
+              <a:gd name="adj" fmla="val 5714"/>
+            </a:avLst>
+          </a:prstGeom>
+          <a:solidFill>
+            <a:schemeClr val="bg1"/>
+          </a:solidFill>
+          <a:ln/>
+          <a:effectLst>
+            <a:outerShdw blurRad="127000" dist="25400" dir="5400000" algn="bl" rotWithShape="0">
+              <a:srgbClr val="0F1E2E">
+                <a:alpha val="14000"/>
+              </a:srgbClr>
+            </a:outerShdw>
+          </a:effectLst>
+        </p:spPr>
+      </p:sp>
+      <p:sp>
+        <p:nvSpPr>
+          <p:cNvPr id="15" name="Trust icon 3 circle"/>
+          <p:cNvSpPr/>
+          <p:nvPr/>
+        </p:nvSpPr>
+        <p:spPr>
+          <a:xfrm>
+            <a:off x="960120" y="4297680"/>
+            <a:ext cx="731520" cy="731520"/>
+          </a:xfrm>
+          <a:prstGeom prst="ellipse">
+            <a:avLst/>
+          </a:prstGeom>
+          <a:solidFill>
+            <a:schemeClr val="accent1"/>
+          </a:solidFill>
+          <a:ln/>
+        </p:spPr>
+      </p:sp>
+      <p:pic>
+        <p:nvPicPr>
+          <p:cNvPr id="16" name="Trust icon 3" descr="Trust icon 3"/>
+          <p:cNvPicPr>
+            <a:picLocks noChangeAspect="1"/>
+          </p:cNvPicPr>
+          <p:nvPr/>
+        </p:nvPicPr>
+        <p:blipFill>
+          <a:blip r:embed="rId5"/>
+          <a:stretch>
+            <a:fillRect/>
+          </a:stretch>
+        </p:blipFill>
+        <p:spPr>
+          <a:xfrm>
+            <a:off x="1157630" y="4495190"/>
+            <a:ext cx="336499" cy="336499"/>
+          </a:xfrm>
+          <a:prstGeom prst="rect">
+            <a:avLst/>
+          </a:prstGeom>
+        </p:spPr>
+      </p:pic>
+      <p:sp>
+        <p:nvSpPr>
+          <p:cNvPr id="17" name="Trust title 3"/>
+          <p:cNvSpPr txBox="1"/>
+          <p:nvPr/>
+        </p:nvSpPr>
+        <p:spPr>
+          <a:xfrm>
+            <a:off x="2011680" y="4224528"/>
+            <a:ext cx="3749040" cy="411480"/>
+          </a:xfrm>
+          <a:prstGeom prst="rect">
+            <a:avLst/>
+          </a:prstGeom>
+          <a:noFill/>
+          <a:ln/>
+        </p:spPr>
+        <p:txBody>
+          <a:bodyPr wrap="square" lIns="0" tIns="0" rIns="0" bIns="0" rtlCol="0" anchor="t"/>
+          <a:lstStyle/>
+          <a:p>
+            <a:pPr marL="0" indent="0">
+              <a:buNone/>
+            </a:pPr>
+            <a:r>
+              <a:rPr lang="en-US" sz="1900" b="1" dirty="0">
+                <a:solidFill>
+                  <a:schemeClr val="tx1"/>
+                </a:solidFill>
+              </a:rPr>
+              <a:t>Conflicts recorded, not settled</a:t>
+            </a:r>
+            <a:endParaRPr lang="en-US" sz="1900" dirty="0"/>
+          </a:p>
+        </p:txBody>
+      </p:sp>
+      <p:sp>
+        <p:nvSpPr>
+          <p:cNvPr id="18" name="Trust text 3"/>
+          <p:cNvSpPr txBox="1"/>
+          <p:nvPr/>
+        </p:nvSpPr>
+        <p:spPr>
+          <a:xfrm>
+            <a:off x="2011680" y="4709160"/>
+            <a:ext cx="3749040" cy="1005840"/>
+          </a:xfrm>
+          <a:prstGeom prst="rect">
+            <a:avLst/>
+          </a:prstGeom>
+          <a:noFill/>
+          <a:ln/>
+        </p:spPr>
+        <p:txBody>
+          <a:bodyPr wrap="square" lIns="0" tIns="0" rIns="0" bIns="0" rtlCol="0" anchor="t"/>
+          <a:lstStyle/>
+          <a:p>
+            <a:pPr marL="0" indent="0">
+              <a:buNone/>
+            </a:pPr>
+            <a:r>
+              <a:rPr lang="en-US" sz="1500" dirty="0">
+                <a:solidFill>
+                  <a:schemeClr val="accent4"/>
+                </a:solidFill>
+              </a:rPr>
+              <a:t>Contradictions and stakeholder disagreements are flagged for people to resolve.</a:t>
+            </a:r>
+            <a:endParaRPr lang="en-US" sz="1500" dirty="0"/>
+          </a:p>
+        </p:txBody>
+      </p:sp>
+      <p:sp>
+        <p:nvSpPr>
+          <p:cNvPr id="19" name="Trust card 4"/>
+          <p:cNvSpPr/>
+          <p:nvPr/>
+        </p:nvSpPr>
+        <p:spPr>
+          <a:xfrm>
+            <a:off x="6263640" y="3931920"/>
+            <a:ext cx="5349240" cy="1920240"/>
+          </a:xfrm>
+          <a:prstGeom prst="roundRect">
+            <a:avLst>
+              <a:gd name="adj" fmla="val 5714"/>
+            </a:avLst>
+          </a:prstGeom>
+          <a:solidFill>
+            <a:schemeClr val="bg1"/>
+          </a:solidFill>
+          <a:ln/>
+          <a:effectLst>
+            <a:outerShdw blurRad="127000" dist="25400" dir="5400000" algn="bl" rotWithShape="0">
+              <a:srgbClr val="0F1E2E">
+                <a:alpha val="14000"/>
+              </a:srgbClr>
+            </a:outerShdw>
+          </a:effectLst>
+        </p:spPr>
+      </p:sp>
+      <p:sp>
+        <p:nvSpPr>
+          <p:cNvPr id="20" name="Trust icon 4 circle"/>
+          <p:cNvSpPr/>
+          <p:nvPr/>
+        </p:nvSpPr>
+        <p:spPr>
+          <a:xfrm>
+            <a:off x="6583680" y="4297680"/>
+            <a:ext cx="731520" cy="731520"/>
+          </a:xfrm>
+          <a:prstGeom prst="ellipse">
+            <a:avLst/>
+          </a:prstGeom>
+          <a:solidFill>
+            <a:schemeClr val="accent1"/>
+          </a:solidFill>
+          <a:ln/>
+        </p:spPr>
+      </p:sp>
+      <p:pic>
+        <p:nvPicPr>
+          <p:cNvPr id="21" name="Trust icon 4" descr="Trust icon 4"/>
+          <p:cNvPicPr>
+            <a:picLocks noChangeAspect="1"/>
+          </p:cNvPicPr>
+          <p:nvPr/>
+        </p:nvPicPr>
+        <p:blipFill>
+          <a:blip r:embed="rId6"/>
+          <a:stretch>
+            <a:fillRect/>
+          </a:stretch>
+        </p:blipFill>
+        <p:spPr>
+          <a:xfrm>
             <a:off x="6781190" y="4495190"/>
             <a:ext cx="336499" cy="336499"/>
           </a:xfrm>
@@ -6606,7 +6439,7 @@
           <a:bodyPr wrap="square" lIns="0" tIns="0" rIns="0" bIns="0" rtlCol="0" anchor="t"/>
           <a:lstStyle/>
           <a:p>
-            <a:pPr indent="0" marL="0">
+            <a:pPr marL="0" indent="0">
               <a:buNone/>
             </a:pPr>
             <a:r>
@@ -6642,7 +6475,7 @@
           <a:bodyPr wrap="square" lIns="0" tIns="0" rIns="0" bIns="0" rtlCol="0" anchor="t"/>
           <a:lstStyle/>
           <a:p>
-            <a:pPr indent="0" marL="0">
+            <a:pPr marL="0" indent="0">
               <a:buNone/>
             </a:pPr>
             <a:r>
@@ -6677,7 +6510,7 @@
           </a:prstGeom>
           <a:extLst>
             <a:ext uri="{C572A759-6A51-4108-AA02-DFA0A04FC94B}">
-              <ma14:wrappingTextBoxFlag xmlns:ma14="http://schemas.microsoft.com/office/mac/drawingml/2011/main" val="0"/>
+              <ma14:wrappingTextBoxFlag xmlns:ma14="http://schemas.microsoft.com/office/mac/drawingml/2011/main" xmlns="" val="0"/>
             </a:ext>
           </a:extLst>
         </p:spPr>
@@ -6695,7 +6528,7 @@
           <a:p>
             <a:pPr algn="r"/>
             <a:fld id="{F7021451-1387-4CA6-816F-3879F97B5CBC}" type="slidenum">
-              <a:rPr b="0" lang="en-US"/>
+              <a:rPr lang="en-US" b="0"/>
               <a:t>5</a:t>
             </a:fld>
             <a:endParaRPr lang="en-US"/>
@@ -6730,9 +6563,11 @@
       <p:sp>
         <p:nvSpPr>
           <p:cNvPr id="2" name="Text 1"/>
-          <p:cNvSpPr/>
+          <p:cNvSpPr>
+            <a:spLocks noGrp="1"/>
+          </p:cNvSpPr>
           <p:nvPr>
-            <p:ph idx="101" type="body" hasCustomPrompt="1"/>
+            <p:ph type="body" idx="101" hasCustomPrompt="1"/>
           </p:nvPr>
         </p:nvSpPr>
         <p:spPr>
@@ -6750,11 +6585,11 @@
           <a:bodyPr wrap="square" lIns="0" tIns="0" rIns="0" bIns="0" rtlCol="0" anchor="t"/>
           <a:lstStyle/>
           <a:p>
-            <a:pPr indent="0" marL="0">
-              <a:buNone/>
-            </a:pPr>
-            <a:r>
-              <a:rPr lang="en-US" sz="1300" b="1" spc="300" kern="0" dirty="0">
+            <a:pPr marL="0" indent="0">
+              <a:buNone/>
+            </a:pPr>
+            <a:r>
+              <a:rPr lang="en-US" sz="1300" b="1" kern="0" spc="300" dirty="0">
                 <a:solidFill>
                   <a:schemeClr val="accent1"/>
                 </a:solidFill>
@@ -6768,9 +6603,11 @@
       <p:sp>
         <p:nvSpPr>
           <p:cNvPr id="3" name="Text 1"/>
-          <p:cNvSpPr/>
+          <p:cNvSpPr>
+            <a:spLocks noGrp="1"/>
+          </p:cNvSpPr>
           <p:nvPr>
-            <p:ph idx="102" type="title" hasCustomPrompt="1"/>
+            <p:ph type="title" idx="102" hasCustomPrompt="1"/>
           </p:nvPr>
         </p:nvSpPr>
         <p:spPr>
@@ -6788,7 +6625,7 @@
           <a:bodyPr wrap="square" lIns="0" tIns="0" rIns="0" bIns="0" rtlCol="0" anchor="t"/>
           <a:lstStyle/>
           <a:p>
-            <a:pPr algn="l" indent="0" marL="0">
+            <a:pPr marL="0" indent="0" algn="l">
               <a:buNone/>
             </a:pPr>
             <a:r>
@@ -6824,7 +6661,7 @@
           </a:solidFill>
           <a:ln/>
           <a:effectLst>
-            <a:outerShdw sx="100000" sy="100000" kx="0" ky="0" algn="bl" rotWithShape="0" blurRad="127000" dist="25400" dir="5400000">
+            <a:outerShdw blurRad="127000" dist="25400" dir="5400000" algn="bl" rotWithShape="0">
               <a:srgbClr val="0F1E2E">
                 <a:alpha val="14000"/>
               </a:srgbClr>
@@ -6854,409 +6691,7 @@
       </p:sp>
       <p:pic>
         <p:nvPicPr>
-          <p:cNvPr id="6" name="Step icon 1" descr="Step icon 1">    </p:cNvPr>
-          <p:cNvPicPr>
-            <a:picLocks noChangeAspect="1"/>
-          </p:cNvPicPr>
-          <p:nvPr/>
-        </p:nvPicPr>
-        <p:blipFill>
-          <a:blip r:embed="rId1"/>
-          <a:stretch>
-            <a:fillRect/>
-          </a:stretch>
-        </p:blipFill>
-        <p:spPr>
-          <a:xfrm>
-            <a:off x="1157630" y="2300630"/>
-            <a:ext cx="336499" cy="336499"/>
-          </a:xfrm>
-          <a:prstGeom prst="rect">
-            <a:avLst/>
-          </a:prstGeom>
-        </p:spPr>
-      </p:pic>
-      <p:sp>
-        <p:nvSpPr>
-          <p:cNvPr id="7" name="Step label 1"/>
-          <p:cNvSpPr txBox="1"/>
-          <p:nvPr/>
-        </p:nvSpPr>
-        <p:spPr>
-          <a:xfrm>
-            <a:off x="960120" y="3017520"/>
-            <a:ext cx="2560320" cy="274320"/>
-          </a:xfrm>
-          <a:prstGeom prst="rect">
-            <a:avLst/>
-          </a:prstGeom>
-          <a:noFill/>
-          <a:ln/>
-        </p:spPr>
-        <p:txBody>
-          <a:bodyPr wrap="square" lIns="0" tIns="0" rIns="0" bIns="0" rtlCol="0" anchor="t"/>
-          <a:lstStyle/>
-          <a:p>
-            <a:pPr indent="0" marL="0">
-              <a:buNone/>
-            </a:pPr>
-            <a:r>
-              <a:rPr lang="en-US" sz="1300" b="1" spc="200" kern="0" dirty="0">
-                <a:solidFill>
-                  <a:schemeClr val="accent1"/>
-                </a:solidFill>
-              </a:rPr>
-              <a:t>STEP 1</a:t>
-            </a:r>
-            <a:endParaRPr lang="en-US" sz="1300" dirty="0"/>
-          </a:p>
-        </p:txBody>
-      </p:sp>
-      <p:sp>
-        <p:nvSpPr>
-          <p:cNvPr id="8" name="Step title 1"/>
-          <p:cNvSpPr txBox="1"/>
-          <p:nvPr/>
-        </p:nvSpPr>
-        <p:spPr>
-          <a:xfrm>
-            <a:off x="960120" y="3337560"/>
-            <a:ext cx="2560320" cy="457200"/>
-          </a:xfrm>
-          <a:prstGeom prst="rect">
-            <a:avLst/>
-          </a:prstGeom>
-          <a:noFill/>
-          <a:ln/>
-        </p:spPr>
-        <p:txBody>
-          <a:bodyPr wrap="square" lIns="0" tIns="0" rIns="0" bIns="0" rtlCol="0" anchor="t"/>
-          <a:lstStyle/>
-          <a:p>
-            <a:pPr indent="0" marL="0">
-              <a:buNone/>
-            </a:pPr>
-            <a:r>
-              <a:rPr lang="en-US" sz="2400" b="1" dirty="0">
-                <a:solidFill>
-                  <a:schemeClr val="tx1"/>
-                </a:solidFill>
-              </a:rPr>
-              <a:t>Drop</a:t>
-            </a:r>
-            <a:endParaRPr lang="en-US" sz="2400" dirty="0"/>
-          </a:p>
-        </p:txBody>
-      </p:sp>
-      <p:sp>
-        <p:nvSpPr>
-          <p:cNvPr id="9" name="Step text 1"/>
-          <p:cNvSpPr txBox="1"/>
-          <p:nvPr/>
-        </p:nvSpPr>
-        <p:spPr>
-          <a:xfrm>
-            <a:off x="960120" y="3886200"/>
-            <a:ext cx="2560320" cy="1005840"/>
-          </a:xfrm>
-          <a:prstGeom prst="rect">
-            <a:avLst/>
-          </a:prstGeom>
-          <a:noFill/>
-          <a:ln/>
-        </p:spPr>
-        <p:txBody>
-          <a:bodyPr wrap="square" lIns="0" tIns="0" rIns="0" bIns="0" rtlCol="0" anchor="t"/>
-          <a:lstStyle/>
-          <a:p>
-            <a:pPr indent="0" marL="0">
-              <a:buNone/>
-            </a:pPr>
-            <a:r>
-              <a:rPr lang="en-US" sz="1500" dirty="0">
-                <a:solidFill>
-                  <a:schemeClr val="accent4"/>
-                </a:solidFill>
-              </a:rPr>
-              <a:t>Transcripts, notes, or briefs land in an Inbox folder.</a:t>
-            </a:r>
-            <a:endParaRPr lang="en-US" sz="1500" dirty="0"/>
-          </a:p>
-        </p:txBody>
-      </p:sp>
-      <p:sp>
-        <p:nvSpPr>
-          <p:cNvPr id="10" name="Arrow"/>
-          <p:cNvSpPr/>
-          <p:nvPr/>
-        </p:nvSpPr>
-        <p:spPr>
-          <a:xfrm>
-            <a:off x="3931920" y="3154680"/>
-            <a:ext cx="457200" cy="411480"/>
-          </a:xfrm>
-          <a:prstGeom prst="rightArrow">
-            <a:avLst/>
-          </a:prstGeom>
-          <a:solidFill>
-            <a:schemeClr val="accent1"/>
-          </a:solidFill>
-          <a:ln/>
-        </p:spPr>
-      </p:sp>
-      <p:sp>
-        <p:nvSpPr>
-          <p:cNvPr id="11" name="Step card 2"/>
-          <p:cNvSpPr/>
-          <p:nvPr/>
-        </p:nvSpPr>
-        <p:spPr>
-          <a:xfrm>
-            <a:off x="4526280" y="1783080"/>
-            <a:ext cx="3154680" cy="3246120"/>
-          </a:xfrm>
-          <a:prstGeom prst="roundRect">
-            <a:avLst>
-              <a:gd name="adj" fmla="val 3478"/>
-            </a:avLst>
-          </a:prstGeom>
-          <a:solidFill>
-            <a:schemeClr val="bg1"/>
-          </a:solidFill>
-          <a:ln/>
-          <a:effectLst>
-            <a:outerShdw sx="100000" sy="100000" kx="0" ky="0" algn="bl" rotWithShape="0" blurRad="127000" dist="25400" dir="5400000">
-              <a:srgbClr val="0F1E2E">
-                <a:alpha val="14000"/>
-              </a:srgbClr>
-            </a:outerShdw>
-          </a:effectLst>
-        </p:spPr>
-      </p:sp>
-      <p:sp>
-        <p:nvSpPr>
-          <p:cNvPr id="12" name="Step icon 2 circle"/>
-          <p:cNvSpPr/>
-          <p:nvPr/>
-        </p:nvSpPr>
-        <p:spPr>
-          <a:xfrm>
-            <a:off x="4846320" y="2103120"/>
-            <a:ext cx="731520" cy="731520"/>
-          </a:xfrm>
-          <a:prstGeom prst="ellipse">
-            <a:avLst/>
-          </a:prstGeom>
-          <a:solidFill>
-            <a:schemeClr val="accent1"/>
-          </a:solidFill>
-          <a:ln/>
-        </p:spPr>
-      </p:sp>
-      <p:pic>
-        <p:nvPicPr>
-          <p:cNvPr id="13" name="Step icon 2" descr="Step icon 2">    </p:cNvPr>
-          <p:cNvPicPr>
-            <a:picLocks noChangeAspect="1"/>
-          </p:cNvPicPr>
-          <p:nvPr/>
-        </p:nvPicPr>
-        <p:blipFill>
-          <a:blip r:embed="rId2"/>
-          <a:stretch>
-            <a:fillRect/>
-          </a:stretch>
-        </p:blipFill>
-        <p:spPr>
-          <a:xfrm>
-            <a:off x="5043830" y="2300630"/>
-            <a:ext cx="336499" cy="336499"/>
-          </a:xfrm>
-          <a:prstGeom prst="rect">
-            <a:avLst/>
-          </a:prstGeom>
-        </p:spPr>
-      </p:pic>
-      <p:sp>
-        <p:nvSpPr>
-          <p:cNvPr id="14" name="Step label 2"/>
-          <p:cNvSpPr txBox="1"/>
-          <p:nvPr/>
-        </p:nvSpPr>
-        <p:spPr>
-          <a:xfrm>
-            <a:off x="4846320" y="3017520"/>
-            <a:ext cx="2560320" cy="274320"/>
-          </a:xfrm>
-          <a:prstGeom prst="rect">
-            <a:avLst/>
-          </a:prstGeom>
-          <a:noFill/>
-          <a:ln/>
-        </p:spPr>
-        <p:txBody>
-          <a:bodyPr wrap="square" lIns="0" tIns="0" rIns="0" bIns="0" rtlCol="0" anchor="t"/>
-          <a:lstStyle/>
-          <a:p>
-            <a:pPr indent="0" marL="0">
-              <a:buNone/>
-            </a:pPr>
-            <a:r>
-              <a:rPr lang="en-US" sz="1300" b="1" spc="200" kern="0" dirty="0">
-                <a:solidFill>
-                  <a:schemeClr val="accent1"/>
-                </a:solidFill>
-              </a:rPr>
-              <a:t>STEP 2</a:t>
-            </a:r>
-            <a:endParaRPr lang="en-US" sz="1300" dirty="0"/>
-          </a:p>
-        </p:txBody>
-      </p:sp>
-      <p:sp>
-        <p:nvSpPr>
-          <p:cNvPr id="15" name="Step title 2"/>
-          <p:cNvSpPr txBox="1"/>
-          <p:nvPr/>
-        </p:nvSpPr>
-        <p:spPr>
-          <a:xfrm>
-            <a:off x="4846320" y="3337560"/>
-            <a:ext cx="2560320" cy="457200"/>
-          </a:xfrm>
-          <a:prstGeom prst="rect">
-            <a:avLst/>
-          </a:prstGeom>
-          <a:noFill/>
-          <a:ln/>
-        </p:spPr>
-        <p:txBody>
-          <a:bodyPr wrap="square" lIns="0" tIns="0" rIns="0" bIns="0" rtlCol="0" anchor="t"/>
-          <a:lstStyle/>
-          <a:p>
-            <a:pPr indent="0" marL="0">
-              <a:buNone/>
-            </a:pPr>
-            <a:r>
-              <a:rPr lang="en-US" sz="2400" b="1" dirty="0">
-                <a:solidFill>
-                  <a:schemeClr val="tx1"/>
-                </a:solidFill>
-              </a:rPr>
-              <a:t>Process</a:t>
-            </a:r>
-            <a:endParaRPr lang="en-US" sz="2400" dirty="0"/>
-          </a:p>
-        </p:txBody>
-      </p:sp>
-      <p:sp>
-        <p:nvSpPr>
-          <p:cNvPr id="16" name="Step text 2"/>
-          <p:cNvSpPr txBox="1"/>
-          <p:nvPr/>
-        </p:nvSpPr>
-        <p:spPr>
-          <a:xfrm>
-            <a:off x="4846320" y="3886200"/>
-            <a:ext cx="2560320" cy="1005840"/>
-          </a:xfrm>
-          <a:prstGeom prst="rect">
-            <a:avLst/>
-          </a:prstGeom>
-          <a:noFill/>
-          <a:ln/>
-        </p:spPr>
-        <p:txBody>
-          <a:bodyPr wrap="square" lIns="0" tIns="0" rIns="0" bIns="0" rtlCol="0" anchor="t"/>
-          <a:lstStyle/>
-          <a:p>
-            <a:pPr indent="0" marL="0">
-              <a:buNone/>
-            </a:pPr>
-            <a:r>
-              <a:rPr lang="en-US" sz="1500" dirty="0">
-                <a:solidFill>
-                  <a:schemeClr val="accent4"/>
-                </a:solidFill>
-              </a:rPr>
-              <a:t>Each file runs through the full pipeline, one at a time.</a:t>
-            </a:r>
-            <a:endParaRPr lang="en-US" sz="1500" dirty="0"/>
-          </a:p>
-        </p:txBody>
-      </p:sp>
-      <p:sp>
-        <p:nvSpPr>
-          <p:cNvPr id="17" name="Arrow"/>
-          <p:cNvSpPr/>
-          <p:nvPr/>
-        </p:nvSpPr>
-        <p:spPr>
-          <a:xfrm>
-            <a:off x="7818120" y="3154680"/>
-            <a:ext cx="457200" cy="411480"/>
-          </a:xfrm>
-          <a:prstGeom prst="rightArrow">
-            <a:avLst/>
-          </a:prstGeom>
-          <a:solidFill>
-            <a:schemeClr val="accent1"/>
-          </a:solidFill>
-          <a:ln/>
-        </p:spPr>
-      </p:sp>
-      <p:sp>
-        <p:nvSpPr>
-          <p:cNvPr id="18" name="Step card 3"/>
-          <p:cNvSpPr/>
-          <p:nvPr/>
-        </p:nvSpPr>
-        <p:spPr>
-          <a:xfrm>
-            <a:off x="8412480" y="1783080"/>
-            <a:ext cx="3154680" cy="3246120"/>
-          </a:xfrm>
-          <a:prstGeom prst="roundRect">
-            <a:avLst>
-              <a:gd name="adj" fmla="val 3478"/>
-            </a:avLst>
-          </a:prstGeom>
-          <a:solidFill>
-            <a:schemeClr val="bg1"/>
-          </a:solidFill>
-          <a:ln/>
-          <a:effectLst>
-            <a:outerShdw sx="100000" sy="100000" kx="0" ky="0" algn="bl" rotWithShape="0" blurRad="127000" dist="25400" dir="5400000">
-              <a:srgbClr val="0F1E2E">
-                <a:alpha val="14000"/>
-              </a:srgbClr>
-            </a:outerShdw>
-          </a:effectLst>
-        </p:spPr>
-      </p:sp>
-      <p:sp>
-        <p:nvSpPr>
-          <p:cNvPr id="19" name="Step icon 3 circle"/>
-          <p:cNvSpPr/>
-          <p:nvPr/>
-        </p:nvSpPr>
-        <p:spPr>
-          <a:xfrm>
-            <a:off x="8732520" y="2103120"/>
-            <a:ext cx="731520" cy="731520"/>
-          </a:xfrm>
-          <a:prstGeom prst="ellipse">
-            <a:avLst/>
-          </a:prstGeom>
-          <a:solidFill>
-            <a:schemeClr val="accent1"/>
-          </a:solidFill>
-          <a:ln/>
-        </p:spPr>
-      </p:sp>
-      <p:pic>
-        <p:nvPicPr>
-          <p:cNvPr id="20" name="Step icon 3" descr="Step icon 3">    </p:cNvPr>
+          <p:cNvPr id="6" name="Step icon 1" descr="Step icon 1"/>
           <p:cNvPicPr>
             <a:picLocks noChangeAspect="1"/>
           </p:cNvPicPr>
@@ -7270,6 +6705,408 @@
         </p:blipFill>
         <p:spPr>
           <a:xfrm>
+            <a:off x="1157630" y="2300630"/>
+            <a:ext cx="336499" cy="336499"/>
+          </a:xfrm>
+          <a:prstGeom prst="rect">
+            <a:avLst/>
+          </a:prstGeom>
+        </p:spPr>
+      </p:pic>
+      <p:sp>
+        <p:nvSpPr>
+          <p:cNvPr id="7" name="Step label 1"/>
+          <p:cNvSpPr txBox="1"/>
+          <p:nvPr/>
+        </p:nvSpPr>
+        <p:spPr>
+          <a:xfrm>
+            <a:off x="960120" y="3017520"/>
+            <a:ext cx="2560320" cy="274320"/>
+          </a:xfrm>
+          <a:prstGeom prst="rect">
+            <a:avLst/>
+          </a:prstGeom>
+          <a:noFill/>
+          <a:ln/>
+        </p:spPr>
+        <p:txBody>
+          <a:bodyPr wrap="square" lIns="0" tIns="0" rIns="0" bIns="0" rtlCol="0" anchor="t"/>
+          <a:lstStyle/>
+          <a:p>
+            <a:pPr marL="0" indent="0">
+              <a:buNone/>
+            </a:pPr>
+            <a:r>
+              <a:rPr lang="en-US" sz="1300" b="1" kern="0" spc="200" dirty="0">
+                <a:solidFill>
+                  <a:schemeClr val="accent1"/>
+                </a:solidFill>
+              </a:rPr>
+              <a:t>STEP 1</a:t>
+            </a:r>
+            <a:endParaRPr lang="en-US" sz="1300" dirty="0"/>
+          </a:p>
+        </p:txBody>
+      </p:sp>
+      <p:sp>
+        <p:nvSpPr>
+          <p:cNvPr id="8" name="Step title 1"/>
+          <p:cNvSpPr txBox="1"/>
+          <p:nvPr/>
+        </p:nvSpPr>
+        <p:spPr>
+          <a:xfrm>
+            <a:off x="960120" y="3337560"/>
+            <a:ext cx="2560320" cy="457200"/>
+          </a:xfrm>
+          <a:prstGeom prst="rect">
+            <a:avLst/>
+          </a:prstGeom>
+          <a:noFill/>
+          <a:ln/>
+        </p:spPr>
+        <p:txBody>
+          <a:bodyPr wrap="square" lIns="0" tIns="0" rIns="0" bIns="0" rtlCol="0" anchor="t"/>
+          <a:lstStyle/>
+          <a:p>
+            <a:pPr marL="0" indent="0">
+              <a:buNone/>
+            </a:pPr>
+            <a:r>
+              <a:rPr lang="en-US" sz="2400" b="1" dirty="0">
+                <a:solidFill>
+                  <a:schemeClr val="tx1"/>
+                </a:solidFill>
+              </a:rPr>
+              <a:t>Drop</a:t>
+            </a:r>
+            <a:endParaRPr lang="en-US" sz="2400" dirty="0"/>
+          </a:p>
+        </p:txBody>
+      </p:sp>
+      <p:sp>
+        <p:nvSpPr>
+          <p:cNvPr id="9" name="Step text 1"/>
+          <p:cNvSpPr txBox="1"/>
+          <p:nvPr/>
+        </p:nvSpPr>
+        <p:spPr>
+          <a:xfrm>
+            <a:off x="960120" y="3886200"/>
+            <a:ext cx="2560320" cy="1005840"/>
+          </a:xfrm>
+          <a:prstGeom prst="rect">
+            <a:avLst/>
+          </a:prstGeom>
+          <a:noFill/>
+          <a:ln/>
+        </p:spPr>
+        <p:txBody>
+          <a:bodyPr wrap="square" lIns="0" tIns="0" rIns="0" bIns="0" rtlCol="0" anchor="t"/>
+          <a:lstStyle/>
+          <a:p>
+            <a:pPr marL="0" indent="0">
+              <a:buNone/>
+            </a:pPr>
+            <a:r>
+              <a:rPr lang="en-US" sz="1500" dirty="0">
+                <a:solidFill>
+                  <a:schemeClr val="accent4"/>
+                </a:solidFill>
+              </a:rPr>
+              <a:t>Transcripts, notes, or briefs land in an Inbox folder.</a:t>
+            </a:r>
+            <a:endParaRPr lang="en-US" sz="1500" dirty="0"/>
+          </a:p>
+        </p:txBody>
+      </p:sp>
+      <p:sp>
+        <p:nvSpPr>
+          <p:cNvPr id="10" name="Arrow"/>
+          <p:cNvSpPr/>
+          <p:nvPr/>
+        </p:nvSpPr>
+        <p:spPr>
+          <a:xfrm>
+            <a:off x="3931920" y="3154680"/>
+            <a:ext cx="457200" cy="411480"/>
+          </a:xfrm>
+          <a:prstGeom prst="rightArrow">
+            <a:avLst/>
+          </a:prstGeom>
+          <a:solidFill>
+            <a:schemeClr val="accent1"/>
+          </a:solidFill>
+          <a:ln/>
+        </p:spPr>
+      </p:sp>
+      <p:sp>
+        <p:nvSpPr>
+          <p:cNvPr id="11" name="Step card 2"/>
+          <p:cNvSpPr/>
+          <p:nvPr/>
+        </p:nvSpPr>
+        <p:spPr>
+          <a:xfrm>
+            <a:off x="4526280" y="1783080"/>
+            <a:ext cx="3154680" cy="3246120"/>
+          </a:xfrm>
+          <a:prstGeom prst="roundRect">
+            <a:avLst>
+              <a:gd name="adj" fmla="val 3478"/>
+            </a:avLst>
+          </a:prstGeom>
+          <a:solidFill>
+            <a:schemeClr val="bg1"/>
+          </a:solidFill>
+          <a:ln/>
+          <a:effectLst>
+            <a:outerShdw blurRad="127000" dist="25400" dir="5400000" algn="bl" rotWithShape="0">
+              <a:srgbClr val="0F1E2E">
+                <a:alpha val="14000"/>
+              </a:srgbClr>
+            </a:outerShdw>
+          </a:effectLst>
+        </p:spPr>
+      </p:sp>
+      <p:sp>
+        <p:nvSpPr>
+          <p:cNvPr id="12" name="Step icon 2 circle"/>
+          <p:cNvSpPr/>
+          <p:nvPr/>
+        </p:nvSpPr>
+        <p:spPr>
+          <a:xfrm>
+            <a:off x="4846320" y="2103120"/>
+            <a:ext cx="731520" cy="731520"/>
+          </a:xfrm>
+          <a:prstGeom prst="ellipse">
+            <a:avLst/>
+          </a:prstGeom>
+          <a:solidFill>
+            <a:schemeClr val="accent1"/>
+          </a:solidFill>
+          <a:ln/>
+        </p:spPr>
+      </p:sp>
+      <p:pic>
+        <p:nvPicPr>
+          <p:cNvPr id="13" name="Step icon 2" descr="Step icon 2"/>
+          <p:cNvPicPr>
+            <a:picLocks noChangeAspect="1"/>
+          </p:cNvPicPr>
+          <p:nvPr/>
+        </p:nvPicPr>
+        <p:blipFill>
+          <a:blip r:embed="rId4"/>
+          <a:stretch>
+            <a:fillRect/>
+          </a:stretch>
+        </p:blipFill>
+        <p:spPr>
+          <a:xfrm>
+            <a:off x="5043830" y="2300630"/>
+            <a:ext cx="336499" cy="336499"/>
+          </a:xfrm>
+          <a:prstGeom prst="rect">
+            <a:avLst/>
+          </a:prstGeom>
+        </p:spPr>
+      </p:pic>
+      <p:sp>
+        <p:nvSpPr>
+          <p:cNvPr id="14" name="Step label 2"/>
+          <p:cNvSpPr txBox="1"/>
+          <p:nvPr/>
+        </p:nvSpPr>
+        <p:spPr>
+          <a:xfrm>
+            <a:off x="4846320" y="3017520"/>
+            <a:ext cx="2560320" cy="274320"/>
+          </a:xfrm>
+          <a:prstGeom prst="rect">
+            <a:avLst/>
+          </a:prstGeom>
+          <a:noFill/>
+          <a:ln/>
+        </p:spPr>
+        <p:txBody>
+          <a:bodyPr wrap="square" lIns="0" tIns="0" rIns="0" bIns="0" rtlCol="0" anchor="t"/>
+          <a:lstStyle/>
+          <a:p>
+            <a:pPr marL="0" indent="0">
+              <a:buNone/>
+            </a:pPr>
+            <a:r>
+              <a:rPr lang="en-US" sz="1300" b="1" kern="0" spc="200" dirty="0">
+                <a:solidFill>
+                  <a:schemeClr val="accent1"/>
+                </a:solidFill>
+              </a:rPr>
+              <a:t>STEP 2</a:t>
+            </a:r>
+            <a:endParaRPr lang="en-US" sz="1300" dirty="0"/>
+          </a:p>
+        </p:txBody>
+      </p:sp>
+      <p:sp>
+        <p:nvSpPr>
+          <p:cNvPr id="15" name="Step title 2"/>
+          <p:cNvSpPr txBox="1"/>
+          <p:nvPr/>
+        </p:nvSpPr>
+        <p:spPr>
+          <a:xfrm>
+            <a:off x="4846320" y="3337560"/>
+            <a:ext cx="2560320" cy="457200"/>
+          </a:xfrm>
+          <a:prstGeom prst="rect">
+            <a:avLst/>
+          </a:prstGeom>
+          <a:noFill/>
+          <a:ln/>
+        </p:spPr>
+        <p:txBody>
+          <a:bodyPr wrap="square" lIns="0" tIns="0" rIns="0" bIns="0" rtlCol="0" anchor="t"/>
+          <a:lstStyle/>
+          <a:p>
+            <a:pPr marL="0" indent="0">
+              <a:buNone/>
+            </a:pPr>
+            <a:r>
+              <a:rPr lang="en-US" sz="2400" b="1" dirty="0">
+                <a:solidFill>
+                  <a:schemeClr val="tx1"/>
+                </a:solidFill>
+              </a:rPr>
+              <a:t>Process</a:t>
+            </a:r>
+            <a:endParaRPr lang="en-US" sz="2400" dirty="0"/>
+          </a:p>
+        </p:txBody>
+      </p:sp>
+      <p:sp>
+        <p:nvSpPr>
+          <p:cNvPr id="16" name="Step text 2"/>
+          <p:cNvSpPr txBox="1"/>
+          <p:nvPr/>
+        </p:nvSpPr>
+        <p:spPr>
+          <a:xfrm>
+            <a:off x="4846320" y="3886200"/>
+            <a:ext cx="2560320" cy="1005840"/>
+          </a:xfrm>
+          <a:prstGeom prst="rect">
+            <a:avLst/>
+          </a:prstGeom>
+          <a:noFill/>
+          <a:ln/>
+        </p:spPr>
+        <p:txBody>
+          <a:bodyPr wrap="square" lIns="0" tIns="0" rIns="0" bIns="0" rtlCol="0" anchor="t"/>
+          <a:lstStyle/>
+          <a:p>
+            <a:pPr marL="0" indent="0">
+              <a:buNone/>
+            </a:pPr>
+            <a:r>
+              <a:rPr lang="en-US" sz="1500" dirty="0">
+                <a:solidFill>
+                  <a:schemeClr val="accent4"/>
+                </a:solidFill>
+              </a:rPr>
+              <a:t>Each file runs through the full pipeline, one at a time.</a:t>
+            </a:r>
+            <a:endParaRPr lang="en-US" sz="1500" dirty="0"/>
+          </a:p>
+        </p:txBody>
+      </p:sp>
+      <p:sp>
+        <p:nvSpPr>
+          <p:cNvPr id="17" name="Arrow"/>
+          <p:cNvSpPr/>
+          <p:nvPr/>
+        </p:nvSpPr>
+        <p:spPr>
+          <a:xfrm>
+            <a:off x="7818120" y="3154680"/>
+            <a:ext cx="457200" cy="411480"/>
+          </a:xfrm>
+          <a:prstGeom prst="rightArrow">
+            <a:avLst/>
+          </a:prstGeom>
+          <a:solidFill>
+            <a:schemeClr val="accent1"/>
+          </a:solidFill>
+          <a:ln/>
+        </p:spPr>
+      </p:sp>
+      <p:sp>
+        <p:nvSpPr>
+          <p:cNvPr id="18" name="Step card 3"/>
+          <p:cNvSpPr/>
+          <p:nvPr/>
+        </p:nvSpPr>
+        <p:spPr>
+          <a:xfrm>
+            <a:off x="8412480" y="1783080"/>
+            <a:ext cx="3154680" cy="3246120"/>
+          </a:xfrm>
+          <a:prstGeom prst="roundRect">
+            <a:avLst>
+              <a:gd name="adj" fmla="val 3478"/>
+            </a:avLst>
+          </a:prstGeom>
+          <a:solidFill>
+            <a:schemeClr val="bg1"/>
+          </a:solidFill>
+          <a:ln/>
+          <a:effectLst>
+            <a:outerShdw blurRad="127000" dist="25400" dir="5400000" algn="bl" rotWithShape="0">
+              <a:srgbClr val="0F1E2E">
+                <a:alpha val="14000"/>
+              </a:srgbClr>
+            </a:outerShdw>
+          </a:effectLst>
+        </p:spPr>
+      </p:sp>
+      <p:sp>
+        <p:nvSpPr>
+          <p:cNvPr id="19" name="Step icon 3 circle"/>
+          <p:cNvSpPr/>
+          <p:nvPr/>
+        </p:nvSpPr>
+        <p:spPr>
+          <a:xfrm>
+            <a:off x="8732520" y="2103120"/>
+            <a:ext cx="731520" cy="731520"/>
+          </a:xfrm>
+          <a:prstGeom prst="ellipse">
+            <a:avLst/>
+          </a:prstGeom>
+          <a:solidFill>
+            <a:schemeClr val="accent1"/>
+          </a:solidFill>
+          <a:ln/>
+        </p:spPr>
+      </p:sp>
+      <p:pic>
+        <p:nvPicPr>
+          <p:cNvPr id="20" name="Step icon 3" descr="Step icon 3"/>
+          <p:cNvPicPr>
+            <a:picLocks noChangeAspect="1"/>
+          </p:cNvPicPr>
+          <p:nvPr/>
+        </p:nvPicPr>
+        <p:blipFill>
+          <a:blip r:embed="rId5"/>
+          <a:stretch>
+            <a:fillRect/>
+          </a:stretch>
+        </p:blipFill>
+        <p:spPr>
+          <a:xfrm>
             <a:off x="8930030" y="2300630"/>
             <a:ext cx="336499" cy="336499"/>
           </a:xfrm>
@@ -7299,11 +7136,11 @@
           <a:bodyPr wrap="square" lIns="0" tIns="0" rIns="0" bIns="0" rtlCol="0" anchor="t"/>
           <a:lstStyle/>
           <a:p>
-            <a:pPr indent="0" marL="0">
-              <a:buNone/>
-            </a:pPr>
-            <a:r>
-              <a:rPr lang="en-US" sz="1300" b="1" spc="200" kern="0" dirty="0">
+            <a:pPr marL="0" indent="0">
+              <a:buNone/>
+            </a:pPr>
+            <a:r>
+              <a:rPr lang="en-US" sz="1300" b="1" kern="0" spc="200" dirty="0">
                 <a:solidFill>
                   <a:schemeClr val="accent1"/>
                 </a:solidFill>
@@ -7335,7 +7172,7 @@
           <a:bodyPr wrap="square" lIns="0" tIns="0" rIns="0" bIns="0" rtlCol="0" anchor="t"/>
           <a:lstStyle/>
           <a:p>
-            <a:pPr indent="0" marL="0">
+            <a:pPr marL="0" indent="0">
               <a:buNone/>
             </a:pPr>
             <a:r>
@@ -7371,7 +7208,7 @@
           <a:bodyPr wrap="square" lIns="0" tIns="0" rIns="0" bIns="0" rtlCol="0" anchor="t"/>
           <a:lstStyle/>
           <a:p>
-            <a:pPr indent="0" marL="0">
+            <a:pPr marL="0" indent="0">
               <a:buNone/>
             </a:pPr>
             <a:r>
@@ -7407,7 +7244,7 @@
           <a:bodyPr wrap="square" lIns="0" tIns="0" rIns="0" bIns="0" rtlCol="0" anchor="t"/>
           <a:lstStyle/>
           <a:p>
-            <a:pPr indent="0" marL="0">
+            <a:pPr marL="0" indent="0">
               <a:buNone/>
             </a:pPr>
             <a:r>
@@ -7442,7 +7279,7 @@
           </a:prstGeom>
           <a:extLst>
             <a:ext uri="{C572A759-6A51-4108-AA02-DFA0A04FC94B}">
-              <ma14:wrappingTextBoxFlag xmlns:ma14="http://schemas.microsoft.com/office/mac/drawingml/2011/main" val="0"/>
+              <ma14:wrappingTextBoxFlag xmlns:ma14="http://schemas.microsoft.com/office/mac/drawingml/2011/main" xmlns="" val="0"/>
             </a:ext>
           </a:extLst>
         </p:spPr>
@@ -7460,7 +7297,7 @@
           <a:p>
             <a:pPr algn="r"/>
             <a:fld id="{F7021451-1387-4CA6-816F-3879F97B5CBC}" type="slidenum">
-              <a:rPr b="0" lang="en-US"/>
+              <a:rPr lang="en-US" b="0"/>
               <a:t>6</a:t>
             </a:fld>
             <a:endParaRPr lang="en-US"/>
@@ -7495,9 +7332,11 @@
       <p:sp>
         <p:nvSpPr>
           <p:cNvPr id="2" name="Text 1"/>
-          <p:cNvSpPr/>
+          <p:cNvSpPr>
+            <a:spLocks noGrp="1"/>
+          </p:cNvSpPr>
           <p:nvPr>
-            <p:ph idx="101" type="body" hasCustomPrompt="1"/>
+            <p:ph type="body" idx="101" hasCustomPrompt="1"/>
           </p:nvPr>
         </p:nvSpPr>
         <p:spPr>
@@ -7515,11 +7354,11 @@
           <a:bodyPr wrap="square" lIns="0" tIns="0" rIns="0" bIns="0" rtlCol="0" anchor="t"/>
           <a:lstStyle/>
           <a:p>
-            <a:pPr indent="0" marL="0">
-              <a:buNone/>
-            </a:pPr>
-            <a:r>
-              <a:rPr lang="en-US" sz="1300" b="1" spc="300" kern="0" dirty="0">
+            <a:pPr marL="0" indent="0">
+              <a:buNone/>
+            </a:pPr>
+            <a:r>
+              <a:rPr lang="en-US" sz="1300" b="1" kern="0" spc="300" dirty="0">
                 <a:solidFill>
                   <a:schemeClr val="bg2"/>
                 </a:solidFill>
@@ -7551,7 +7390,7 @@
           <a:bodyPr wrap="square" lIns="0" tIns="0" rIns="0" bIns="0" rtlCol="0" anchor="ctr"/>
           <a:lstStyle/>
           <a:p>
-            <a:pPr indent="0" marL="0">
+            <a:pPr marL="0" indent="0">
               <a:buNone/>
             </a:pPr>
             <a:r>
@@ -7587,7 +7426,7 @@
           <a:bodyPr wrap="square" lIns="0" tIns="0" rIns="0" bIns="0" rtlCol="0" anchor="ctr"/>
           <a:lstStyle/>
           <a:p>
-            <a:pPr indent="0" marL="0">
+            <a:pPr marL="0" indent="0">
               <a:buNone/>
             </a:pPr>
             <a:r>
@@ -7650,7 +7489,7 @@
           <a:bodyPr wrap="square" lIns="0" tIns="0" rIns="0" bIns="0" rtlCol="0" anchor="ctr"/>
           <a:lstStyle/>
           <a:p>
-            <a:pPr algn="ctr" indent="0" marL="0">
+            <a:pPr marL="0" indent="0" algn="ctr">
               <a:buNone/>
             </a:pPr>
             <a:r>
@@ -7713,7 +7552,7 @@
           <a:bodyPr wrap="square" lIns="0" tIns="0" rIns="0" bIns="0" rtlCol="0" anchor="ctr"/>
           <a:lstStyle/>
           <a:p>
-            <a:pPr algn="ctr" indent="0" marL="0">
+            <a:pPr marL="0" indent="0" algn="ctr">
               <a:buNone/>
             </a:pPr>
             <a:r>
@@ -7776,7 +7615,7 @@
           <a:bodyPr wrap="square" lIns="0" tIns="0" rIns="0" bIns="0" rtlCol="0" anchor="ctr"/>
           <a:lstStyle/>
           <a:p>
-            <a:pPr algn="ctr" indent="0" marL="0">
+            <a:pPr marL="0" indent="0" algn="ctr">
               <a:buNone/>
             </a:pPr>
             <a:r>
@@ -7839,7 +7678,7 @@
           <a:bodyPr wrap="square" lIns="0" tIns="0" rIns="0" bIns="0" rtlCol="0" anchor="ctr"/>
           <a:lstStyle/>
           <a:p>
-            <a:pPr algn="ctr" indent="0" marL="0">
+            <a:pPr marL="0" indent="0" algn="ctr">
               <a:buNone/>
             </a:pPr>
             <a:r>
@@ -7902,7 +7741,7 @@
           <a:bodyPr wrap="square" lIns="0" tIns="0" rIns="0" bIns="0" rtlCol="0" anchor="ctr"/>
           <a:lstStyle/>
           <a:p>
-            <a:pPr algn="ctr" indent="0" marL="0">
+            <a:pPr marL="0" indent="0" algn="ctr">
               <a:buNone/>
             </a:pPr>
             <a:r>
@@ -7938,7 +7777,7 @@
           <a:bodyPr wrap="square" lIns="0" tIns="0" rIns="0" bIns="0" rtlCol="0" anchor="t"/>
           <a:lstStyle/>
           <a:p>
-            <a:pPr indent="0" marL="0">
+            <a:pPr marL="0" indent="0">
               <a:buNone/>
             </a:pPr>
             <a:r>
@@ -7973,7 +7812,7 @@
           </a:prstGeom>
           <a:extLst>
             <a:ext uri="{C572A759-6A51-4108-AA02-DFA0A04FC94B}">
-              <ma14:wrappingTextBoxFlag xmlns:ma14="http://schemas.microsoft.com/office/mac/drawingml/2011/main" val="0"/>
+              <ma14:wrappingTextBoxFlag xmlns:ma14="http://schemas.microsoft.com/office/mac/drawingml/2011/main" xmlns="" val="0"/>
             </a:ext>
           </a:extLst>
         </p:spPr>
@@ -7991,7 +7830,7 @@
           <a:p>
             <a:pPr algn="r"/>
             <a:fld id="{F7021451-1387-4CA6-816F-3879F97B5CBC}" type="slidenum">
-              <a:rPr b="0" lang="en-US"/>
+              <a:rPr lang="en-US" b="0"/>
               <a:t>7</a:t>
             </a:fld>
             <a:endParaRPr lang="en-US"/>
@@ -8026,9 +7865,11 @@
       <p:sp>
         <p:nvSpPr>
           <p:cNvPr id="2" name="Text 1"/>
-          <p:cNvSpPr/>
+          <p:cNvSpPr>
+            <a:spLocks noGrp="1"/>
+          </p:cNvSpPr>
           <p:nvPr>
-            <p:ph idx="101" type="body" hasCustomPrompt="1"/>
+            <p:ph type="body" idx="101" hasCustomPrompt="1"/>
           </p:nvPr>
         </p:nvSpPr>
         <p:spPr>
@@ -8046,11 +7887,11 @@
           <a:bodyPr wrap="square" lIns="0" tIns="0" rIns="0" bIns="0" rtlCol="0" anchor="t"/>
           <a:lstStyle/>
           <a:p>
-            <a:pPr indent="0" marL="0">
-              <a:buNone/>
-            </a:pPr>
-            <a:r>
-              <a:rPr lang="en-US" sz="1300" b="1" spc="300" kern="0" dirty="0">
+            <a:pPr marL="0" indent="0">
+              <a:buNone/>
+            </a:pPr>
+            <a:r>
+              <a:rPr lang="en-US" sz="1300" b="1" kern="0" spc="300" dirty="0">
                 <a:solidFill>
                   <a:schemeClr val="accent1"/>
                 </a:solidFill>
@@ -8064,9 +7905,11 @@
       <p:sp>
         <p:nvSpPr>
           <p:cNvPr id="3" name="Text 1"/>
-          <p:cNvSpPr/>
+          <p:cNvSpPr>
+            <a:spLocks noGrp="1"/>
+          </p:cNvSpPr>
           <p:nvPr>
-            <p:ph idx="102" type="title" hasCustomPrompt="1"/>
+            <p:ph type="title" idx="102" hasCustomPrompt="1"/>
           </p:nvPr>
         </p:nvSpPr>
         <p:spPr>
@@ -8084,7 +7927,7 @@
           <a:bodyPr wrap="square" lIns="0" tIns="0" rIns="0" bIns="0" rtlCol="0" anchor="t"/>
           <a:lstStyle/>
           <a:p>
-            <a:pPr algn="l" indent="0" marL="0">
+            <a:pPr marL="0" indent="0" algn="l">
               <a:buNone/>
             </a:pPr>
             <a:r>
@@ -8120,7 +7963,7 @@
           </a:solidFill>
           <a:ln/>
           <a:effectLst>
-            <a:outerShdw sx="100000" sy="100000" kx="0" ky="0" algn="bl" rotWithShape="0" blurRad="127000" dist="25400" dir="5400000">
+            <a:outerShdw blurRad="127000" dist="25400" dir="5400000" algn="bl" rotWithShape="0">
               <a:srgbClr val="0F1E2E">
                 <a:alpha val="14000"/>
               </a:srgbClr>
@@ -8150,297 +7993,7 @@
       </p:sp>
       <p:pic>
         <p:nvPicPr>
-          <p:cNvPr id="6" name="Lesson icon 1" descr="Lesson icon 1">    </p:cNvPr>
-          <p:cNvPicPr>
-            <a:picLocks noChangeAspect="1"/>
-          </p:cNvPicPr>
-          <p:nvPr/>
-        </p:nvPicPr>
-        <p:blipFill>
-          <a:blip r:embed="rId1"/>
-          <a:stretch>
-            <a:fillRect/>
-          </a:stretch>
-        </p:blipFill>
-        <p:spPr>
-          <a:xfrm>
-            <a:off x="1157630" y="2300630"/>
-            <a:ext cx="336499" cy="336499"/>
-          </a:xfrm>
-          <a:prstGeom prst="rect">
-            <a:avLst/>
-          </a:prstGeom>
-        </p:spPr>
-      </p:pic>
-      <p:sp>
-        <p:nvSpPr>
-          <p:cNvPr id="7" name="Lesson title 1"/>
-          <p:cNvSpPr txBox="1"/>
-          <p:nvPr/>
-        </p:nvSpPr>
-        <p:spPr>
-          <a:xfrm>
-            <a:off x="960120" y="3108960"/>
-            <a:ext cx="2834640" cy="777240"/>
-          </a:xfrm>
-          <a:prstGeom prst="rect">
-            <a:avLst/>
-          </a:prstGeom>
-          <a:noFill/>
-          <a:ln/>
-        </p:spPr>
-        <p:txBody>
-          <a:bodyPr wrap="square" lIns="0" tIns="0" rIns="0" bIns="0" rtlCol="0" anchor="t"/>
-          <a:lstStyle/>
-          <a:p>
-            <a:pPr indent="0" marL="0">
-              <a:buNone/>
-            </a:pPr>
-            <a:r>
-              <a:rPr lang="en-US" sz="2100" b="1" dirty="0">
-                <a:solidFill>
-                  <a:schemeClr val="tx1"/>
-                </a:solidFill>
-              </a:rPr>
-              <a:t>One missing quote mark</a:t>
-            </a:r>
-            <a:endParaRPr lang="en-US" sz="2100" dirty="0"/>
-          </a:p>
-        </p:txBody>
-      </p:sp>
-      <p:sp>
-        <p:nvSpPr>
-          <p:cNvPr id="8" name="Lesson text 1"/>
-          <p:cNvSpPr txBox="1"/>
-          <p:nvPr/>
-        </p:nvSpPr>
-        <p:spPr>
-          <a:xfrm>
-            <a:off x="960120" y="3931920"/>
-            <a:ext cx="2834640" cy="1371600"/>
-          </a:xfrm>
-          <a:prstGeom prst="rect">
-            <a:avLst/>
-          </a:prstGeom>
-          <a:noFill/>
-          <a:ln/>
-        </p:spPr>
-        <p:txBody>
-          <a:bodyPr wrap="square" lIns="0" tIns="0" rIns="0" bIns="0" rtlCol="0" anchor="t"/>
-          <a:lstStyle/>
-          <a:p>
-            <a:pPr indent="0" marL="0">
-              <a:buNone/>
-            </a:pPr>
-            <a:r>
-              <a:rPr lang="en-US" sz="1500" dirty="0">
-                <a:solidFill>
-                  <a:schemeClr val="accent4"/>
-                </a:solidFill>
-              </a:rPr>
-              <a:t>A single JSON slip produced a blank PRD while the trace looked normal. Now a repair step and a safe fallback handle it.</a:t>
-            </a:r>
-            <a:endParaRPr lang="en-US" sz="1500" dirty="0"/>
-          </a:p>
-        </p:txBody>
-      </p:sp>
-      <p:sp>
-        <p:nvSpPr>
-          <p:cNvPr id="9" name="Lesson card 2"/>
-          <p:cNvSpPr/>
-          <p:nvPr/>
-        </p:nvSpPr>
-        <p:spPr>
-          <a:xfrm>
-            <a:off x="4370832" y="1783080"/>
-            <a:ext cx="3456432" cy="3657600"/>
-          </a:xfrm>
-          <a:prstGeom prst="roundRect">
-            <a:avLst>
-              <a:gd name="adj" fmla="val 3175"/>
-            </a:avLst>
-          </a:prstGeom>
-          <a:solidFill>
-            <a:schemeClr val="bg1"/>
-          </a:solidFill>
-          <a:ln/>
-          <a:effectLst>
-            <a:outerShdw sx="100000" sy="100000" kx="0" ky="0" algn="bl" rotWithShape="0" blurRad="127000" dist="25400" dir="5400000">
-              <a:srgbClr val="0F1E2E">
-                <a:alpha val="14000"/>
-              </a:srgbClr>
-            </a:outerShdw>
-          </a:effectLst>
-        </p:spPr>
-      </p:sp>
-      <p:sp>
-        <p:nvSpPr>
-          <p:cNvPr id="10" name="Lesson icon 2 circle"/>
-          <p:cNvSpPr/>
-          <p:nvPr/>
-        </p:nvSpPr>
-        <p:spPr>
-          <a:xfrm>
-            <a:off x="4690872" y="2103120"/>
-            <a:ext cx="731520" cy="731520"/>
-          </a:xfrm>
-          <a:prstGeom prst="ellipse">
-            <a:avLst/>
-          </a:prstGeom>
-          <a:solidFill>
-            <a:schemeClr val="accent1"/>
-          </a:solidFill>
-          <a:ln/>
-        </p:spPr>
-      </p:sp>
-      <p:pic>
-        <p:nvPicPr>
-          <p:cNvPr id="11" name="Lesson icon 2" descr="Lesson icon 2">    </p:cNvPr>
-          <p:cNvPicPr>
-            <a:picLocks noChangeAspect="1"/>
-          </p:cNvPicPr>
-          <p:nvPr/>
-        </p:nvPicPr>
-        <p:blipFill>
-          <a:blip r:embed="rId2"/>
-          <a:stretch>
-            <a:fillRect/>
-          </a:stretch>
-        </p:blipFill>
-        <p:spPr>
-          <a:xfrm>
-            <a:off x="4888382" y="2300630"/>
-            <a:ext cx="336499" cy="336499"/>
-          </a:xfrm>
-          <a:prstGeom prst="rect">
-            <a:avLst/>
-          </a:prstGeom>
-        </p:spPr>
-      </p:pic>
-      <p:sp>
-        <p:nvSpPr>
-          <p:cNvPr id="12" name="Lesson title 2"/>
-          <p:cNvSpPr txBox="1"/>
-          <p:nvPr/>
-        </p:nvSpPr>
-        <p:spPr>
-          <a:xfrm>
-            <a:off x="4690872" y="3108960"/>
-            <a:ext cx="2834640" cy="777240"/>
-          </a:xfrm>
-          <a:prstGeom prst="rect">
-            <a:avLst/>
-          </a:prstGeom>
-          <a:noFill/>
-          <a:ln/>
-        </p:spPr>
-        <p:txBody>
-          <a:bodyPr wrap="square" lIns="0" tIns="0" rIns="0" bIns="0" rtlCol="0" anchor="t"/>
-          <a:lstStyle/>
-          <a:p>
-            <a:pPr indent="0" marL="0">
-              <a:buNone/>
-            </a:pPr>
-            <a:r>
-              <a:rPr lang="en-US" sz="2100" b="1" dirty="0">
-                <a:solidFill>
-                  <a:schemeClr val="tx1"/>
-                </a:solidFill>
-              </a:rPr>
-              <a:t>A perfect score of nothing</a:t>
-            </a:r>
-            <a:endParaRPr lang="en-US" sz="2100" dirty="0"/>
-          </a:p>
-        </p:txBody>
-      </p:sp>
-      <p:sp>
-        <p:nvSpPr>
-          <p:cNvPr id="13" name="Lesson text 2"/>
-          <p:cNvSpPr txBox="1"/>
-          <p:nvPr/>
-        </p:nvSpPr>
-        <p:spPr>
-          <a:xfrm>
-            <a:off x="4690872" y="3931920"/>
-            <a:ext cx="2834640" cy="1371600"/>
-          </a:xfrm>
-          <a:prstGeom prst="rect">
-            <a:avLst/>
-          </a:prstGeom>
-          <a:noFill/>
-          <a:ln/>
-        </p:spPr>
-        <p:txBody>
-          <a:bodyPr wrap="square" lIns="0" tIns="0" rIns="0" bIns="0" rtlCol="0" anchor="t"/>
-          <a:lstStyle/>
-          <a:p>
-            <a:pPr indent="0" marL="0">
-              <a:buNone/>
-            </a:pPr>
-            <a:r>
-              <a:rPr lang="en-US" sz="1500" dirty="0">
-                <a:solidFill>
-                  <a:schemeClr val="accent4"/>
-                </a:solidFill>
-              </a:rPr>
-              <a:t>Zero stories out of zero scored 1.00. Now a broken run scores 0.</a:t>
-            </a:r>
-            <a:endParaRPr lang="en-US" sz="1500" dirty="0"/>
-          </a:p>
-        </p:txBody>
-      </p:sp>
-      <p:sp>
-        <p:nvSpPr>
-          <p:cNvPr id="14" name="Lesson card 3"/>
-          <p:cNvSpPr/>
-          <p:nvPr/>
-        </p:nvSpPr>
-        <p:spPr>
-          <a:xfrm>
-            <a:off x="8101584" y="1783080"/>
-            <a:ext cx="3456432" cy="3657600"/>
-          </a:xfrm>
-          <a:prstGeom prst="roundRect">
-            <a:avLst>
-              <a:gd name="adj" fmla="val 3175"/>
-            </a:avLst>
-          </a:prstGeom>
-          <a:solidFill>
-            <a:schemeClr val="bg1"/>
-          </a:solidFill>
-          <a:ln/>
-          <a:effectLst>
-            <a:outerShdw sx="100000" sy="100000" kx="0" ky="0" algn="bl" rotWithShape="0" blurRad="127000" dist="25400" dir="5400000">
-              <a:srgbClr val="0F1E2E">
-                <a:alpha val="14000"/>
-              </a:srgbClr>
-            </a:outerShdw>
-          </a:effectLst>
-        </p:spPr>
-      </p:sp>
-      <p:sp>
-        <p:nvSpPr>
-          <p:cNvPr id="15" name="Lesson icon 3 circle"/>
-          <p:cNvSpPr/>
-          <p:nvPr/>
-        </p:nvSpPr>
-        <p:spPr>
-          <a:xfrm>
-            <a:off x="8421624" y="2103120"/>
-            <a:ext cx="731520" cy="731520"/>
-          </a:xfrm>
-          <a:prstGeom prst="ellipse">
-            <a:avLst/>
-          </a:prstGeom>
-          <a:solidFill>
-            <a:schemeClr val="accent1"/>
-          </a:solidFill>
-          <a:ln/>
-        </p:spPr>
-      </p:sp>
-      <p:pic>
-        <p:nvPicPr>
-          <p:cNvPr id="16" name="Lesson icon 3" descr="Lesson icon 3">    </p:cNvPr>
+          <p:cNvPr id="6" name="Lesson icon 1" descr="Lesson icon 1"/>
           <p:cNvPicPr>
             <a:picLocks noChangeAspect="1"/>
           </p:cNvPicPr>
@@ -8454,6 +8007,296 @@
         </p:blipFill>
         <p:spPr>
           <a:xfrm>
+            <a:off x="1157630" y="2300630"/>
+            <a:ext cx="336499" cy="336499"/>
+          </a:xfrm>
+          <a:prstGeom prst="rect">
+            <a:avLst/>
+          </a:prstGeom>
+        </p:spPr>
+      </p:pic>
+      <p:sp>
+        <p:nvSpPr>
+          <p:cNvPr id="7" name="Lesson title 1"/>
+          <p:cNvSpPr txBox="1"/>
+          <p:nvPr/>
+        </p:nvSpPr>
+        <p:spPr>
+          <a:xfrm>
+            <a:off x="960120" y="3108960"/>
+            <a:ext cx="2834640" cy="777240"/>
+          </a:xfrm>
+          <a:prstGeom prst="rect">
+            <a:avLst/>
+          </a:prstGeom>
+          <a:noFill/>
+          <a:ln/>
+        </p:spPr>
+        <p:txBody>
+          <a:bodyPr wrap="square" lIns="0" tIns="0" rIns="0" bIns="0" rtlCol="0" anchor="t"/>
+          <a:lstStyle/>
+          <a:p>
+            <a:pPr marL="0" indent="0">
+              <a:buNone/>
+            </a:pPr>
+            <a:r>
+              <a:rPr lang="en-US" sz="2100" b="1" dirty="0">
+                <a:solidFill>
+                  <a:schemeClr val="tx1"/>
+                </a:solidFill>
+              </a:rPr>
+              <a:t>One missing quote mark</a:t>
+            </a:r>
+            <a:endParaRPr lang="en-US" sz="2100" dirty="0"/>
+          </a:p>
+        </p:txBody>
+      </p:sp>
+      <p:sp>
+        <p:nvSpPr>
+          <p:cNvPr id="8" name="Lesson text 1"/>
+          <p:cNvSpPr txBox="1"/>
+          <p:nvPr/>
+        </p:nvSpPr>
+        <p:spPr>
+          <a:xfrm>
+            <a:off x="960120" y="3931920"/>
+            <a:ext cx="2834640" cy="1371600"/>
+          </a:xfrm>
+          <a:prstGeom prst="rect">
+            <a:avLst/>
+          </a:prstGeom>
+          <a:noFill/>
+          <a:ln/>
+        </p:spPr>
+        <p:txBody>
+          <a:bodyPr wrap="square" lIns="0" tIns="0" rIns="0" bIns="0" rtlCol="0" anchor="t"/>
+          <a:lstStyle/>
+          <a:p>
+            <a:pPr marL="0" indent="0">
+              <a:buNone/>
+            </a:pPr>
+            <a:r>
+              <a:rPr lang="en-US" sz="1500" dirty="0">
+                <a:solidFill>
+                  <a:schemeClr val="accent4"/>
+                </a:solidFill>
+              </a:rPr>
+              <a:t>A single JSON slip produced a blank PRD while the trace looked normal. Now a repair step and a safe fallback handle it.</a:t>
+            </a:r>
+            <a:endParaRPr lang="en-US" sz="1500" dirty="0"/>
+          </a:p>
+        </p:txBody>
+      </p:sp>
+      <p:sp>
+        <p:nvSpPr>
+          <p:cNvPr id="9" name="Lesson card 2"/>
+          <p:cNvSpPr/>
+          <p:nvPr/>
+        </p:nvSpPr>
+        <p:spPr>
+          <a:xfrm>
+            <a:off x="4370832" y="1783080"/>
+            <a:ext cx="3456432" cy="3657600"/>
+          </a:xfrm>
+          <a:prstGeom prst="roundRect">
+            <a:avLst>
+              <a:gd name="adj" fmla="val 3175"/>
+            </a:avLst>
+          </a:prstGeom>
+          <a:solidFill>
+            <a:schemeClr val="bg1"/>
+          </a:solidFill>
+          <a:ln/>
+          <a:effectLst>
+            <a:outerShdw blurRad="127000" dist="25400" dir="5400000" algn="bl" rotWithShape="0">
+              <a:srgbClr val="0F1E2E">
+                <a:alpha val="14000"/>
+              </a:srgbClr>
+            </a:outerShdw>
+          </a:effectLst>
+        </p:spPr>
+      </p:sp>
+      <p:sp>
+        <p:nvSpPr>
+          <p:cNvPr id="10" name="Lesson icon 2 circle"/>
+          <p:cNvSpPr/>
+          <p:nvPr/>
+        </p:nvSpPr>
+        <p:spPr>
+          <a:xfrm>
+            <a:off x="4690872" y="2103120"/>
+            <a:ext cx="731520" cy="731520"/>
+          </a:xfrm>
+          <a:prstGeom prst="ellipse">
+            <a:avLst/>
+          </a:prstGeom>
+          <a:solidFill>
+            <a:schemeClr val="accent1"/>
+          </a:solidFill>
+          <a:ln/>
+        </p:spPr>
+      </p:sp>
+      <p:pic>
+        <p:nvPicPr>
+          <p:cNvPr id="11" name="Lesson icon 2" descr="Lesson icon 2"/>
+          <p:cNvPicPr>
+            <a:picLocks noChangeAspect="1"/>
+          </p:cNvPicPr>
+          <p:nvPr/>
+        </p:nvPicPr>
+        <p:blipFill>
+          <a:blip r:embed="rId4"/>
+          <a:stretch>
+            <a:fillRect/>
+          </a:stretch>
+        </p:blipFill>
+        <p:spPr>
+          <a:xfrm>
+            <a:off x="4888382" y="2300630"/>
+            <a:ext cx="336499" cy="336499"/>
+          </a:xfrm>
+          <a:prstGeom prst="rect">
+            <a:avLst/>
+          </a:prstGeom>
+        </p:spPr>
+      </p:pic>
+      <p:sp>
+        <p:nvSpPr>
+          <p:cNvPr id="12" name="Lesson title 2"/>
+          <p:cNvSpPr txBox="1"/>
+          <p:nvPr/>
+        </p:nvSpPr>
+        <p:spPr>
+          <a:xfrm>
+            <a:off x="4690872" y="3108960"/>
+            <a:ext cx="2834640" cy="777240"/>
+          </a:xfrm>
+          <a:prstGeom prst="rect">
+            <a:avLst/>
+          </a:prstGeom>
+          <a:noFill/>
+          <a:ln/>
+        </p:spPr>
+        <p:txBody>
+          <a:bodyPr wrap="square" lIns="0" tIns="0" rIns="0" bIns="0" rtlCol="0" anchor="t"/>
+          <a:lstStyle/>
+          <a:p>
+            <a:pPr marL="0" indent="0">
+              <a:buNone/>
+            </a:pPr>
+            <a:r>
+              <a:rPr lang="en-US" sz="2100" b="1" dirty="0">
+                <a:solidFill>
+                  <a:schemeClr val="tx1"/>
+                </a:solidFill>
+              </a:rPr>
+              <a:t>A perfect score of nothing</a:t>
+            </a:r>
+            <a:endParaRPr lang="en-US" sz="2100" dirty="0"/>
+          </a:p>
+        </p:txBody>
+      </p:sp>
+      <p:sp>
+        <p:nvSpPr>
+          <p:cNvPr id="13" name="Lesson text 2"/>
+          <p:cNvSpPr txBox="1"/>
+          <p:nvPr/>
+        </p:nvSpPr>
+        <p:spPr>
+          <a:xfrm>
+            <a:off x="4690872" y="3931920"/>
+            <a:ext cx="2834640" cy="1371600"/>
+          </a:xfrm>
+          <a:prstGeom prst="rect">
+            <a:avLst/>
+          </a:prstGeom>
+          <a:noFill/>
+          <a:ln/>
+        </p:spPr>
+        <p:txBody>
+          <a:bodyPr wrap="square" lIns="0" tIns="0" rIns="0" bIns="0" rtlCol="0" anchor="t"/>
+          <a:lstStyle/>
+          <a:p>
+            <a:pPr marL="0" indent="0">
+              <a:buNone/>
+            </a:pPr>
+            <a:r>
+              <a:rPr lang="en-US" sz="1500" dirty="0">
+                <a:solidFill>
+                  <a:schemeClr val="accent4"/>
+                </a:solidFill>
+              </a:rPr>
+              <a:t>Zero stories out of zero scored 1.00. Now a broken run scores 0.</a:t>
+            </a:r>
+            <a:endParaRPr lang="en-US" sz="1500" dirty="0"/>
+          </a:p>
+        </p:txBody>
+      </p:sp>
+      <p:sp>
+        <p:nvSpPr>
+          <p:cNvPr id="14" name="Lesson card 3"/>
+          <p:cNvSpPr/>
+          <p:nvPr/>
+        </p:nvSpPr>
+        <p:spPr>
+          <a:xfrm>
+            <a:off x="8101584" y="1783080"/>
+            <a:ext cx="3456432" cy="3657600"/>
+          </a:xfrm>
+          <a:prstGeom prst="roundRect">
+            <a:avLst>
+              <a:gd name="adj" fmla="val 3175"/>
+            </a:avLst>
+          </a:prstGeom>
+          <a:solidFill>
+            <a:schemeClr val="bg1"/>
+          </a:solidFill>
+          <a:ln/>
+          <a:effectLst>
+            <a:outerShdw blurRad="127000" dist="25400" dir="5400000" algn="bl" rotWithShape="0">
+              <a:srgbClr val="0F1E2E">
+                <a:alpha val="14000"/>
+              </a:srgbClr>
+            </a:outerShdw>
+          </a:effectLst>
+        </p:spPr>
+      </p:sp>
+      <p:sp>
+        <p:nvSpPr>
+          <p:cNvPr id="15" name="Lesson icon 3 circle"/>
+          <p:cNvSpPr/>
+          <p:nvPr/>
+        </p:nvSpPr>
+        <p:spPr>
+          <a:xfrm>
+            <a:off x="8421624" y="2103120"/>
+            <a:ext cx="731520" cy="731520"/>
+          </a:xfrm>
+          <a:prstGeom prst="ellipse">
+            <a:avLst/>
+          </a:prstGeom>
+          <a:solidFill>
+            <a:schemeClr val="accent1"/>
+          </a:solidFill>
+          <a:ln/>
+        </p:spPr>
+      </p:sp>
+      <p:pic>
+        <p:nvPicPr>
+          <p:cNvPr id="16" name="Lesson icon 3" descr="Lesson icon 3"/>
+          <p:cNvPicPr>
+            <a:picLocks noChangeAspect="1"/>
+          </p:cNvPicPr>
+          <p:nvPr/>
+        </p:nvPicPr>
+        <p:blipFill>
+          <a:blip r:embed="rId5"/>
+          <a:stretch>
+            <a:fillRect/>
+          </a:stretch>
+        </p:blipFill>
+        <p:spPr>
+          <a:xfrm>
             <a:off x="8619134" y="2300630"/>
             <a:ext cx="336499" cy="336499"/>
           </a:xfrm>
@@ -8483,7 +8326,7 @@
           <a:bodyPr wrap="square" lIns="0" tIns="0" rIns="0" bIns="0" rtlCol="0" anchor="t"/>
           <a:lstStyle/>
           <a:p>
-            <a:pPr indent="0" marL="0">
+            <a:pPr marL="0" indent="0">
               <a:buNone/>
             </a:pPr>
             <a:r>
@@ -8519,7 +8362,7 @@
           <a:bodyPr wrap="square" lIns="0" tIns="0" rIns="0" bIns="0" rtlCol="0" anchor="t"/>
           <a:lstStyle/>
           <a:p>
-            <a:pPr indent="0" marL="0">
+            <a:pPr marL="0" indent="0">
               <a:buNone/>
             </a:pPr>
             <a:r>
@@ -8554,7 +8397,7 @@
           </a:prstGeom>
           <a:extLst>
             <a:ext uri="{C572A759-6A51-4108-AA02-DFA0A04FC94B}">
-              <ma14:wrappingTextBoxFlag xmlns:ma14="http://schemas.microsoft.com/office/mac/drawingml/2011/main" val="0"/>
+              <ma14:wrappingTextBoxFlag xmlns:ma14="http://schemas.microsoft.com/office/mac/drawingml/2011/main" xmlns="" val="0"/>
             </a:ext>
           </a:extLst>
         </p:spPr>
@@ -8572,7 +8415,7 @@
           <a:p>
             <a:pPr algn="r"/>
             <a:fld id="{F7021451-1387-4CA6-816F-3879F97B5CBC}" type="slidenum">
-              <a:rPr b="0" lang="en-US"/>
+              <a:rPr lang="en-US" b="0"/>
               <a:t>8</a:t>
             </a:fld>
             <a:endParaRPr lang="en-US"/>
@@ -8607,9 +8450,11 @@
       <p:sp>
         <p:nvSpPr>
           <p:cNvPr id="2" name="Text 1"/>
-          <p:cNvSpPr/>
+          <p:cNvSpPr>
+            <a:spLocks noGrp="1"/>
+          </p:cNvSpPr>
           <p:nvPr>
-            <p:ph idx="101" type="body" hasCustomPrompt="1"/>
+            <p:ph type="body" idx="101" hasCustomPrompt="1"/>
           </p:nvPr>
         </p:nvSpPr>
         <p:spPr>
@@ -8627,11 +8472,11 @@
           <a:bodyPr wrap="square" lIns="0" tIns="0" rIns="0" bIns="0" rtlCol="0" anchor="t"/>
           <a:lstStyle/>
           <a:p>
-            <a:pPr indent="0" marL="0">
-              <a:buNone/>
-            </a:pPr>
-            <a:r>
-              <a:rPr lang="en-US" sz="1300" b="1" spc="300" kern="0" dirty="0">
+            <a:pPr marL="0" indent="0">
+              <a:buNone/>
+            </a:pPr>
+            <a:r>
+              <a:rPr lang="en-US" sz="1300" b="1" kern="0" spc="300" dirty="0">
                 <a:solidFill>
                   <a:schemeClr val="accent2"/>
                 </a:solidFill>
@@ -8645,9 +8490,11 @@
       <p:sp>
         <p:nvSpPr>
           <p:cNvPr id="3" name="Text 1"/>
-          <p:cNvSpPr/>
+          <p:cNvSpPr>
+            <a:spLocks noGrp="1"/>
+          </p:cNvSpPr>
           <p:nvPr>
-            <p:ph idx="102" type="title" hasCustomPrompt="1"/>
+            <p:ph type="title" idx="102" hasCustomPrompt="1"/>
           </p:nvPr>
         </p:nvSpPr>
         <p:spPr>
@@ -8665,7 +8512,7 @@
           <a:bodyPr wrap="square" lIns="0" tIns="0" rIns="0" bIns="0" rtlCol="0" anchor="t"/>
           <a:lstStyle/>
           <a:p>
-            <a:pPr algn="l" indent="0" marL="0">
+            <a:pPr marL="0" indent="0" algn="l">
               <a:buNone/>
             </a:pPr>
             <a:r>
@@ -8701,7 +8548,7 @@
           <a:bodyPr wrap="square" lIns="0" tIns="0" rIns="0" bIns="0" rtlCol="0" anchor="ctr"/>
           <a:lstStyle/>
           <a:p>
-            <a:pPr indent="0" marL="0">
+            <a:pPr marL="0" indent="0">
               <a:buNone/>
             </a:pPr>
             <a:r>
@@ -8737,7 +8584,7 @@
           <a:bodyPr wrap="square" lIns="0" tIns="0" rIns="0" bIns="0" rtlCol="0" anchor="t"/>
           <a:lstStyle/>
           <a:p>
-            <a:pPr indent="0" marL="0">
+            <a:pPr marL="0" indent="0">
               <a:buNone/>
             </a:pPr>
             <a:r>
@@ -8795,11 +8642,11 @@
           <a:bodyPr wrap="square" lIns="0" tIns="0" rIns="0" bIns="0" rtlCol="0" anchor="t"/>
           <a:lstStyle/>
           <a:p>
-            <a:pPr indent="0" marL="0">
-              <a:buNone/>
-            </a:pPr>
-            <a:r>
-              <a:rPr lang="en-US" sz="1200" b="1" spc="200" kern="0" dirty="0">
+            <a:pPr marL="0" indent="0">
+              <a:buNone/>
+            </a:pPr>
+            <a:r>
+              <a:rPr lang="en-US" sz="1200" b="1" kern="0" spc="200" dirty="0">
                 <a:solidFill>
                   <a:schemeClr val="accent2"/>
                 </a:solidFill>
@@ -8831,7 +8678,7 @@
           <a:bodyPr wrap="square" lIns="0" tIns="0" rIns="0" bIns="0" rtlCol="0" anchor="t"/>
           <a:lstStyle/>
           <a:p>
-            <a:pPr indent="0" marL="0">
+            <a:pPr marL="0" indent="0">
               <a:buNone/>
             </a:pPr>
             <a:r>
@@ -8889,11 +8736,11 @@
           <a:bodyPr wrap="square" lIns="0" tIns="0" rIns="0" bIns="0" rtlCol="0" anchor="t"/>
           <a:lstStyle/>
           <a:p>
-            <a:pPr indent="0" marL="0">
-              <a:buNone/>
-            </a:pPr>
-            <a:r>
-              <a:rPr lang="en-US" sz="1200" b="1" spc="200" kern="0" dirty="0">
+            <a:pPr marL="0" indent="0">
+              <a:buNone/>
+            </a:pPr>
+            <a:r>
+              <a:rPr lang="en-US" sz="1200" b="1" kern="0" spc="200" dirty="0">
                 <a:solidFill>
                   <a:schemeClr val="accent2"/>
                 </a:solidFill>
@@ -8925,7 +8772,7 @@
           <a:bodyPr wrap="square" lIns="0" tIns="0" rIns="0" bIns="0" rtlCol="0" anchor="t"/>
           <a:lstStyle/>
           <a:p>
-            <a:pPr indent="0" marL="0">
+            <a:pPr marL="0" indent="0">
               <a:buNone/>
             </a:pPr>
             <a:r>
@@ -8983,11 +8830,11 @@
           <a:bodyPr wrap="square" lIns="0" tIns="0" rIns="0" bIns="0" rtlCol="0" anchor="t"/>
           <a:lstStyle/>
           <a:p>
-            <a:pPr indent="0" marL="0">
-              <a:buNone/>
-            </a:pPr>
-            <a:r>
-              <a:rPr lang="en-US" sz="1200" b="1" spc="200" kern="0" dirty="0">
+            <a:pPr marL="0" indent="0">
+              <a:buNone/>
+            </a:pPr>
+            <a:r>
+              <a:rPr lang="en-US" sz="1200" b="1" kern="0" spc="200" dirty="0">
                 <a:solidFill>
                   <a:schemeClr val="accent2"/>
                 </a:solidFill>
@@ -9019,7 +8866,7 @@
           <a:bodyPr wrap="square" lIns="0" tIns="0" rIns="0" bIns="0" rtlCol="0" anchor="t"/>
           <a:lstStyle/>
           <a:p>
-            <a:pPr indent="0" marL="0">
+            <a:pPr marL="0" indent="0">
               <a:buNone/>
             </a:pPr>
             <a:r>
@@ -9055,7 +8902,7 @@
           <a:bodyPr wrap="square" lIns="0" tIns="0" rIns="0" bIns="0" rtlCol="0" anchor="t"/>
           <a:lstStyle/>
           <a:p>
-            <a:pPr indent="0" marL="0">
+            <a:pPr marL="0" indent="0">
               <a:buNone/>
             </a:pPr>
             <a:r>
@@ -9090,7 +8937,7 @@
           </a:prstGeom>
           <a:extLst>
             <a:ext uri="{C572A759-6A51-4108-AA02-DFA0A04FC94B}">
-              <ma14:wrappingTextBoxFlag xmlns:ma14="http://schemas.microsoft.com/office/mac/drawingml/2011/main" val="0"/>
+              <ma14:wrappingTextBoxFlag xmlns:ma14="http://schemas.microsoft.com/office/mac/drawingml/2011/main" xmlns="" val="0"/>
             </a:ext>
           </a:extLst>
         </p:spPr>
@@ -9108,7 +8955,7 @@
           <a:p>
             <a:pPr algn="r"/>
             <a:fld id="{F7021451-1387-4CA6-816F-3879F97B5CBC}" type="slidenum">
-              <a:rPr b="0" lang="en-US"/>
+              <a:rPr lang="en-US" b="0"/>
               <a:t>9</a:t>
             </a:fld>
             <a:endParaRPr lang="en-US"/>
@@ -9416,4 +9263,299 @@
     </a:ext>
   </a:extLst>
 </a:theme>
+</file>
+
+<file path=ppt/theme/theme2.xml><?xml version="1.0" encoding="utf-8"?>
+<a:theme xmlns:a="http://schemas.openxmlformats.org/drawingml/2006/main" name="Office Theme">
+  <a:themeElements>
+    <a:clrScheme name="Office">
+      <a:dk1>
+        <a:sysClr val="windowText" lastClr="000000"/>
+      </a:dk1>
+      <a:lt1>
+        <a:sysClr val="window" lastClr="FFFFFF"/>
+      </a:lt1>
+      <a:dk2>
+        <a:srgbClr val="44546A"/>
+      </a:dk2>
+      <a:lt2>
+        <a:srgbClr val="E7E6E6"/>
+      </a:lt2>
+      <a:accent1>
+        <a:srgbClr val="4472C4"/>
+      </a:accent1>
+      <a:accent2>
+        <a:srgbClr val="ED7D31"/>
+      </a:accent2>
+      <a:accent3>
+        <a:srgbClr val="A5A5A5"/>
+      </a:accent3>
+      <a:accent4>
+        <a:srgbClr val="FFC000"/>
+      </a:accent4>
+      <a:accent5>
+        <a:srgbClr val="5B9BD5"/>
+      </a:accent5>
+      <a:accent6>
+        <a:srgbClr val="70AD47"/>
+      </a:accent6>
+      <a:hlink>
+        <a:srgbClr val="0563C1"/>
+      </a:hlink>
+      <a:folHlink>
+        <a:srgbClr val="954F72"/>
+      </a:folHlink>
+    </a:clrScheme>
+    <a:fontScheme name="Office">
+      <a:majorFont>
+        <a:latin typeface="Calibri Light" panose="020F0302020204030204"/>
+        <a:ea typeface=""/>
+        <a:cs typeface=""/>
+        <a:font script="Jpan" typeface="游ゴシック Light"/>
+        <a:font script="Hang" typeface="맑은 고딕"/>
+        <a:font script="Hans" typeface="等线 Light"/>
+        <a:font script="Hant" typeface="新細明體"/>
+        <a:font script="Arab" typeface="Times New Roman"/>
+        <a:font script="Hebr" typeface="Times New Roman"/>
+        <a:font script="Thai" typeface="Angsana New"/>
+        <a:font script="Ethi" typeface="Nyala"/>
+        <a:font script="Beng" typeface="Vrinda"/>
+        <a:font script="Gujr" typeface="Shruti"/>
+        <a:font script="Khmr" typeface="MoolBoran"/>
+        <a:font script="Knda" typeface="Tunga"/>
+        <a:font script="Guru" typeface="Raavi"/>
+        <a:font script="Cans" typeface="Euphemia"/>
+        <a:font script="Cher" typeface="Plantagenet Cherokee"/>
+        <a:font script="Yiii" typeface="Microsoft Yi Baiti"/>
+        <a:font script="Tibt" typeface="Microsoft Himalaya"/>
+        <a:font script="Thaa" typeface="MV Boli"/>
+        <a:font script="Deva" typeface="Mangal"/>
+        <a:font script="Telu" typeface="Gautami"/>
+        <a:font script="Taml" typeface="Latha"/>
+        <a:font script="Syrc" typeface="Estrangelo Edessa"/>
+        <a:font script="Orya" typeface="Kalinga"/>
+        <a:font script="Mlym" typeface="Kartika"/>
+        <a:font script="Laoo" typeface="DokChampa"/>
+        <a:font script="Sinh" typeface="Iskoola Pota"/>
+        <a:font script="Mong" typeface="Mongolian Baiti"/>
+        <a:font script="Viet" typeface="Times New Roman"/>
+        <a:font script="Uigh" typeface="Microsoft Uighur"/>
+        <a:font script="Geor" typeface="Sylfaen"/>
+        <a:font script="Armn" typeface="Arial"/>
+        <a:font script="Bugi" typeface="Leelawadee UI"/>
+        <a:font script="Bopo" typeface="Microsoft JhengHei"/>
+        <a:font script="Java" typeface="Javanese Text"/>
+        <a:font script="Lisu" typeface="Segoe UI"/>
+        <a:font script="Mymr" typeface="Myanmar Text"/>
+        <a:font script="Nkoo" typeface="Ebrima"/>
+        <a:font script="Olck" typeface="Nirmala UI"/>
+        <a:font script="Osma" typeface="Ebrima"/>
+        <a:font script="Phag" typeface="Phagspa"/>
+        <a:font script="Syrn" typeface="Estrangelo Edessa"/>
+        <a:font script="Syrj" typeface="Estrangelo Edessa"/>
+        <a:font script="Syre" typeface="Estrangelo Edessa"/>
+        <a:font script="Sora" typeface="Nirmala UI"/>
+        <a:font script="Tale" typeface="Microsoft Tai Le"/>
+        <a:font script="Talu" typeface="Microsoft New Tai Lue"/>
+        <a:font script="Tfng" typeface="Ebrima"/>
+      </a:majorFont>
+      <a:minorFont>
+        <a:latin typeface="Calibri" panose="020F0502020204030204"/>
+        <a:ea typeface=""/>
+        <a:cs typeface=""/>
+        <a:font script="Jpan" typeface="游ゴシック"/>
+        <a:font script="Hang" typeface="맑은 고딕"/>
+        <a:font script="Hans" typeface="等线"/>
+        <a:font script="Hant" typeface="新細明體"/>
+        <a:font script="Arab" typeface="Arial"/>
+        <a:font script="Hebr" typeface="Arial"/>
+        <a:font script="Thai" typeface="Cordia New"/>
+        <a:font script="Ethi" typeface="Nyala"/>
+        <a:font script="Beng" typeface="Vrinda"/>
+        <a:font script="Gujr" typeface="Shruti"/>
+        <a:font script="Khmr" typeface="DaunPenh"/>
+        <a:font script="Knda" typeface="Tunga"/>
+        <a:font script="Guru" typeface="Raavi"/>
+        <a:font script="Cans" typeface="Euphemia"/>
+        <a:font script="Cher" typeface="Plantagenet Cherokee"/>
+        <a:font script="Yiii" typeface="Microsoft Yi Baiti"/>
+        <a:font script="Tibt" typeface="Microsoft Himalaya"/>
+        <a:font script="Thaa" typeface="MV Boli"/>
+        <a:font script="Deva" typeface="Mangal"/>
+        <a:font script="Telu" typeface="Gautami"/>
+        <a:font script="Taml" typeface="Latha"/>
+        <a:font script="Syrc" typeface="Estrangelo Edessa"/>
+        <a:font script="Orya" typeface="Kalinga"/>
+        <a:font script="Mlym" typeface="Kartika"/>
+        <a:font script="Laoo" typeface="DokChampa"/>
+        <a:font script="Sinh" typeface="Iskoola Pota"/>
+        <a:font script="Mong" typeface="Mongolian Baiti"/>
+        <a:font script="Viet" typeface="Arial"/>
+        <a:font script="Uigh" typeface="Microsoft Uighur"/>
+        <a:font script="Geor" typeface="Sylfaen"/>
+        <a:font script="Armn" typeface="Arial"/>
+        <a:font script="Bugi" typeface="Leelawadee UI"/>
+        <a:font script="Bopo" typeface="Microsoft JhengHei"/>
+        <a:font script="Java" typeface="Javanese Text"/>
+        <a:font script="Lisu" typeface="Segoe UI"/>
+        <a:font script="Mymr" typeface="Myanmar Text"/>
+        <a:font script="Nkoo" typeface="Ebrima"/>
+        <a:font script="Olck" typeface="Nirmala UI"/>
+        <a:font script="Osma" typeface="Ebrima"/>
+        <a:font script="Phag" typeface="Phagspa"/>
+        <a:font script="Syrn" typeface="Estrangelo Edessa"/>
+        <a:font script="Syrj" typeface="Estrangelo Edessa"/>
+        <a:font script="Syre" typeface="Estrangelo Edessa"/>
+        <a:font script="Sora" typeface="Nirmala UI"/>
+        <a:font script="Tale" typeface="Microsoft Tai Le"/>
+        <a:font script="Talu" typeface="Microsoft New Tai Lue"/>
+        <a:font script="Tfng" typeface="Ebrima"/>
+      </a:minorFont>
+    </a:fontScheme>
+    <a:fmtScheme name="Office">
+      <a:fillStyleLst>
+        <a:solidFill>
+          <a:schemeClr val="phClr"/>
+        </a:solidFill>
+        <a:gradFill rotWithShape="1">
+          <a:gsLst>
+            <a:gs pos="0">
+              <a:schemeClr val="phClr">
+                <a:lumMod val="110000"/>
+                <a:satMod val="105000"/>
+                <a:tint val="67000"/>
+              </a:schemeClr>
+            </a:gs>
+            <a:gs pos="50000">
+              <a:schemeClr val="phClr">
+                <a:lumMod val="105000"/>
+                <a:satMod val="103000"/>
+                <a:tint val="73000"/>
+              </a:schemeClr>
+            </a:gs>
+            <a:gs pos="100000">
+              <a:schemeClr val="phClr">
+                <a:lumMod val="105000"/>
+                <a:satMod val="109000"/>
+                <a:tint val="81000"/>
+              </a:schemeClr>
+            </a:gs>
+          </a:gsLst>
+          <a:lin ang="5400000" scaled="0"/>
+        </a:gradFill>
+        <a:gradFill rotWithShape="1">
+          <a:gsLst>
+            <a:gs pos="0">
+              <a:schemeClr val="phClr">
+                <a:satMod val="103000"/>
+                <a:lumMod val="102000"/>
+                <a:tint val="94000"/>
+              </a:schemeClr>
+            </a:gs>
+            <a:gs pos="50000">
+              <a:schemeClr val="phClr">
+                <a:satMod val="110000"/>
+                <a:lumMod val="100000"/>
+                <a:shade val="100000"/>
+              </a:schemeClr>
+            </a:gs>
+            <a:gs pos="100000">
+              <a:schemeClr val="phClr">
+                <a:lumMod val="99000"/>
+                <a:satMod val="120000"/>
+                <a:shade val="78000"/>
+              </a:schemeClr>
+            </a:gs>
+          </a:gsLst>
+          <a:lin ang="5400000" scaled="0"/>
+        </a:gradFill>
+      </a:fillStyleLst>
+      <a:lnStyleLst>
+        <a:ln w="6350" cap="flat" cmpd="sng" algn="ctr">
+          <a:solidFill>
+            <a:schemeClr val="phClr"/>
+          </a:solidFill>
+          <a:prstDash val="solid"/>
+          <a:miter lim="800000"/>
+        </a:ln>
+        <a:ln w="12700" cap="flat" cmpd="sng" algn="ctr">
+          <a:solidFill>
+            <a:schemeClr val="phClr"/>
+          </a:solidFill>
+          <a:prstDash val="solid"/>
+          <a:miter lim="800000"/>
+        </a:ln>
+        <a:ln w="19050" cap="flat" cmpd="sng" algn="ctr">
+          <a:solidFill>
+            <a:schemeClr val="phClr"/>
+          </a:solidFill>
+          <a:prstDash val="solid"/>
+          <a:miter lim="800000"/>
+        </a:ln>
+      </a:lnStyleLst>
+      <a:effectStyleLst>
+        <a:effectStyle>
+          <a:effectLst/>
+        </a:effectStyle>
+        <a:effectStyle>
+          <a:effectLst/>
+        </a:effectStyle>
+        <a:effectStyle>
+          <a:effectLst>
+            <a:outerShdw blurRad="57150" dist="19050" dir="5400000" algn="ctr" rotWithShape="0">
+              <a:srgbClr val="000000">
+                <a:alpha val="63000"/>
+              </a:srgbClr>
+            </a:outerShdw>
+          </a:effectLst>
+        </a:effectStyle>
+      </a:effectStyleLst>
+      <a:bgFillStyleLst>
+        <a:solidFill>
+          <a:schemeClr val="phClr"/>
+        </a:solidFill>
+        <a:solidFill>
+          <a:schemeClr val="phClr">
+            <a:tint val="95000"/>
+            <a:satMod val="170000"/>
+          </a:schemeClr>
+        </a:solidFill>
+        <a:gradFill rotWithShape="1">
+          <a:gsLst>
+            <a:gs pos="0">
+              <a:schemeClr val="phClr">
+                <a:tint val="93000"/>
+                <a:satMod val="150000"/>
+                <a:shade val="98000"/>
+                <a:lumMod val="102000"/>
+              </a:schemeClr>
+            </a:gs>
+            <a:gs pos="50000">
+              <a:schemeClr val="phClr">
+                <a:tint val="98000"/>
+                <a:satMod val="130000"/>
+                <a:shade val="90000"/>
+                <a:lumMod val="103000"/>
+              </a:schemeClr>
+            </a:gs>
+            <a:gs pos="100000">
+              <a:schemeClr val="phClr">
+                <a:shade val="63000"/>
+                <a:satMod val="120000"/>
+              </a:schemeClr>
+            </a:gs>
+          </a:gsLst>
+          <a:lin ang="5400000" scaled="0"/>
+        </a:gradFill>
+      </a:bgFillStyleLst>
+    </a:fmtScheme>
+  </a:themeElements>
+  <a:objectDefaults/>
+  <a:extraClrSchemeLst/>
+  <a:extLst>
+    <a:ext uri="{05A4C25C-085E-4340-85A3-A5531E510DB2}">
+      <thm15:themeFamily xmlns:thm15="http://schemas.microsoft.com/office/thememl/2012/main" name="Office Theme" id="{62F939B6-93AF-4DB8-9C6B-D6C7DFDC589F}" vid="{4A3C46E8-61CC-4603-A589-7422A47A8E4A}"/>
+    </a:ext>
+  </a:extLst>
+</a:theme>
 </file>
--- a/deck/PRD_Genie_Capstone_Deck.pptx
+++ b/deck/PRD_Genie_Capstone_Deck.pptx
@@ -1339,7 +1339,7 @@
           </a:prstGeom>
           <a:extLst>
             <a:ext uri="{C572A759-6A51-4108-AA02-DFA0A04FC94B}">
-              <ma14:wrappingTextBoxFlag xmlns:ma14="http://schemas.microsoft.com/office/mac/drawingml/2011/main" xmlns="" val="0"/>
+              <ma14:wrappingTextBoxFlag xmlns="" xmlns:ma14="http://schemas.microsoft.com/office/mac/drawingml/2011/main" val="0"/>
             </a:ext>
           </a:extLst>
         </p:spPr>
@@ -1535,7 +1535,7 @@
           </a:prstGeom>
           <a:extLst>
             <a:ext uri="{C572A759-6A51-4108-AA02-DFA0A04FC94B}">
-              <ma14:wrappingTextBoxFlag xmlns:ma14="http://schemas.microsoft.com/office/mac/drawingml/2011/main" xmlns="" val="0"/>
+              <ma14:wrappingTextBoxFlag xmlns="" xmlns:ma14="http://schemas.microsoft.com/office/mac/drawingml/2011/main" val="0"/>
             </a:ext>
           </a:extLst>
         </p:spPr>
@@ -1846,7 +1846,7 @@
           </a:prstGeom>
           <a:extLst>
             <a:ext uri="{C572A759-6A51-4108-AA02-DFA0A04FC94B}">
-              <ma14:wrappingTextBoxFlag xmlns:ma14="http://schemas.microsoft.com/office/mac/drawingml/2011/main" xmlns="" val="0"/>
+              <ma14:wrappingTextBoxFlag xmlns="" xmlns:ma14="http://schemas.microsoft.com/office/mac/drawingml/2011/main" val="0"/>
             </a:ext>
           </a:extLst>
         </p:spPr>
@@ -1921,7 +1921,7 @@
           </a:prstGeom>
           <a:extLst>
             <a:ext uri="{C572A759-6A51-4108-AA02-DFA0A04FC94B}">
-              <ma14:wrappingTextBoxFlag xmlns:ma14="http://schemas.microsoft.com/office/mac/drawingml/2011/main" xmlns="" val="0"/>
+              <ma14:wrappingTextBoxFlag xmlns="" xmlns:ma14="http://schemas.microsoft.com/office/mac/drawingml/2011/main" val="0"/>
             </a:ext>
           </a:extLst>
         </p:spPr>
@@ -3048,7 +3048,7 @@
           </a:prstGeom>
           <a:extLst>
             <a:ext uri="{C572A759-6A51-4108-AA02-DFA0A04FC94B}">
-              <ma14:wrappingTextBoxFlag xmlns:ma14="http://schemas.microsoft.com/office/mac/drawingml/2011/main" xmlns="" val="0"/>
+              <ma14:wrappingTextBoxFlag xmlns="" xmlns:ma14="http://schemas.microsoft.com/office/mac/drawingml/2011/main" val="0"/>
             </a:ext>
           </a:extLst>
         </p:spPr>
@@ -3814,7 +3814,7 @@
           </a:prstGeom>
           <a:extLst>
             <a:ext uri="{C572A759-6A51-4108-AA02-DFA0A04FC94B}">
-              <ma14:wrappingTextBoxFlag xmlns:ma14="http://schemas.microsoft.com/office/mac/drawingml/2011/main" xmlns="" val="0"/>
+              <ma14:wrappingTextBoxFlag xmlns="" xmlns:ma14="http://schemas.microsoft.com/office/mac/drawingml/2011/main" val="0"/>
             </a:ext>
           </a:extLst>
         </p:spPr>
@@ -4582,7 +4582,7 @@
           </a:prstGeom>
           <a:extLst>
             <a:ext uri="{C572A759-6A51-4108-AA02-DFA0A04FC94B}">
-              <ma14:wrappingTextBoxFlag xmlns:ma14="http://schemas.microsoft.com/office/mac/drawingml/2011/main" xmlns="" val="0"/>
+              <ma14:wrappingTextBoxFlag xmlns="" xmlns:ma14="http://schemas.microsoft.com/office/mac/drawingml/2011/main" val="0"/>
             </a:ext>
           </a:extLst>
         </p:spPr>
@@ -5780,7 +5780,7 @@
           </a:prstGeom>
           <a:extLst>
             <a:ext uri="{C572A759-6A51-4108-AA02-DFA0A04FC94B}">
-              <ma14:wrappingTextBoxFlag xmlns:ma14="http://schemas.microsoft.com/office/mac/drawingml/2011/main" xmlns="" val="0"/>
+              <ma14:wrappingTextBoxFlag xmlns="" xmlns:ma14="http://schemas.microsoft.com/office/mac/drawingml/2011/main" val="0"/>
             </a:ext>
           </a:extLst>
         </p:spPr>
@@ -6510,7 +6510,7 @@
           </a:prstGeom>
           <a:extLst>
             <a:ext uri="{C572A759-6A51-4108-AA02-DFA0A04FC94B}">
-              <ma14:wrappingTextBoxFlag xmlns:ma14="http://schemas.microsoft.com/office/mac/drawingml/2011/main" xmlns="" val="0"/>
+              <ma14:wrappingTextBoxFlag xmlns="" xmlns:ma14="http://schemas.microsoft.com/office/mac/drawingml/2011/main" val="0"/>
             </a:ext>
           </a:extLst>
         </p:spPr>
@@ -7279,7 +7279,7 @@
           </a:prstGeom>
           <a:extLst>
             <a:ext uri="{C572A759-6A51-4108-AA02-DFA0A04FC94B}">
-              <ma14:wrappingTextBoxFlag xmlns:ma14="http://schemas.microsoft.com/office/mac/drawingml/2011/main" xmlns="" val="0"/>
+              <ma14:wrappingTextBoxFlag xmlns="" xmlns:ma14="http://schemas.microsoft.com/office/mac/drawingml/2011/main" val="0"/>
             </a:ext>
           </a:extLst>
         </p:spPr>
@@ -7812,7 +7812,7 @@
           </a:prstGeom>
           <a:extLst>
             <a:ext uri="{C572A759-6A51-4108-AA02-DFA0A04FC94B}">
-              <ma14:wrappingTextBoxFlag xmlns:ma14="http://schemas.microsoft.com/office/mac/drawingml/2011/main" xmlns="" val="0"/>
+              <ma14:wrappingTextBoxFlag xmlns="" xmlns:ma14="http://schemas.microsoft.com/office/mac/drawingml/2011/main" val="0"/>
             </a:ext>
           </a:extLst>
         </p:spPr>
@@ -8397,7 +8397,7 @@
           </a:prstGeom>
           <a:extLst>
             <a:ext uri="{C572A759-6A51-4108-AA02-DFA0A04FC94B}">
-              <ma14:wrappingTextBoxFlag xmlns:ma14="http://schemas.microsoft.com/office/mac/drawingml/2011/main" xmlns="" val="0"/>
+              <ma14:wrappingTextBoxFlag xmlns="" xmlns:ma14="http://schemas.microsoft.com/office/mac/drawingml/2011/main" val="0"/>
             </a:ext>
           </a:extLst>
         </p:spPr>
@@ -8937,7 +8937,7 @@
           </a:prstGeom>
           <a:extLst>
             <a:ext uri="{C572A759-6A51-4108-AA02-DFA0A04FC94B}">
-              <ma14:wrappingTextBoxFlag xmlns:ma14="http://schemas.microsoft.com/office/mac/drawingml/2011/main" xmlns="" val="0"/>
+              <ma14:wrappingTextBoxFlag xmlns="" xmlns:ma14="http://schemas.microsoft.com/office/mac/drawingml/2011/main" val="0"/>
             </a:ext>
           </a:extLst>
         </p:spPr>

--- a/deck/PRD_Genie_Capstone_Deck.pptx
+++ b/deck/PRD_Genie_Capstone_Deck.pptx
@@ -1339,7 +1339,7 @@
           </a:prstGeom>
           <a:extLst>
             <a:ext uri="{C572A759-6A51-4108-AA02-DFA0A04FC94B}">
-              <ma14:wrappingTextBoxFlag xmlns="" xmlns:ma14="http://schemas.microsoft.com/office/mac/drawingml/2011/main" val="0"/>
+              <ma14:wrappingTextBoxFlag xmlns:ma14="http://schemas.microsoft.com/office/mac/drawingml/2011/main" xmlns="" val="0"/>
             </a:ext>
           </a:extLst>
         </p:spPr>
@@ -1535,7 +1535,7 @@
           </a:prstGeom>
           <a:extLst>
             <a:ext uri="{C572A759-6A51-4108-AA02-DFA0A04FC94B}">
-              <ma14:wrappingTextBoxFlag xmlns="" xmlns:ma14="http://schemas.microsoft.com/office/mac/drawingml/2011/main" val="0"/>
+              <ma14:wrappingTextBoxFlag xmlns:ma14="http://schemas.microsoft.com/office/mac/drawingml/2011/main" xmlns="" val="0"/>
             </a:ext>
           </a:extLst>
         </p:spPr>
@@ -1846,7 +1846,7 @@
           </a:prstGeom>
           <a:extLst>
             <a:ext uri="{C572A759-6A51-4108-AA02-DFA0A04FC94B}">
-              <ma14:wrappingTextBoxFlag xmlns="" xmlns:ma14="http://schemas.microsoft.com/office/mac/drawingml/2011/main" val="0"/>
+              <ma14:wrappingTextBoxFlag xmlns:ma14="http://schemas.microsoft.com/office/mac/drawingml/2011/main" xmlns="" val="0"/>
             </a:ext>
           </a:extLst>
         </p:spPr>
@@ -1921,7 +1921,7 @@
           </a:prstGeom>
           <a:extLst>
             <a:ext uri="{C572A759-6A51-4108-AA02-DFA0A04FC94B}">
-              <ma14:wrappingTextBoxFlag xmlns="" xmlns:ma14="http://schemas.microsoft.com/office/mac/drawingml/2011/main" val="0"/>
+              <ma14:wrappingTextBoxFlag xmlns:ma14="http://schemas.microsoft.com/office/mac/drawingml/2011/main" xmlns="" val="0"/>
             </a:ext>
           </a:extLst>
         </p:spPr>
@@ -2749,24 +2749,6 @@
                   <a:schemeClr val="accent4"/>
                 </a:solidFill>
               </a:rPr>
-              <a:t>The human approval step is designed, not built.</a:t>
-            </a:r>
-            <a:endParaRPr lang="en-US" sz="1800" dirty="0"/>
-          </a:p>
-          <a:p>
-            <a:pPr marL="342900" indent="-342900">
-              <a:spcAft>
-                <a:spcPts val="600"/>
-              </a:spcAft>
-              <a:buSzPct val="100000"/>
-              <a:buChar char="•"/>
-            </a:pPr>
-            <a:r>
-              <a:rPr lang="en-US" sz="1800" dirty="0">
-                <a:solidFill>
-                  <a:schemeClr val="accent4"/>
-                </a:solidFill>
-              </a:rPr>
               <a:t>The Drive path is not in the automated suite.</a:t>
             </a:r>
             <a:endParaRPr lang="en-US" sz="1800" dirty="0"/>
@@ -2916,7 +2898,7 @@
                   <a:schemeClr val="accent4"/>
                 </a:solidFill>
               </a:rPr>
-              <a:t>Add an approval step before PRD generation.</a:t>
+              <a:t>Build a held-out set from anonymized real transcripts.</a:t>
             </a:r>
             <a:endParaRPr lang="en-US" sz="1800" dirty="0"/>
           </a:p>
@@ -2934,7 +2916,7 @@
                   <a:schemeClr val="accent4"/>
                 </a:solidFill>
               </a:rPr>
-              <a:t>Build a held-out set from anonymized real transcripts.</a:t>
+              <a:t>Move tracing to OpenTelemetry before 16 November 2026.</a:t>
             </a:r>
             <a:endParaRPr lang="en-US" sz="1800" dirty="0"/>
           </a:p>
@@ -2952,25 +2934,7 @@
                   <a:schemeClr val="accent4"/>
                 </a:solidFill>
               </a:rPr>
-              <a:t>Move tracing to OpenTelemetry before 16 November 2026.</a:t>
-            </a:r>
-            <a:endParaRPr lang="en-US" sz="1800" dirty="0"/>
-          </a:p>
-          <a:p>
-            <a:pPr marL="342900" indent="-342900">
-              <a:spcAft>
-                <a:spcPts val="600"/>
-              </a:spcAft>
-              <a:buSzPct val="100000"/>
-              <a:buChar char="•"/>
-            </a:pPr>
-            <a:r>
-              <a:rPr lang="en-US" sz="1800" dirty="0">
-                <a:solidFill>
-                  <a:schemeClr val="accent4"/>
-                </a:solidFill>
-              </a:rPr>
-              <a:t>Split multi-meeting files before processing.</a:t>
+              <a:t>Split multi-meeting/muti-transcript files before processing.</a:t>
             </a:r>
             <a:endParaRPr lang="en-US" sz="1800" dirty="0"/>
           </a:p>
@@ -3048,7 +3012,7 @@
           </a:prstGeom>
           <a:extLst>
             <a:ext uri="{C572A759-6A51-4108-AA02-DFA0A04FC94B}">
-              <ma14:wrappingTextBoxFlag xmlns="" xmlns:ma14="http://schemas.microsoft.com/office/mac/drawingml/2011/main" val="0"/>
+              <ma14:wrappingTextBoxFlag xmlns:ma14="http://schemas.microsoft.com/office/mac/drawingml/2011/main" xmlns="" val="0"/>
             </a:ext>
           </a:extLst>
         </p:spPr>
@@ -3814,7 +3778,7 @@
           </a:prstGeom>
           <a:extLst>
             <a:ext uri="{C572A759-6A51-4108-AA02-DFA0A04FC94B}">
-              <ma14:wrappingTextBoxFlag xmlns="" xmlns:ma14="http://schemas.microsoft.com/office/mac/drawingml/2011/main" val="0"/>
+              <ma14:wrappingTextBoxFlag xmlns:ma14="http://schemas.microsoft.com/office/mac/drawingml/2011/main" xmlns="" val="0"/>
             </a:ext>
           </a:extLst>
         </p:spPr>
@@ -4582,7 +4546,7 @@
           </a:prstGeom>
           <a:extLst>
             <a:ext uri="{C572A759-6A51-4108-AA02-DFA0A04FC94B}">
-              <ma14:wrappingTextBoxFlag xmlns="" xmlns:ma14="http://schemas.microsoft.com/office/mac/drawingml/2011/main" val="0"/>
+              <ma14:wrappingTextBoxFlag xmlns:ma14="http://schemas.microsoft.com/office/mac/drawingml/2011/main" xmlns="" val="0"/>
             </a:ext>
           </a:extLst>
         </p:spPr>
@@ -5780,7 +5744,7 @@
           </a:prstGeom>
           <a:extLst>
             <a:ext uri="{C572A759-6A51-4108-AA02-DFA0A04FC94B}">
-              <ma14:wrappingTextBoxFlag xmlns="" xmlns:ma14="http://schemas.microsoft.com/office/mac/drawingml/2011/main" val="0"/>
+              <ma14:wrappingTextBoxFlag xmlns:ma14="http://schemas.microsoft.com/office/mac/drawingml/2011/main" xmlns="" val="0"/>
             </a:ext>
           </a:extLst>
         </p:spPr>
@@ -6510,7 +6474,7 @@
           </a:prstGeom>
           <a:extLst>
             <a:ext uri="{C572A759-6A51-4108-AA02-DFA0A04FC94B}">
-              <ma14:wrappingTextBoxFlag xmlns="" xmlns:ma14="http://schemas.microsoft.com/office/mac/drawingml/2011/main" val="0"/>
+              <ma14:wrappingTextBoxFlag xmlns:ma14="http://schemas.microsoft.com/office/mac/drawingml/2011/main" xmlns="" val="0"/>
             </a:ext>
           </a:extLst>
         </p:spPr>
@@ -7279,7 +7243,7 @@
           </a:prstGeom>
           <a:extLst>
             <a:ext uri="{C572A759-6A51-4108-AA02-DFA0A04FC94B}">
-              <ma14:wrappingTextBoxFlag xmlns="" xmlns:ma14="http://schemas.microsoft.com/office/mac/drawingml/2011/main" val="0"/>
+              <ma14:wrappingTextBoxFlag xmlns:ma14="http://schemas.microsoft.com/office/mac/drawingml/2011/main" xmlns="" val="0"/>
             </a:ext>
           </a:extLst>
         </p:spPr>
@@ -7812,7 +7776,7 @@
           </a:prstGeom>
           <a:extLst>
             <a:ext uri="{C572A759-6A51-4108-AA02-DFA0A04FC94B}">
-              <ma14:wrappingTextBoxFlag xmlns="" xmlns:ma14="http://schemas.microsoft.com/office/mac/drawingml/2011/main" val="0"/>
+              <ma14:wrappingTextBoxFlag xmlns:ma14="http://schemas.microsoft.com/office/mac/drawingml/2011/main" xmlns="" val="0"/>
             </a:ext>
           </a:extLst>
         </p:spPr>
@@ -8397,7 +8361,7 @@
           </a:prstGeom>
           <a:extLst>
             <a:ext uri="{C572A759-6A51-4108-AA02-DFA0A04FC94B}">
-              <ma14:wrappingTextBoxFlag xmlns="" xmlns:ma14="http://schemas.microsoft.com/office/mac/drawingml/2011/main" val="0"/>
+              <ma14:wrappingTextBoxFlag xmlns:ma14="http://schemas.microsoft.com/office/mac/drawingml/2011/main" xmlns="" val="0"/>
             </a:ext>
           </a:extLst>
         </p:spPr>
@@ -8937,7 +8901,7 @@
           </a:prstGeom>
           <a:extLst>
             <a:ext uri="{C572A759-6A51-4108-AA02-DFA0A04FC94B}">
-              <ma14:wrappingTextBoxFlag xmlns="" xmlns:ma14="http://schemas.microsoft.com/office/mac/drawingml/2011/main" val="0"/>
+              <ma14:wrappingTextBoxFlag xmlns:ma14="http://schemas.microsoft.com/office/mac/drawingml/2011/main" xmlns="" val="0"/>
             </a:ext>
           </a:extLst>
         </p:spPr>
